--- a/reports/presentation_handoff/presentation.pptx
+++ b/reports/presentation_handoff/presentation.pptx
@@ -36,6 +36,7 @@
     <p:sldId id="273" r:id="rId11"/>
     <p:sldId id="274" r:id="rId10"/>
     <p:sldId id="275" r:id="rId9"/>
+    <p:sldId id="276" r:id="rId8"/>
   </p:sldIdLst>
   <p:sldSz cx="9144000" cy="5143500" type="screen16x9"/>
   <p:notesSz cx="9925050" cy="6665913"/>
@@ -1807,7 +1808,7 @@
           <a:lstStyle/>
           <a:p>
             <a:r>
-              <a:t>Good morning everyone. Today I'm presenting my project “Learning which VRP solver works best”. The one-sentence summary: instead of picking one heuristic for the vehicle routing problem and hoping it's good, I trained a machine-learning model that looks at an instance first and then predicts which of five classical heuristics will solve it best within a fixed time budget. The methodology follows a 2024 paper by Asín-Achá, Espinoza, Goldschmidt, Hochbaum and Huerta in Networks, scaled to a student project. I'll walk from the problem, through the pipeline, to the results — including an honest out-of-distribution test on real benchmarks and a speed-versus-quality extension.</a:t>
+              <a:t>Good morning everyone. Today we're presenting our project “Learning which VRP solver works best”. The one-sentence summary: instead of picking one heuristic for the vehicle routing problem and hoping it's good, we trained a machine-learning model that looks at an instance first and then predicts which of five classical heuristics will solve it best within a fixed time budget. The methodology follows a 2024 paper by Asín-Achá, Espinoza, Goldschmidt, Hochbaum and Huerta in Networks, scaled to a student project. We'll walk from the problem, through the pipeline, to the results — with particular attention to the features we engineered and what they reveal about solver behavior — plus an honest out-of-distribution test on real benchmarks and a speed-versus-quality extension.</a:t>
             </a:r>
           </a:p>
         </p:txBody>
@@ -1877,7 +1878,7 @@
           <a:lstStyle/>
           <a:p>
             <a:r>
-              <a:t>The main result. I trained four model families with dummy-classifier sanity baselines; Random Forest came out best, same as in the paper. The chart shows the share of test instances where the chosen solver lands within one percent of the best possible portfolio result. The no-ML baseline manages that on 45 percent of instances. Random Forest: 63 percent. Mean regret drops from 1.67 to 1.24 percent. On the m-hat scale, that's 0.741 — the selector closes about a quarter of the gap between the baseline and the oracle. Now, you might ask: only 40 percent classification accuracy? Yes — and that's fine. Several solvers are often nearly tied, so a misclassification is usually cheap. What matters is route quality, not label accuracy. One instructive detail: the plain Decision Tree has m-hat above one — a weak selector is actively worse than no selector. Learning has to earn its place.</a:t>
+              <a:t>The main result. We trained four model families with dummy-classifier sanity baselines; Random Forest came out best, same as in the paper. The chart shows the share of test instances where the chosen solver lands within one percent of the best possible portfolio result. The no-ML baseline manages that on 45 percent of instances. Random Forest: 63 percent. Mean regret drops from 1.67 to 1.24 percent. On the m-hat scale, that's 0.741 — the selector closes about a quarter of the gap between the baseline and the oracle. Now, you might ask: only 40 percent classification accuracy? Yes — and that's fine. Several solvers are often nearly tied, so a misclassification is usually cheap. What matters is route quality, not label accuracy. One instructive detail: the plain Decision Tree has m-hat above one — a weak selector is actively worse than no selector. Learning has to earn its place.</a:t>
             </a:r>
           </a:p>
         </p:txBody>
@@ -1947,7 +1948,7 @@
           <a:lstStyle/>
           <a:p>
             <a:r>
-              <a:t>Is the model learning something sensible? Permutation importance on held-out data says yes. The top feature is depot centrality — how central or peripheral the depot is relative to the customer cloud — followed by two of the ring-occupancy shares and the spread of depot distances. These are precisely the geometric quantities the reference paper builds its instance characterization around, so it's reassuring to see them do the work here too. The broader pattern: geometry beats bookkeeping. Where customers sit relative to the depot tells you more about which heuristic wins than raw instance size does. One caveat I keep attached to this slide: importances are predictive associations, not causal explanations.</a:t>
+              <a:t>So which of our engineered features actually carried the prediction — and did that match our expectations? Held-out permutation importance gives a clear answer, and it splits our three hypotheses three ways. Hypothesis one, demand structure: confirmed. Capacity pressure and demand spread rank at the very top of the tree-based importance ranking. Hypothesis two, depot geometry: not just confirmed but stronger than we anticipated — depot centrality is the single strongest held-out feature, with two of the ring-occupancy shares right behind it. And hypothesis three is the surprise: raw instance size, the most obvious feature of all, is nearly irrelevant — it never enters the top ten. In hindsight that makes sense: all five heuristics scale fine to a hundred customers, so what separates them is the shape of the instance, not its size. One caveat we keep attached to this slide: importances are predictive associations, not causal explanations. But we can go one level deeper and connect the characteristics to individual solvers — that's the next slide.</a:t>
             </a:r>
           </a:p>
         </p:txBody>
@@ -2017,7 +2018,7 @@
           <a:lstStyle/>
           <a:p>
             <a:r>
-              <a:t>Slicing the test results shows a consistent picture. By size: the selector is best on the hundred-customer instances — 71 percent within one percent of optimal selection — and weakest on the small twenty-customer ones. More geometric structure gives the features more to grab onto. By demand regime: high capacity pressure is clearly the hardest case, 47 percent versus roughly two-thirds elsewhere — when vehicles are squeezed to the limit, solver behavior becomes hard to predict. And by depot position, randomly placed depots are hardest, which fits the feature-importance story: the model leans on depot geometry, and random placement is exactly where that signal is most variable.</a:t>
+              <a:t>Let us make that concrete and connect instance characteristics to individual solvers — for us, the most interesting result of the project. The demand regime is the strongest signal. With even, low-variance demands, route-first-cluster-second wins forty-one percent of instances: when every customer needs about the same amount, cutting one giant tour into routes is clean. Flip to lumpy, high-variance demands and Clarke-Wright with 2-opt takes over at thirty-eight percent — greedy savings merges absorb uneven demands well. Under tight capacity, Mole-Jameson insertion leads: it checks feasibility at every insertion, which pays off when vehicles run full. Geometry tells the matching story: with a central depot or radial layouts, the Wren-Holliday sweep peaks — it partitions customers by angle around the depot, so it needs angular spread to work with. Put the depot in a corner and sweep fades while insertion takes the lead. Each heuristic's win region matches its construction principle — and this is exactly the signal the Random Forest exploits. The engineered features, not the model class, are the heart of the project.</a:t>
             </a:r>
           </a:p>
         </p:txBody>
@@ -2087,7 +2088,7 @@
           <a:lstStyle/>
           <a:p>
             <a:r>
-              <a:t>Now the question every ML project must answer: does it generalize beyond its own data distribution? I evaluated the frozen selector — trained purely on synthetic instances — on 85 classic CVRPLIB benchmark instances from sets A, B, E and P, re-running the whole portfolio under the same budget and anchoring against the published proven optima. The honest answer: transfer is partial. The chart shows the within-one-percent rate per set — the selector beats the baseline everywhere, 53 versus 43 percent overall. But on mean regret the in-distribution edge largely fades: 1.84 versus 1.88 percent, m-hat essentially one. The paper reports the same phenomenon — stylized benchmark families are hard when you trained on randomized synthetic data. Two silver linings: the portfolio itself is strong on real data — its best solver averages under two percent above proven optima — and on the benchmark E-n51-k5 the selector picks exactly the right heuristic, landing 0.19 percent above the optimum in a sixth of a second.</a:t>
+              <a:t>Briefly, the same analysis from the selector's side. By size, it is best on the hundred-customer instances — 71 percent within one percent of optimal selection — and weakest on the small ones; more geometric structure gives our features more to grab onto. By demand regime, high capacity pressure is clearly the hardest case — when vehicles are squeezed to the limit, solver behavior becomes hard to predict. And randomly placed depots are hardest by position, which fits the importance story we just saw: the model leans on depot geometry, and random placement is exactly where that signal is most variable.</a:t>
             </a:r>
           </a:p>
         </p:txBody>
@@ -2157,7 +2158,7 @@
           <a:lstStyle/>
           <a:p>
             <a:r>
-              <a:t>Final piece: an extension beyond the course requirements that puts the whole project in perspective. If we're willing to spend the entire twenty-second budget on one solver, what does that buy? I benchmarked PyVRP's hybrid genetic search — a state-of-the-art metaheuristic — on a stratified sample of 45 test instances plus the CVRPLIB benchmark. Results: HGS wins or ties the portfolio oracle on every single sampled instance, delivering on average 3.5 percent shorter routes than the ML-selected heuristic — and it finds the proven optimum on E-n51-k5. But it consumes the full twenty seconds, while the ML-selected heuristic answers in a fifth of a second — roughly ninety times less compute. This is exactly why HGS is not in the portfolio: as a label it would swallow the dataset. As a reference, it prices the trade-off cleanly. If you need real-time answers, or initial solutions to warm-start a bigger optimizer, the selector is the right tool. If you can afford twenty seconds per instance, just run HGS. Both answers are useful — they serve different operational regimes.</a:t>
+              <a:t>Now the question every ML project must answer: does it generalize beyond its own data distribution? We evaluated the frozen selector — trained purely on synthetic instances — on 85 classic CVRPLIB benchmark instances from sets A, B, E and P, re-running the whole portfolio under the same budget and anchoring against the published proven optima. The honest answer: transfer is partial. The chart shows the within-one-percent rate per set — the selector beats the baseline everywhere, 53 versus 43 percent overall. But on mean regret the in-distribution edge largely fades: 1.84 versus 1.88 percent, m-hat essentially one. The paper reports the same phenomenon — stylized benchmark families are hard when you trained on randomized synthetic data. Two silver linings: the portfolio itself is strong on real data — its best solver averages under two percent above proven optima — and on the benchmark E-n51-k5 the selector picks exactly the right heuristic, landing 0.19 percent above the optimum in a sixth of a second.</a:t>
             </a:r>
           </a:p>
         </p:txBody>
@@ -2227,7 +2228,7 @@
           <a:lstStyle/>
           <a:p>
             <a:r>
-              <a:t>Let me state the limitations as plainly as the results. The selector is trained on synthetic data, and on real benchmarks its regret advantage largely disappears — I showed you that rather than hiding it. Labels are the portfolio's best, not true optima — though the portfolio's best sits only about two percent above proven optima on real instances. The fixed budget bounds runtime but doesn't reward speed. And the exact baseline is a deliberately simple MTZ formulation under a free license. Against that: per-instance selection genuinely beats the single-best-solver baseline in distribution; cheap pre-solution features — above all depot geometry — carry real signal; every number in this talk comes from frozen, integrity-checked artifacts anyone can re-run; and the speed-quality trade-off is now measured, not asserted.</a:t>
+              <a:t>Final piece: an extension beyond the course requirements that puts the whole project in perspective. If we're willing to spend the entire twenty-second budget on one solver, what does that buy? We benchmarked PyVRP's hybrid genetic search — a state-of-the-art metaheuristic — on a stratified sample of 45 test instances plus the CVRPLIB benchmark. Results: HGS wins or ties the portfolio oracle on every single sampled instance, delivering on average 3.5 percent shorter routes than the ML-selected heuristic — and it finds the proven optimum on E-n51-k5. But it consumes the full twenty seconds, while the ML-selected heuristic answers in a fifth of a second — roughly ninety times less compute. This is exactly why HGS is not in the portfolio: as a label it would swallow the dataset. As a reference, it prices the trade-off cleanly. If you need real-time answers, or initial solutions to warm-start a bigger optimizer, the selector is the right tool. If you can afford twenty seconds per instance, just run HGS. Both answers are useful — they serve different operational regimes.</a:t>
             </a:r>
           </a:p>
         </p:txBody>
@@ -2297,7 +2298,7 @@
           <a:lstStyle/>
           <a:p>
             <a:r>
-              <a:t>To conclude in one sentence: look at the instance first, then pick the solver. A Random Forest over thirty-eight cheap pre-solution features turns five sixty-year-old heuristics into a meta-solver that beats the standard baseline, transfers — partially and honestly measured — to real benchmarks, and sits in a well-understood spot on the speed-quality spectrum: two hundred milliseconds for routes within about three and a half percent of what a modern genetic search buys with ninety times the compute. Exact where it proves, heuristic where it scales, learned where it chooses. Thank you — I'm happy to take questions.</a:t>
+              <a:t>Let us state the limitations as plainly as the results. The selector is trained on synthetic data, and on real benchmarks its regret advantage largely disappears — we showed you that rather than hiding it. Labels are the portfolio's best, not true optima — though the portfolio's best sits only about two percent above proven optima on real instances. The fixed budget bounds runtime but doesn't reward speed. And the exact baseline is a deliberately simple MTZ formulation under a free license. Against that: per-instance selection genuinely beats the single-best-solver baseline in distribution; cheap pre-solution features — above all depot geometry — carry real signal, and their importance ranking matches solver construction principles; every number in this talk comes from frozen, integrity-checked artifacts anyone can re-run; and the speed-quality trade-off is now measured, not asserted.</a:t>
             </a:r>
           </a:p>
         </p:txBody>
@@ -2367,7 +2368,7 @@
           <a:lstStyle/>
           <a:p>
             <a:r>
-              <a:t>Backup divider — jump here only if a question calls for the details.</a:t>
+              <a:t>To conclude in one sentence: look at the instance first, then pick the solver. Thirty-eight engineered features — above all depot geometry and demand structure, whose importance matched each heuristic's construction principle — turn five sixty-year-old heuristics into a meta-solver that beats the standard baseline, transfers — partially and honestly measured — to real benchmarks, and sits in a well-understood spot on the speed-quality spectrum: two hundred milliseconds for routes within about three and a half percent of what a modern genetic search buys with ninety times the compute. Exact where it proves, heuristic where it scales, learned where it chooses. Thank you — we're happy to take questions.</a:t>
             </a:r>
           </a:p>
         </p:txBody>
@@ -2437,7 +2438,7 @@
           <a:lstStyle/>
           <a:p>
             <a:r>
-              <a:t>Backup: the paper tunes hyperparameters with a five-fold grid search; my headline experiment used fixed ones. I ran the paper-style search on the frozen training split as a supplement. All models' CV accuracies land within about one point of each other, and tuned test regrets straddle the frozen Random Forest's within noise — so the fixed choices were sound and the frozen results stand.</a:t>
+              <a:t>Backup divider — jump here only if a question calls for the details.</a:t>
             </a:r>
           </a:p>
         </p:txBody>
@@ -2507,7 +2508,7 @@
           <a:lstStyle/>
           <a:p>
             <a:r>
-              <a:t>Backup: the exact model. It's the classic two-index arc formulation. Binary arc variables, degree constraints, and continuous load variables that propagate along arcs — the load constraints kill subtours and enforce capacity in one stroke. Twenty customers give 440 binary variables; the free license caps at two thousand, which is why the 51-customer benchmark can't be solved exactly here.</a:t>
+              <a:t>Backup: the paper tunes hyperparameters with a five-fold grid search; our headline experiment used fixed ones. We ran the paper-style search on the frozen training split as a supplement. All models' CV accuracies land within about one point of each other, and tuned test regrets straddle the frozen Random Forest's within noise — so the fixed choices were sound and the frozen results stand.</a:t>
             </a:r>
           </a:p>
         </p:txBody>
@@ -2577,7 +2578,7 @@
           <a:lstStyle/>
           <a:p>
             <a:r>
-              <a:t>Let me set up the problem. In the capacitated vehicle routing problem we have a depot with a fleet of identical vehicles, each with capacity Q. Every customer has a demand and must be visited exactly once. Each route starts and ends at the depot, and the customers on a route can't exceed the vehicle's capacity. We minimize total travelled distance. The picture on the right shows the shape of a solution: the square is the depot and each colored loop is one vehicle's route. The problem is NP-hard — you're deciding simultaneously how to group customers and in which order to visit them — and in logistics practice you often need an answer in seconds. That tension between hardness and speed drives everything in this project.</a:t>
+              <a:t>Let us set up the problem. In the capacitated vehicle routing problem we have a depot with a fleet of identical vehicles, each with capacity Q. Every customer has a demand and must be visited exactly once. Each route starts and ends at the depot, and the customers on a route can't exceed the vehicle's capacity. We minimize total travelled distance. The picture on the right shows the shape of a solution: the square is the depot and each colored loop is one vehicle's route. The problem is NP-hard — you're deciding simultaneously how to group customers and in which order to visit them — and in logistics practice you often need an answer in seconds. That tension between hardness and speed drives everything in this project.</a:t>
             </a:r>
           </a:p>
         </p:txBody>
@@ -2647,6 +2648,76 @@
           <a:lstStyle/>
           <a:p>
             <a:r>
+              <a:t>Backup: the exact model. It's the classic two-index arc formulation. Binary arc variables, degree constraints, and continuous load variables that propagate along arcs — the load constraints kill subtours and enforce capacity in one stroke. Twenty customers give 440 binary variables; the free license caps at two thousand, which is why the 51-customer benchmark can't be solved exactly here.</a:t>
+            </a:r>
+          </a:p>
+        </p:txBody>
+      </p:sp>
+      <p:sp>
+        <p:nvSpPr>
+          <p:cNvPr id="4" name="Slide Number Placeholder 3"/>
+          <p:cNvSpPr>
+            <a:spLocks noGrp="1"/>
+          </p:cNvSpPr>
+          <p:nvPr>
+            <p:ph type="sldNum" idx="5" sz="quarter"/>
+          </p:nvPr>
+        </p:nvSpPr>
+        <p:spPr/>
+      </p:sp>
+    </p:spTree>
+  </p:cSld>
+  <p:clrMapOvr>
+    <a:masterClrMapping/>
+  </p:clrMapOvr>
+</p:notes>
+</file>
+
+<file path=ppt/notesSlides/notesSlide21.xml><?xml version="1.0" encoding="utf-8"?>
+<p:notes xmlns:a="http://schemas.openxmlformats.org/drawingml/2006/main" xmlns:p="http://schemas.openxmlformats.org/presentationml/2006/main" xmlns:r="http://schemas.openxmlformats.org/officeDocument/2006/relationships">
+  <p:cSld>
+    <p:spTree>
+      <p:nvGrpSpPr>
+        <p:cNvPr id="1" name=""/>
+        <p:cNvGrpSpPr/>
+        <p:nvPr/>
+      </p:nvGrpSpPr>
+      <p:grpSpPr>
+        <a:xfrm>
+          <a:off x="0" y="0"/>
+          <a:ext cx="0" cy="0"/>
+          <a:chOff x="0" y="0"/>
+          <a:chExt cx="0" cy="0"/>
+        </a:xfrm>
+      </p:grpSpPr>
+      <p:sp>
+        <p:nvSpPr>
+          <p:cNvPr id="2" name="Slide Image Placeholder 1"/>
+          <p:cNvSpPr>
+            <a:spLocks noGrp="1"/>
+          </p:cNvSpPr>
+          <p:nvPr>
+            <p:ph type="sldImg" idx="2"/>
+          </p:nvPr>
+        </p:nvSpPr>
+        <p:spPr/>
+      </p:sp>
+      <p:sp>
+        <p:nvSpPr>
+          <p:cNvPr id="3" name="Notes Placeholder 2"/>
+          <p:cNvSpPr>
+            <a:spLocks noGrp="1"/>
+          </p:cNvSpPr>
+          <p:nvPr>
+            <p:ph type="body" idx="3" sz="quarter"/>
+          </p:nvPr>
+        </p:nvSpPr>
+        <p:spPr/>
+        <p:txBody>
+          <a:bodyPr/>
+          <a:lstStyle/>
+          <a:p>
+            <a:r>
               <a:t>Backup: protocol fine print — budget and tie-breaking rules, the integrity checks that guard the frozen artifacts, and the pinned environment. Useful for reproducibility questions.</a:t>
             </a:r>
           </a:p>
@@ -2717,7 +2788,7 @@
           <a:lstStyle/>
           <a:p>
             <a:r>
-              <a:t>First requirement of the project: introduce the problem by solving instances exactly with gurobipy and heuristically. I modelled CVRP as a mixed-integer program — a two-index arc formulation with load variables that propagate along routes, which eliminates subtours and enforces capacity at the same time. The result is sobering. With six customers, Gurobi proves the optimum in a hundredth of a second and all five heuristics match it. At twenty customers, after five full minutes Gurobi still cannot prove optimality — up to a two percent gap remains open — while the heuristics match or nearly match its best solution in under four hundredths of a second. And at fifty-one customers, the model no longer even fits the free license. So exact solving gives us trustworthy reference points on small instances, but the real work has to be done by fast heuristics. The question becomes: which one?</a:t>
+              <a:t>First requirement of the project: introduce the problem by solving instances exactly with gurobipy and heuristically. We modelled CVRP as a mixed-integer program — a two-index arc formulation with load variables that propagate along routes, which eliminates subtours and enforces capacity at the same time. The result is sobering. With six customers, Gurobi proves the optimum in a hundredth of a second and all five heuristics match it. At twenty customers, after five full minutes Gurobi still cannot prove optimality — up to a two percent gap remains open — while the heuristics match or nearly match its best solution in under four hundredths of a second. And at fifty-one customers, the model no longer even fits the free license. So exact solving gives us trustworthy reference points on small instances, but the real work has to be done by fast heuristics. The question becomes: which one?</a:t>
             </a:r>
           </a:p>
         </p:txBody>
@@ -2787,7 +2858,7 @@
           <a:lstStyle/>
           <a:p>
             <a:r>
-              <a:t>Here is the core empirical fact that motivates the whole project. I ran five classical heuristics on all 1,260 instances of my dataset and asked: which one is best, per instance? The answer: it depends. Route-first cluster-second wins about a quarter of the time, Clarke-Wright with 2-opt another quarter, Mole-Jameson a fifth — even the weakest, the CMT two-phase method, still wins nearly one instance in ten. No solver dominates, and picking wrongly can cost up to nineteen percent extra route length. Which solver wins depends on the geometry of the instance, where the depot sits, and how demands are structured. This is exactly the situation the algorithm-selection literature addresses: don't pick one solver for all instances — learn a model that predicts the winner for each instance. That is the approach of the paper this project follows.</a:t>
+              <a:t>Here is the core empirical fact that motivates the whole project. We ran five classical heuristics on all 1,260 instances of our dataset and asked: which one is best, per instance? The answer: it depends. Route-first cluster-second wins about a quarter of the time, Clarke-Wright with 2-opt another quarter, Mole-Jameson a fifth — even the weakest, the CMT two-phase method, still wins nearly one instance in ten. No solver dominates, and picking wrongly can cost up to nineteen percent extra route length. Which solver wins depends on the geometry of the instance, where the depot sits, and how demands are structured. This is exactly the situation the algorithm-selection literature addresses: don't pick one solver for all instances — learn a model that predicts the winner for each instance. That is the approach of the paper this project follows.</a:t>
             </a:r>
           </a:p>
         </p:txBody>
@@ -2927,7 +2998,7 @@
           <a:lstStyle/>
           <a:p>
             <a:r>
-              <a:t>The portfolio itself: five classical construction heuristics from the VeRyPy library, spanning the classic families — savings, sweep, insertion, two-phase clustering, and route-first-cluster-second. I use a pinned library commit, and every solution any solver returns is independently re-validated and re-costed by my own code, so no library quirk can leak into the labels. Two things are deliberately missing. Gaskell's savings variant was audited but won only three of 240 development instances — a class with three examples is not learnable, so it stayed out. And there is no genetic algorithm in the portfolio. That is not an oversight: a modern hybrid genetic search would win nearly every instance at this budget, the label distribution would collapse into one class, and there would be nothing left to learn. I benchmark it separately as a reference point, and I'll show you exactly what it buys at the end.</a:t>
+              <a:t>The portfolio itself: five classical construction heuristics from the VeRyPy library, spanning the classic families — savings, sweep, insertion, two-phase clustering, and route-first-cluster-second. We use a pinned library commit, and every solution any solver returns is independently re-validated and re-costed by our own code, so no library quirk can leak into the labels. Two things are deliberately missing. Gaskell's savings variant was audited but won only three of 240 development instances — a class with three examples is not learnable, so it stayed out. And there is no genetic algorithm in the portfolio. That is not an oversight: a modern hybrid genetic search would win nearly every instance at this budget, the label distribution would collapse into one class, and there would be nothing left to learn. We benchmark it separately as a reference point, and we'll show you exactly what it buys at the end.</a:t>
             </a:r>
           </a:p>
         </p:txBody>
@@ -2997,7 +3068,7 @@
           <a:lstStyle/>
           <a:p>
             <a:r>
-              <a:t>Where does training data come from? Following the paper, I generate it synthetically, with the explicit goal of spanning as much instance variation as possible. It's a balanced factorial design: five spatial families — from uniform scatter to tight clusters to ring shapes — times three depot positions, times four demand regimes, times three sizes, times seven random seeds. That gives 1,260 instances and 6,300 timed solver runs; exactly one run ever exceeded the twenty-second budget. Each instance is labelled with the solver that produced the lowest feasible cost within the budget. I split them into 1,008 training and 252 test instances, stratified by label and disjoint by construction. And everything is reproducible — every instance can be regenerated from a stable ID, and the generation manifests are stored next to the results.</a:t>
+              <a:t>Where does training data come from? Following the paper, we generate it synthetically, with the explicit goal of spanning as much instance variation as possible. It's a balanced factorial design: five spatial families — from uniform scatter to tight clusters to ring shapes — times three depot positions, times four demand regimes, times three sizes, times seven random seeds. That gives 1,260 instances and 6,300 timed solver runs; exactly one run ever exceeded the twenty-second budget. Each instance is labelled with the solver that produced the lowest feasible cost within the budget. We split them into 1,008 training and 252 test instances, stratified by label and disjoint by construction. And everything is reproducible — every instance can be regenerated from a stable ID, and the generation manifests are stored next to the results.</a:t>
             </a:r>
           </a:p>
         </p:txBody>
@@ -3067,7 +3138,7 @@
           <a:lstStyle/>
           <a:p>
             <a:r>
-              <a:t>What does the model actually see? Thirty-eight features in five groups, all computable from the raw instance in milliseconds. Size and capacity — including capacity pressure, meaning how tightly total demand squeezes into the fleet. The shape of the demand distribution. Depot geometry — in particular how central the depot is relative to the customers. Customer geometry — spread, nearest-neighbor distances, cluster separation. And the paper's signature feature: ring occupancy — the share of customers in five concentric rings around the depot, which captures the radial layout. Just as important is what the model does not see. Solver outcomes, labels, seeds, generator categories — all blocked by explicit checks; the pipeline throws an error if a prohibited column shows up. So the classifier learns geometry, not leaked answers.</a:t>
+              <a:t>What does the model actually see? Thirty-eight features in five groups, all computable from the raw instance in milliseconds. We engineered them around three hypotheses about what drives solver performance. First: demand structure — how large and how uneven the demands are, and how tightly they squeeze into the fleet; we capture that with capacity pressure and the demand distribution statistics. Second: depot geometry — how central the depot sits relative to the customers, plus the paper's signature feature, ring occupancy: the share of customers in five concentric rings around the depot. Third: overall customer geometry and instance size. Just as important is what the model does not see. Solver outcomes, labels, seeds, generator categories — all blocked by explicit checks; the pipeline throws an error if a prohibited column shows up. So the classifier learns instance characteristics, not leaked answers. Whether our three hypotheses were actually right is what the next two slides test.</a:t>
             </a:r>
           </a:p>
         </p:txBody>
@@ -3137,7 +3208,7 @@
           <a:lstStyle/>
           <a:p>
             <a:r>
-              <a:t>Before the results, thirty seconds on how selectors are measured, because the field has two standard baselines. The Single Best Solver, SBS, is the one solver that's best on average on the training set — here that's Mole-Jameson insertion. That's what you would deploy if you had no machine learning at all, so it's the baseline to beat. The Virtual Best Solver, VBS, is an oracle that picks the true winner on every single instance — perfect selection, the ceiling. The paper's normalized metric m-hat places a selector on the line between them: zero means you select like the oracle, one means you're no better than the no-ML baseline. My selector lands at 0.741 — I'll unpack that on the next slide. I also report regret — how many percent the selected solver's route is above the per-instance best — and the share of instances landing within one percent of that best.</a:t>
+              <a:t>Before the results, thirty seconds on how selectors are measured, because the field has two standard baselines. The Single Best Solver, SBS, is the one solver that's best on average on the training set — here that's Mole-Jameson insertion. That's what you would deploy if you had no machine learning at all, so it's the baseline to beat. The Virtual Best Solver, VBS, is an oracle that picks the true winner on every single instance — perfect selection, the ceiling. The paper's normalized metric m-hat places a selector on the line between them: zero means you select like the oracle, one means you're no better than the no-ML baseline. Our selector lands at 0.741 — we'll unpack that on the next slide. We also report regret — how many percent the selected solver's route is above the per-instance best — and the share of instances landing within one percent of that best.</a:t>
             </a:r>
           </a:p>
         </p:txBody>
@@ -11407,7 +11478,7 @@
               <a:rPr>
                 <a:latin typeface="Arial"/>
               </a:rPr>
-              <a:t>What the Model Actually Looks At</a:t>
+              <a:t>Feature Importance: Expected vs Observed</a:t>
             </a:r>
           </a:p>
         </p:txBody>
@@ -11446,7 +11517,7 @@
                 </a:solidFill>
                 <a:latin typeface="Arial"/>
               </a:rPr>
-              <a:t>Permutation importance on held-out data — the paper's geometric features do the work</a:t>
+              <a:t>Permutation importance on held-out data — did our three engineering hypotheses hold?</a:t>
             </a:r>
           </a:p>
         </p:txBody>
@@ -11461,7 +11532,7 @@
         </p:nvGraphicFramePr>
         <p:xfrm>
           <a:off x="320040" y="1737360"/>
-          <a:ext cx="5029200" cy="2926080"/>
+          <a:ext cx="4892040" cy="2926080"/>
         </p:xfrm>
         <a:graphic>
           <a:graphicData uri="http://schemas.openxmlformats.org/drawingml/2006/chart">
@@ -11471,14 +11542,60 @@
       </p:graphicFrame>
       <p:sp>
         <p:nvSpPr>
-          <p:cNvPr id="6" name="TextBox 5"/>
+          <p:cNvPr id="6" name="Rounded Rectangle 5"/>
+          <p:cNvSpPr/>
+          <p:nvPr/>
+        </p:nvSpPr>
+        <p:spPr>
+          <a:xfrm>
+            <a:off x="5532120" y="1783080"/>
+            <a:ext cx="3291840" cy="896112"/>
+          </a:xfrm>
+          <a:prstGeom prst="roundRect">
+            <a:avLst>
+              <a:gd name="adj" fmla="val 7000"/>
+            </a:avLst>
+          </a:prstGeom>
+          <a:solidFill>
+            <a:srgbClr val="F2F2F2"/>
+          </a:solidFill>
+          <a:ln>
+            <a:noFill/>
+          </a:ln>
+          <a:effectLst/>
+        </p:spPr>
+        <p:style>
+          <a:lnRef idx="1">
+            <a:schemeClr val="accent1"/>
+          </a:lnRef>
+          <a:fillRef idx="3">
+            <a:schemeClr val="accent1"/>
+          </a:fillRef>
+          <a:effectRef idx="2">
+            <a:schemeClr val="accent1"/>
+          </a:effectRef>
+          <a:fontRef idx="minor">
+            <a:schemeClr val="lt1"/>
+          </a:fontRef>
+        </p:style>
+        <p:txBody>
+          <a:bodyPr rtlCol="0" anchor="ctr"/>
+          <a:lstStyle/>
+          <a:p>
+            <a:pPr algn="ctr"/>
+          </a:p>
+        </p:txBody>
+      </p:sp>
+      <p:sp>
+        <p:nvSpPr>
+          <p:cNvPr id="7" name="TextBox 6"/>
           <p:cNvSpPr txBox="1"/>
           <p:nvPr/>
         </p:nvSpPr>
         <p:spPr>
           <a:xfrm>
-            <a:off x="5669280" y="1920240"/>
-            <a:ext cx="3154680" cy="2834640"/>
+            <a:off x="5687568" y="1874519"/>
+            <a:ext cx="2980944" cy="731520"/>
           </a:xfrm>
           <a:prstGeom prst="rect">
             <a:avLst/>
@@ -11493,79 +11610,93 @@
           <a:p>
             <a:pPr algn="l">
               <a:spcAft>
-                <a:spcPts val="600"/>
-              </a:spcAft>
-            </a:pPr>
-            <a:r>
-              <a:rPr sz="1300" b="1" i="0">
-                <a:solidFill>
-                  <a:srgbClr val="003359"/>
-                </a:solidFill>
-                <a:latin typeface="Arial"/>
-              </a:rPr>
-              <a:t>Reading the ranking</a:t>
+                <a:spcPts val="200"/>
+              </a:spcAft>
+            </a:pPr>
+            <a:r>
+              <a:rPr sz="1050" b="1" i="0">
+                <a:solidFill>
+                  <a:srgbClr val="A2AD00"/>
+                </a:solidFill>
+                <a:latin typeface="Arial"/>
+              </a:rPr>
+              <a:t>Confirmed</a:t>
             </a:r>
           </a:p>
           <a:p>
             <a:pPr algn="l">
               <a:spcAft>
-                <a:spcPts val="700"/>
-              </a:spcAft>
-            </a:pPr>
-            <a:r>
-              <a:rPr sz="1050" b="0" i="0">
+                <a:spcPts val="0"/>
+              </a:spcAft>
+            </a:pPr>
+            <a:r>
+              <a:rPr sz="900" b="0" i="0">
                 <a:solidFill>
                   <a:srgbClr val="000000"/>
                 </a:solidFill>
                 <a:latin typeface="Arial"/>
               </a:rPr>
-              <a:t>•  Depot centrality and ring occupancy lead — exactly the features the paper builds its characterization on.</a:t>
-            </a:r>
-          </a:p>
-          <a:p>
-            <a:pPr algn="l">
-              <a:spcAft>
-                <a:spcPts val="700"/>
-              </a:spcAft>
-            </a:pPr>
-            <a:r>
-              <a:rPr sz="1050" b="0" i="0">
-                <a:solidFill>
-                  <a:srgbClr val="000000"/>
-                </a:solidFill>
-                <a:latin typeface="Arial"/>
-              </a:rPr>
-              <a:t>•  Geometry beats bookkeeping: where customers sit relative to the depot matters more than raw size.</a:t>
-            </a:r>
-          </a:p>
-          <a:p>
-            <a:pPr algn="l">
-              <a:spcAft>
-                <a:spcPts val="700"/>
-              </a:spcAft>
-            </a:pPr>
-            <a:r>
-              <a:rPr sz="1050" b="0" i="0">
-                <a:solidFill>
-                  <a:srgbClr val="000000"/>
-                </a:solidFill>
-                <a:latin typeface="Arial"/>
-              </a:rPr>
-              <a:t>•  Importances are predictive associations, not causal claims.</a:t>
-            </a:r>
-          </a:p>
-        </p:txBody>
-      </p:sp>
-      <p:sp>
-        <p:nvSpPr>
-          <p:cNvPr id="7" name="TextBox 6"/>
+              <a:t>Demand structure matters: capacity pressure &amp; demand spread top the impurity ranking.</a:t>
+            </a:r>
+          </a:p>
+        </p:txBody>
+      </p:sp>
+      <p:sp>
+        <p:nvSpPr>
+          <p:cNvPr id="8" name="Rounded Rectangle 7"/>
+          <p:cNvSpPr/>
+          <p:nvPr/>
+        </p:nvSpPr>
+        <p:spPr>
+          <a:xfrm>
+            <a:off x="5532120" y="2807208"/>
+            <a:ext cx="3291840" cy="896112"/>
+          </a:xfrm>
+          <a:prstGeom prst="roundRect">
+            <a:avLst>
+              <a:gd name="adj" fmla="val 7000"/>
+            </a:avLst>
+          </a:prstGeom>
+          <a:solidFill>
+            <a:srgbClr val="F2F2F2"/>
+          </a:solidFill>
+          <a:ln>
+            <a:noFill/>
+          </a:ln>
+          <a:effectLst/>
+        </p:spPr>
+        <p:style>
+          <a:lnRef idx="1">
+            <a:schemeClr val="accent1"/>
+          </a:lnRef>
+          <a:fillRef idx="3">
+            <a:schemeClr val="accent1"/>
+          </a:fillRef>
+          <a:effectRef idx="2">
+            <a:schemeClr val="accent1"/>
+          </a:effectRef>
+          <a:fontRef idx="minor">
+            <a:schemeClr val="lt1"/>
+          </a:fontRef>
+        </p:style>
+        <p:txBody>
+          <a:bodyPr rtlCol="0" anchor="ctr"/>
+          <a:lstStyle/>
+          <a:p>
+            <a:pPr algn="ctr"/>
+          </a:p>
+        </p:txBody>
+      </p:sp>
+      <p:sp>
+        <p:nvSpPr>
+          <p:cNvPr id="9" name="TextBox 8"/>
           <p:cNvSpPr txBox="1"/>
           <p:nvPr/>
         </p:nvSpPr>
         <p:spPr>
           <a:xfrm>
-            <a:off x="320040" y="4873752"/>
-            <a:ext cx="6217920" cy="219456"/>
+            <a:off x="5687568" y="2898648"/>
+            <a:ext cx="2980944" cy="731520"/>
           </a:xfrm>
           <a:prstGeom prst="rect">
             <a:avLst/>
@@ -11580,10 +11711,205 @@
           <a:p>
             <a:pPr algn="l">
               <a:spcAft>
+                <a:spcPts val="200"/>
+              </a:spcAft>
+            </a:pPr>
+            <a:r>
+              <a:rPr sz="1050" b="1" i="0">
+                <a:solidFill>
+                  <a:srgbClr val="0065BD"/>
+                </a:solidFill>
+                <a:latin typeface="Arial"/>
+              </a:rPr>
+              <a:t>Stronger than expected</a:t>
+            </a:r>
+          </a:p>
+          <a:p>
+            <a:pPr algn="l">
+              <a:spcAft>
                 <a:spcPts val="0"/>
               </a:spcAft>
             </a:pPr>
             <a:r>
+              <a:rPr sz="900" b="0" i="0">
+                <a:solidFill>
+                  <a:srgbClr val="000000"/>
+                </a:solidFill>
+                <a:latin typeface="Arial"/>
+              </a:rPr>
+              <a:t>Depot centrality &amp; the ring profile are the top held-out predictors.</a:t>
+            </a:r>
+          </a:p>
+        </p:txBody>
+      </p:sp>
+      <p:sp>
+        <p:nvSpPr>
+          <p:cNvPr id="10" name="Rounded Rectangle 9"/>
+          <p:cNvSpPr/>
+          <p:nvPr/>
+        </p:nvSpPr>
+        <p:spPr>
+          <a:xfrm>
+            <a:off x="5532120" y="3831336"/>
+            <a:ext cx="3291840" cy="896112"/>
+          </a:xfrm>
+          <a:prstGeom prst="roundRect">
+            <a:avLst>
+              <a:gd name="adj" fmla="val 7000"/>
+            </a:avLst>
+          </a:prstGeom>
+          <a:solidFill>
+            <a:srgbClr val="F2F2F2"/>
+          </a:solidFill>
+          <a:ln>
+            <a:noFill/>
+          </a:ln>
+          <a:effectLst/>
+        </p:spPr>
+        <p:style>
+          <a:lnRef idx="1">
+            <a:schemeClr val="accent1"/>
+          </a:lnRef>
+          <a:fillRef idx="3">
+            <a:schemeClr val="accent1"/>
+          </a:fillRef>
+          <a:effectRef idx="2">
+            <a:schemeClr val="accent1"/>
+          </a:effectRef>
+          <a:fontRef idx="minor">
+            <a:schemeClr val="lt1"/>
+          </a:fontRef>
+        </p:style>
+        <p:txBody>
+          <a:bodyPr rtlCol="0" anchor="ctr"/>
+          <a:lstStyle/>
+          <a:p>
+            <a:pPr algn="ctr"/>
+          </a:p>
+        </p:txBody>
+      </p:sp>
+      <p:sp>
+        <p:nvSpPr>
+          <p:cNvPr id="11" name="TextBox 10"/>
+          <p:cNvSpPr txBox="1"/>
+          <p:nvPr/>
+        </p:nvSpPr>
+        <p:spPr>
+          <a:xfrm>
+            <a:off x="5687568" y="3922776"/>
+            <a:ext cx="2980944" cy="731520"/>
+          </a:xfrm>
+          <a:prstGeom prst="rect">
+            <a:avLst/>
+          </a:prstGeom>
+          <a:noFill/>
+        </p:spPr>
+        <p:txBody>
+          <a:bodyPr wrap="square" lIns="0" rIns="0" tIns="0" bIns="0">
+            <a:spAutoFit/>
+          </a:bodyPr>
+          <a:lstStyle/>
+          <a:p>
+            <a:pPr algn="l">
+              <a:spcAft>
+                <a:spcPts val="200"/>
+              </a:spcAft>
+            </a:pPr>
+            <a:r>
+              <a:rPr sz="1050" b="1" i="0">
+                <a:solidFill>
+                  <a:srgbClr val="E37222"/>
+                </a:solidFill>
+                <a:latin typeface="Arial"/>
+              </a:rPr>
+              <a:t>Surprise</a:t>
+            </a:r>
+          </a:p>
+          <a:p>
+            <a:pPr algn="l">
+              <a:spcAft>
+                <a:spcPts val="0"/>
+              </a:spcAft>
+            </a:pPr>
+            <a:r>
+              <a:rPr sz="900" b="0" i="0">
+                <a:solidFill>
+                  <a:srgbClr val="000000"/>
+                </a:solidFill>
+                <a:latin typeface="Arial"/>
+              </a:rPr>
+              <a:t>Raw size (n) barely matters — never in the top 10. Shape beats scale.</a:t>
+            </a:r>
+          </a:p>
+        </p:txBody>
+      </p:sp>
+      <p:sp>
+        <p:nvSpPr>
+          <p:cNvPr id="12" name="TextBox 11"/>
+          <p:cNvSpPr txBox="1"/>
+          <p:nvPr/>
+        </p:nvSpPr>
+        <p:spPr>
+          <a:xfrm>
+            <a:off x="320040" y="4590288"/>
+            <a:ext cx="8503920" cy="274320"/>
+          </a:xfrm>
+          <a:prstGeom prst="rect">
+            <a:avLst/>
+          </a:prstGeom>
+          <a:noFill/>
+        </p:spPr>
+        <p:txBody>
+          <a:bodyPr wrap="square" lIns="0" rIns="0" tIns="0" bIns="0">
+            <a:spAutoFit/>
+          </a:bodyPr>
+          <a:lstStyle/>
+          <a:p>
+            <a:pPr algn="l">
+              <a:spcAft>
+                <a:spcPts val="0"/>
+              </a:spcAft>
+            </a:pPr>
+            <a:r>
+              <a:rPr sz="950" b="0" i="1">
+                <a:solidFill>
+                  <a:srgbClr val="595959"/>
+                </a:solidFill>
+                <a:latin typeface="Arial"/>
+              </a:rPr>
+              <a:t>Importances are predictive associations, not causal claims.</a:t>
+            </a:r>
+          </a:p>
+        </p:txBody>
+      </p:sp>
+      <p:sp>
+        <p:nvSpPr>
+          <p:cNvPr id="13" name="TextBox 12"/>
+          <p:cNvSpPr txBox="1"/>
+          <p:nvPr/>
+        </p:nvSpPr>
+        <p:spPr>
+          <a:xfrm>
+            <a:off x="320040" y="4873752"/>
+            <a:ext cx="6217920" cy="219456"/>
+          </a:xfrm>
+          <a:prstGeom prst="rect">
+            <a:avLst/>
+          </a:prstGeom>
+          <a:noFill/>
+        </p:spPr>
+        <p:txBody>
+          <a:bodyPr wrap="square" lIns="0" rIns="0" tIns="0" bIns="0">
+            <a:spAutoFit/>
+          </a:bodyPr>
+          <a:lstStyle/>
+          <a:p>
+            <a:pPr algn="l">
+              <a:spcAft>
+                <a:spcPts val="0"/>
+              </a:spcAft>
+            </a:pPr>
+            <a:r>
               <a:rPr sz="800" b="0" i="0">
                 <a:solidFill>
                   <a:srgbClr val="595959"/>
@@ -11597,7 +11923,7 @@
       </p:sp>
       <p:sp>
         <p:nvSpPr>
-          <p:cNvPr id="8" name="TextBox 7"/>
+          <p:cNvPr id="14" name="TextBox 13"/>
           <p:cNvSpPr txBox="1"/>
           <p:nvPr/>
         </p:nvSpPr>
@@ -11688,7 +12014,7 @@
               <a:rPr>
                 <a:latin typeface="Arial"/>
               </a:rPr>
-              <a:t>Where It Works — and Where It Struggles</a:t>
+              <a:t>Which Characteristics Favor Which Solver?</a:t>
             </a:r>
           </a:p>
         </p:txBody>
@@ -11727,7 +12053,7 @@
                 </a:solidFill>
                 <a:latin typeface="Arial"/>
               </a:rPr>
-              <a:t>Random Forest on the test split, share of instances within 1% of best possible</a:t>
+              <a:t>Solver win rates across 1,260 instances — the engineered characteristics visibly reshuffle the winner</a:t>
             </a:r>
           </a:p>
         </p:txBody>
@@ -11741,7 +12067,7 @@
         <p:spPr>
           <a:xfrm>
             <a:off x="320040" y="1737360"/>
-            <a:ext cx="2697480" cy="3017520"/>
+            <a:ext cx="4114800" cy="2697480"/>
           </a:xfrm>
           <a:prstGeom prst="roundRect">
             <a:avLst>
@@ -11787,7 +12113,7 @@
         <p:spPr>
           <a:xfrm>
             <a:off x="502920" y="1883664"/>
-            <a:ext cx="2331720" cy="2743200"/>
+            <a:ext cx="3749039" cy="2468880"/>
           </a:xfrm>
           <a:prstGeom prst="rect">
             <a:avLst/>
@@ -11806,104 +12132,88 @@
               </a:spcAft>
             </a:pPr>
             <a:r>
-              <a:rPr sz="1200" b="1" i="0">
+              <a:rPr sz="1150" b="1" i="0">
                 <a:solidFill>
                   <a:srgbClr val="003359"/>
                 </a:solidFill>
                 <a:latin typeface="Arial"/>
               </a:rPr>
-              <a:t>By instance size</a:t>
+              <a:t>Demand structure — the strongest signal</a:t>
             </a:r>
           </a:p>
           <a:p>
             <a:pPr algn="l">
               <a:spcAft>
-                <a:spcPts val="100"/>
-              </a:spcAft>
-            </a:pPr>
-            <a:r>
-              <a:rPr sz="1500" b="1" i="0">
+                <a:spcPts val="500"/>
+              </a:spcAft>
+            </a:pPr>
+            <a:r>
+              <a:rPr sz="950" b="1" i="0">
                 <a:solidFill>
                   <a:srgbClr val="005293"/>
                 </a:solidFill>
                 <a:latin typeface="Arial"/>
               </a:rPr>
-              <a:t>58%  </a:t>
-            </a:r>
-            <a:r>
-              <a:rPr sz="950">
+              <a:t>•  Even demands → route-first cluster-second (41%). </a:t>
+            </a:r>
+            <a:r>
+              <a:rPr sz="900" b="0">
                 <a:solidFill>
                   <a:srgbClr val="000000"/>
                 </a:solidFill>
                 <a:latin typeface="Arial"/>
               </a:rPr>
-              <a:t>20 customers</a:t>
+              <a:t>Cutting one giant tour is clean when demands are uniform.</a:t>
             </a:r>
           </a:p>
           <a:p>
             <a:pPr algn="l">
               <a:spcAft>
-                <a:spcPts val="100"/>
-              </a:spcAft>
-            </a:pPr>
-            <a:r>
-              <a:rPr sz="1500" b="1" i="0">
+                <a:spcPts val="500"/>
+              </a:spcAft>
+            </a:pPr>
+            <a:r>
+              <a:rPr sz="950" b="1" i="0">
                 <a:solidFill>
                   <a:srgbClr val="005293"/>
                 </a:solidFill>
                 <a:latin typeface="Arial"/>
               </a:rPr>
-              <a:t>60%  </a:t>
-            </a:r>
-            <a:r>
-              <a:rPr sz="950">
+              <a:t>•  Lumpy demands → Clarke-Wright + 2-opt (38%). </a:t>
+            </a:r>
+            <a:r>
+              <a:rPr sz="900" b="0">
                 <a:solidFill>
                   <a:srgbClr val="000000"/>
                 </a:solidFill>
                 <a:latin typeface="Arial"/>
               </a:rPr>
-              <a:t>50 customers</a:t>
+              <a:t>Greedy savings merges absorb high variance.</a:t>
             </a:r>
           </a:p>
           <a:p>
             <a:pPr algn="l">
               <a:spcAft>
-                <a:spcPts val="100"/>
-              </a:spcAft>
-            </a:pPr>
-            <a:r>
-              <a:rPr sz="1500" b="1" i="0">
+                <a:spcPts val="500"/>
+              </a:spcAft>
+            </a:pPr>
+            <a:r>
+              <a:rPr sz="950" b="1" i="0">
                 <a:solidFill>
                   <a:srgbClr val="005293"/>
                 </a:solidFill>
                 <a:latin typeface="Arial"/>
               </a:rPr>
-              <a:t>71%  </a:t>
-            </a:r>
-            <a:r>
-              <a:rPr sz="950">
+              <a:t>•  Tight capacity → Mole-Jameson (34%). </a:t>
+            </a:r>
+            <a:r>
+              <a:rPr sz="900" b="0">
                 <a:solidFill>
                   <a:srgbClr val="000000"/>
                 </a:solidFill>
                 <a:latin typeface="Arial"/>
               </a:rPr>
-              <a:t>100 customers</a:t>
-            </a:r>
-          </a:p>
-          <a:p>
-            <a:pPr algn="l">
-              <a:spcAft>
-                <a:spcPts val="0"/>
-              </a:spcAft>
-            </a:pPr>
-            <a:r>
-              <a:rPr sz="900" b="0" i="1">
-                <a:solidFill>
-                  <a:srgbClr val="595959"/>
-                </a:solidFill>
-                <a:latin typeface="Arial"/>
-              </a:rPr>
-              <a:t>More geometric structure → easier selection.</a:t>
+              <a:t>Feasibility-aware insertion pays off when vehicles run full.</a:t>
             </a:r>
           </a:p>
         </p:txBody>
@@ -11916,8 +12226,8 @@
         </p:nvSpPr>
         <p:spPr>
           <a:xfrm>
-            <a:off x="3218688" y="1737360"/>
-            <a:ext cx="2697480" cy="3017520"/>
+            <a:off x="4709160" y="1737360"/>
+            <a:ext cx="4114800" cy="2697480"/>
           </a:xfrm>
           <a:prstGeom prst="roundRect">
             <a:avLst>
@@ -11962,8 +12272,8 @@
         </p:nvSpPr>
         <p:spPr>
           <a:xfrm>
-            <a:off x="3401568" y="1883664"/>
-            <a:ext cx="2331720" cy="2743200"/>
+            <a:off x="4892040" y="1883664"/>
+            <a:ext cx="3749039" cy="2468880"/>
           </a:xfrm>
           <a:prstGeom prst="rect">
             <a:avLst/>
@@ -11982,164 +12292,102 @@
               </a:spcAft>
             </a:pPr>
             <a:r>
-              <a:rPr sz="1200" b="1" i="0">
+              <a:rPr sz="1150" b="1" i="0">
                 <a:solidFill>
                   <a:srgbClr val="003359"/>
                 </a:solidFill>
                 <a:latin typeface="Arial"/>
               </a:rPr>
-              <a:t>By demand regime</a:t>
+              <a:t>Depot position &amp; spatial layout</a:t>
             </a:r>
           </a:p>
           <a:p>
             <a:pPr algn="l">
               <a:spcAft>
-                <a:spcPts val="100"/>
-              </a:spcAft>
-            </a:pPr>
-            <a:r>
-              <a:rPr sz="1500" b="1" i="0">
+                <a:spcPts val="500"/>
+              </a:spcAft>
+            </a:pPr>
+            <a:r>
+              <a:rPr sz="950" b="1" i="0">
                 <a:solidFill>
                   <a:srgbClr val="005293"/>
                 </a:solidFill>
                 <a:latin typeface="Arial"/>
               </a:rPr>
-              <a:t>47%  </a:t>
-            </a:r>
-            <a:r>
-              <a:rPr sz="950">
+              <a:t>•  Central depot, radial layouts → sweep peaks (25–27%). </a:t>
+            </a:r>
+            <a:r>
+              <a:rPr sz="900" b="0">
                 <a:solidFill>
                   <a:srgbClr val="000000"/>
                 </a:solidFill>
                 <a:latin typeface="Arial"/>
               </a:rPr>
-              <a:t>high pressure</a:t>
+              <a:t>Wren-Holliday partitions by angle — it needs angular spread.</a:t>
             </a:r>
           </a:p>
           <a:p>
             <a:pPr algn="l">
               <a:spcAft>
-                <a:spcPts val="100"/>
-              </a:spcAft>
-            </a:pPr>
-            <a:r>
-              <a:rPr sz="1500" b="1" i="0">
+                <a:spcPts val="500"/>
+              </a:spcAft>
+            </a:pPr>
+            <a:r>
+              <a:rPr sz="950" b="1" i="0">
                 <a:solidFill>
                   <a:srgbClr val="005293"/>
                 </a:solidFill>
                 <a:latin typeface="Arial"/>
               </a:rPr>
-              <a:t>67%  </a:t>
-            </a:r>
-            <a:r>
-              <a:rPr sz="950">
+              <a:t>•  Corner depot → sweep fades; Mole-Jameson leads (28%). </a:t>
+            </a:r>
+            <a:r>
+              <a:rPr sz="900" b="0">
                 <a:solidFill>
                   <a:srgbClr val="000000"/>
                 </a:solidFill>
                 <a:latin typeface="Arial"/>
               </a:rPr>
-              <a:t>low variance</a:t>
+              <a:t>No angular spread left to sweep.</a:t>
             </a:r>
           </a:p>
           <a:p>
             <a:pPr algn="l">
               <a:spcAft>
-                <a:spcPts val="100"/>
-              </a:spcAft>
-            </a:pPr>
-            <a:r>
-              <a:rPr sz="1500" b="1" i="0">
+                <a:spcPts val="500"/>
+              </a:spcAft>
+            </a:pPr>
+            <a:r>
+              <a:rPr sz="950" b="1" i="0">
                 <a:solidFill>
                   <a:srgbClr val="005293"/>
                 </a:solidFill>
                 <a:latin typeface="Arial"/>
               </a:rPr>
-              <a:t>69%  </a:t>
-            </a:r>
-            <a:r>
-              <a:rPr sz="950">
+              <a:t>•  Uniform / mixed scatter → Clarke-Wright leads (29%). </a:t>
+            </a:r>
+            <a:r>
+              <a:rPr sz="900" b="0">
                 <a:solidFill>
                   <a:srgbClr val="000000"/>
                 </a:solidFill>
                 <a:latin typeface="Arial"/>
               </a:rPr>
-              <a:t>high var. / low pressure</a:t>
-            </a:r>
-          </a:p>
-          <a:p>
-            <a:pPr algn="l">
-              <a:spcAft>
-                <a:spcPts val="0"/>
-              </a:spcAft>
-            </a:pPr>
-            <a:r>
-              <a:rPr sz="900" b="0" i="1">
-                <a:solidFill>
-                  <a:srgbClr val="595959"/>
-                </a:solidFill>
-                <a:latin typeface="Arial"/>
-              </a:rPr>
-              <a:t>Tightly constrained instances are intrinsically harder.</a:t>
-            </a:r>
-          </a:p>
-        </p:txBody>
-      </p:sp>
-      <p:sp>
-        <p:nvSpPr>
-          <p:cNvPr id="9" name="Rounded Rectangle 8"/>
-          <p:cNvSpPr/>
-          <p:nvPr/>
-        </p:nvSpPr>
-        <p:spPr>
-          <a:xfrm>
-            <a:off x="6117336" y="1737360"/>
-            <a:ext cx="2697480" cy="3017520"/>
-          </a:xfrm>
-          <a:prstGeom prst="roundRect">
-            <a:avLst>
-              <a:gd name="adj" fmla="val 7000"/>
-            </a:avLst>
-          </a:prstGeom>
-          <a:solidFill>
-            <a:srgbClr val="F2F2F2"/>
-          </a:solidFill>
-          <a:ln>
-            <a:noFill/>
-          </a:ln>
-          <a:effectLst/>
-        </p:spPr>
-        <p:style>
-          <a:lnRef idx="1">
-            <a:schemeClr val="accent1"/>
-          </a:lnRef>
-          <a:fillRef idx="3">
-            <a:schemeClr val="accent1"/>
-          </a:fillRef>
-          <a:effectRef idx="2">
-            <a:schemeClr val="accent1"/>
-          </a:effectRef>
-          <a:fontRef idx="minor">
-            <a:schemeClr val="lt1"/>
-          </a:fontRef>
-        </p:style>
-        <p:txBody>
-          <a:bodyPr rtlCol="0" anchor="ctr"/>
-          <a:lstStyle/>
-          <a:p>
-            <a:pPr algn="ctr"/>
-          </a:p>
-        </p:txBody>
-      </p:sp>
-      <p:sp>
-        <p:nvSpPr>
-          <p:cNvPr id="10" name="TextBox 9"/>
+              <a:t>Savings thrives without exploitable structure.</a:t>
+            </a:r>
+          </a:p>
+        </p:txBody>
+      </p:sp>
+      <p:sp>
+        <p:nvSpPr>
+          <p:cNvPr id="9" name="TextBox 8"/>
           <p:cNvSpPr txBox="1"/>
           <p:nvPr/>
         </p:nvSpPr>
         <p:spPr>
           <a:xfrm>
-            <a:off x="6300216" y="1883664"/>
-            <a:ext cx="2331720" cy="2743200"/>
+            <a:off x="320040" y="4572000"/>
+            <a:ext cx="8503920" cy="320040"/>
           </a:xfrm>
           <a:prstGeom prst="rect">
             <a:avLst/>
@@ -12154,115 +12402,24 @@
           <a:p>
             <a:pPr algn="l">
               <a:spcAft>
-                <a:spcPts val="500"/>
-              </a:spcAft>
-            </a:pPr>
-            <a:r>
-              <a:rPr sz="1200" b="1" i="0">
+                <a:spcPts val="0"/>
+              </a:spcAft>
+            </a:pPr>
+            <a:r>
+              <a:rPr sz="1050" b="1" i="0">
                 <a:solidFill>
                   <a:srgbClr val="003359"/>
                 </a:solidFill>
                 <a:latin typeface="Arial"/>
               </a:rPr>
-              <a:t>By depot position</a:t>
-            </a:r>
-          </a:p>
-          <a:p>
-            <a:pPr algn="l">
-              <a:spcAft>
-                <a:spcPts val="100"/>
-              </a:spcAft>
-            </a:pPr>
-            <a:r>
-              <a:rPr sz="1500" b="1" i="0">
-                <a:solidFill>
-                  <a:srgbClr val="005293"/>
-                </a:solidFill>
-                <a:latin typeface="Arial"/>
-              </a:rPr>
-              <a:t>60%  </a:t>
-            </a:r>
-            <a:r>
-              <a:rPr sz="950">
-                <a:solidFill>
-                  <a:srgbClr val="000000"/>
-                </a:solidFill>
-                <a:latin typeface="Arial"/>
-              </a:rPr>
-              <a:t>random</a:t>
-            </a:r>
-          </a:p>
-          <a:p>
-            <a:pPr algn="l">
-              <a:spcAft>
-                <a:spcPts val="100"/>
-              </a:spcAft>
-            </a:pPr>
-            <a:r>
-              <a:rPr sz="1500" b="1" i="0">
-                <a:solidFill>
-                  <a:srgbClr val="005293"/>
-                </a:solidFill>
-                <a:latin typeface="Arial"/>
-              </a:rPr>
-              <a:t>61%  </a:t>
-            </a:r>
-            <a:r>
-              <a:rPr sz="950">
-                <a:solidFill>
-                  <a:srgbClr val="000000"/>
-                </a:solidFill>
-                <a:latin typeface="Arial"/>
-              </a:rPr>
-              <a:t>center</a:t>
-            </a:r>
-          </a:p>
-          <a:p>
-            <a:pPr algn="l">
-              <a:spcAft>
-                <a:spcPts val="100"/>
-              </a:spcAft>
-            </a:pPr>
-            <a:r>
-              <a:rPr sz="1500" b="1" i="0">
-                <a:solidFill>
-                  <a:srgbClr val="005293"/>
-                </a:solidFill>
-                <a:latin typeface="Arial"/>
-              </a:rPr>
-              <a:t>70%  </a:t>
-            </a:r>
-            <a:r>
-              <a:rPr sz="950">
-                <a:solidFill>
-                  <a:srgbClr val="000000"/>
-                </a:solidFill>
-                <a:latin typeface="Arial"/>
-              </a:rPr>
-              <a:t>corner</a:t>
-            </a:r>
-          </a:p>
-          <a:p>
-            <a:pPr algn="l">
-              <a:spcAft>
-                <a:spcPts val="0"/>
-              </a:spcAft>
-            </a:pPr>
-            <a:r>
-              <a:rPr sz="900" b="0" i="1">
-                <a:solidFill>
-                  <a:srgbClr val="595959"/>
-                </a:solidFill>
-                <a:latin typeface="Arial"/>
-              </a:rPr>
-              <a:t>Random depots also have the lowest accuracy (33%).</a:t>
-            </a:r>
-          </a:p>
-        </p:txBody>
-      </p:sp>
-      <p:sp>
-        <p:nvSpPr>
-          <p:cNvPr id="11" name="TextBox 10"/>
+              <a:t>This is the signal the Random Forest exploits — the features, not the model class, are the heart of the project.</a:t>
+            </a:r>
+          </a:p>
+        </p:txBody>
+      </p:sp>
+      <p:sp>
+        <p:nvSpPr>
+          <p:cNvPr id="10" name="TextBox 9"/>
           <p:cNvSpPr txBox="1"/>
           <p:nvPr/>
         </p:nvSpPr>
@@ -12301,7 +12458,7 @@
       </p:sp>
       <p:sp>
         <p:nvSpPr>
-          <p:cNvPr id="12" name="TextBox 11"/>
+          <p:cNvPr id="11" name="TextBox 10"/>
           <p:cNvSpPr txBox="1"/>
           <p:nvPr/>
         </p:nvSpPr>
@@ -12392,7 +12549,7 @@
               <a:rPr>
                 <a:latin typeface="Arial"/>
               </a:rPr>
-              <a:t>Does It Transfer to Real Benchmarks?</a:t>
+              <a:t>Where It Works — and Where It Struggles</a:t>
             </a:r>
           </a:p>
         </p:txBody>
@@ -12431,29 +12588,57 @@
                 </a:solidFill>
                 <a:latin typeface="Arial"/>
               </a:rPr>
-              <a:t>Trained only on synthetic data — tested on 85 classic CVRPLIB instances (sets A, B, E, P)</a:t>
-            </a:r>
-          </a:p>
-        </p:txBody>
-      </p:sp>
-      <p:graphicFrame>
-        <p:nvGraphicFramePr>
-          <p:cNvPr id="5" name="Chart 4"/>
-          <p:cNvGraphicFramePr>
-            <a:graphicFrameLocks noGrp="1"/>
-          </p:cNvGraphicFramePr>
-          <p:nvPr/>
-        </p:nvGraphicFramePr>
-        <p:xfrm>
-          <a:off x="320040" y="1691640"/>
-          <a:ext cx="4937760" cy="3154680"/>
-        </p:xfrm>
-        <a:graphic>
-          <a:graphicData uri="http://schemas.openxmlformats.org/drawingml/2006/chart">
-            <c:chart xmlns:c="http://schemas.openxmlformats.org/drawingml/2006/chart" r:id="rId2"/>
-          </a:graphicData>
-        </a:graphic>
-      </p:graphicFrame>
+              <a:t>Random Forest on the test split, share of instances within 1% of best possible</a:t>
+            </a:r>
+          </a:p>
+        </p:txBody>
+      </p:sp>
+      <p:sp>
+        <p:nvSpPr>
+          <p:cNvPr id="5" name="Rounded Rectangle 4"/>
+          <p:cNvSpPr/>
+          <p:nvPr/>
+        </p:nvSpPr>
+        <p:spPr>
+          <a:xfrm>
+            <a:off x="320040" y="1737360"/>
+            <a:ext cx="2697480" cy="3017520"/>
+          </a:xfrm>
+          <a:prstGeom prst="roundRect">
+            <a:avLst>
+              <a:gd name="adj" fmla="val 7000"/>
+            </a:avLst>
+          </a:prstGeom>
+          <a:solidFill>
+            <a:srgbClr val="F2F2F2"/>
+          </a:solidFill>
+          <a:ln>
+            <a:noFill/>
+          </a:ln>
+          <a:effectLst/>
+        </p:spPr>
+        <p:style>
+          <a:lnRef idx="1">
+            <a:schemeClr val="accent1"/>
+          </a:lnRef>
+          <a:fillRef idx="3">
+            <a:schemeClr val="accent1"/>
+          </a:fillRef>
+          <a:effectRef idx="2">
+            <a:schemeClr val="accent1"/>
+          </a:effectRef>
+          <a:fontRef idx="minor">
+            <a:schemeClr val="lt1"/>
+          </a:fontRef>
+        </p:style>
+        <p:txBody>
+          <a:bodyPr rtlCol="0" anchor="ctr"/>
+          <a:lstStyle/>
+          <a:p>
+            <a:pPr algn="ctr"/>
+          </a:p>
+        </p:txBody>
+      </p:sp>
       <p:sp>
         <p:nvSpPr>
           <p:cNvPr id="6" name="TextBox 5"/>
@@ -12462,8 +12647,8 @@
         </p:nvSpPr>
         <p:spPr>
           <a:xfrm>
-            <a:off x="5532120" y="1783080"/>
-            <a:ext cx="3291840" cy="3017520"/>
+            <a:off x="502920" y="1883664"/>
+            <a:ext cx="2331720" cy="2743200"/>
           </a:xfrm>
           <a:prstGeom prst="rect">
             <a:avLst/>
@@ -12482,91 +12667,164 @@
               </a:spcAft>
             </a:pPr>
             <a:r>
-              <a:rPr sz="1300" b="1" i="0">
+              <a:rPr sz="1200" b="1" i="0">
                 <a:solidFill>
                   <a:srgbClr val="003359"/>
                 </a:solidFill>
                 <a:latin typeface="Arial"/>
               </a:rPr>
-              <a:t>The honest read</a:t>
+              <a:t>By instance size</a:t>
             </a:r>
           </a:p>
           <a:p>
             <a:pPr algn="l">
               <a:spcAft>
-                <a:spcPts val="500"/>
-              </a:spcAft>
-            </a:pPr>
-            <a:r>
-              <a:rPr sz="950" b="0" i="0">
+                <a:spcPts val="100"/>
+              </a:spcAft>
+            </a:pPr>
+            <a:r>
+              <a:rPr sz="1500" b="1" i="0">
+                <a:solidFill>
+                  <a:srgbClr val="005293"/>
+                </a:solidFill>
+                <a:latin typeface="Arial"/>
+              </a:rPr>
+              <a:t>58%  </a:t>
+            </a:r>
+            <a:r>
+              <a:rPr sz="950">
                 <a:solidFill>
                   <a:srgbClr val="000000"/>
                 </a:solidFill>
                 <a:latin typeface="Arial"/>
               </a:rPr>
-              <a:t>•  Within-1% rate still clearly better: 52.9% vs 43.5%.</a:t>
+              <a:t>20 customers</a:t>
             </a:r>
           </a:p>
           <a:p>
             <a:pPr algn="l">
               <a:spcAft>
-                <a:spcPts val="500"/>
-              </a:spcAft>
-            </a:pPr>
-            <a:r>
-              <a:rPr sz="950" b="0" i="0">
+                <a:spcPts val="100"/>
+              </a:spcAft>
+            </a:pPr>
+            <a:r>
+              <a:rPr sz="1500" b="1" i="0">
+                <a:solidFill>
+                  <a:srgbClr val="005293"/>
+                </a:solidFill>
+                <a:latin typeface="Arial"/>
+              </a:rPr>
+              <a:t>60%  </a:t>
+            </a:r>
+            <a:r>
+              <a:rPr sz="950">
                 <a:solidFill>
                   <a:srgbClr val="000000"/>
                 </a:solidFill>
                 <a:latin typeface="Arial"/>
               </a:rPr>
-              <a:t>•  But mean regret is essentially tied (1.84% vs 1.88%, m̂ = 0.98) — the in-distribution edge largely fades.</a:t>
+              <a:t>50 customers</a:t>
             </a:r>
           </a:p>
           <a:p>
             <a:pPr algn="l">
               <a:spcAft>
-                <a:spcPts val="500"/>
-              </a:spcAft>
-            </a:pPr>
-            <a:r>
-              <a:rPr sz="950" b="0" i="0">
+                <a:spcPts val="100"/>
+              </a:spcAft>
+            </a:pPr>
+            <a:r>
+              <a:rPr sz="1500" b="1" i="0">
+                <a:solidFill>
+                  <a:srgbClr val="005293"/>
+                </a:solidFill>
+                <a:latin typeface="Arial"/>
+              </a:rPr>
+              <a:t>71%  </a:t>
+            </a:r>
+            <a:r>
+              <a:rPr sz="950">
                 <a:solidFill>
                   <a:srgbClr val="000000"/>
                 </a:solidFill>
                 <a:latin typeface="Arial"/>
               </a:rPr>
-              <a:t>•  Mirrors the paper: stylized benchmark families are hard for synthetically trained selectors.</a:t>
+              <a:t>100 customers</a:t>
             </a:r>
           </a:p>
           <a:p>
             <a:pPr algn="l">
               <a:spcAft>
-                <a:spcPts val="500"/>
-              </a:spcAft>
-            </a:pPr>
-            <a:r>
-              <a:rPr sz="950" b="0" i="0">
-                <a:solidFill>
-                  <a:srgbClr val="000000"/>
-                </a:solidFill>
-                <a:latin typeface="Arial"/>
-              </a:rPr>
-              <a:t>•  Portfolio quality holds: best solver +1.98% vs proven optima; on E-n51-k5 the selector picks the winner (+0.19%, 0.16 s).</a:t>
-            </a:r>
-          </a:p>
-        </p:txBody>
-      </p:sp>
-      <p:sp>
-        <p:nvSpPr>
-          <p:cNvPr id="7" name="TextBox 6"/>
+                <a:spcPts val="0"/>
+              </a:spcAft>
+            </a:pPr>
+            <a:r>
+              <a:rPr sz="900" b="0" i="1">
+                <a:solidFill>
+                  <a:srgbClr val="595959"/>
+                </a:solidFill>
+                <a:latin typeface="Arial"/>
+              </a:rPr>
+              <a:t>More geometric structure → easier selection.</a:t>
+            </a:r>
+          </a:p>
+        </p:txBody>
+      </p:sp>
+      <p:sp>
+        <p:nvSpPr>
+          <p:cNvPr id="7" name="Rounded Rectangle 6"/>
+          <p:cNvSpPr/>
+          <p:nvPr/>
+        </p:nvSpPr>
+        <p:spPr>
+          <a:xfrm>
+            <a:off x="3218688" y="1737360"/>
+            <a:ext cx="2697480" cy="3017520"/>
+          </a:xfrm>
+          <a:prstGeom prst="roundRect">
+            <a:avLst>
+              <a:gd name="adj" fmla="val 7000"/>
+            </a:avLst>
+          </a:prstGeom>
+          <a:solidFill>
+            <a:srgbClr val="F2F2F2"/>
+          </a:solidFill>
+          <a:ln>
+            <a:noFill/>
+          </a:ln>
+          <a:effectLst/>
+        </p:spPr>
+        <p:style>
+          <a:lnRef idx="1">
+            <a:schemeClr val="accent1"/>
+          </a:lnRef>
+          <a:fillRef idx="3">
+            <a:schemeClr val="accent1"/>
+          </a:fillRef>
+          <a:effectRef idx="2">
+            <a:schemeClr val="accent1"/>
+          </a:effectRef>
+          <a:fontRef idx="minor">
+            <a:schemeClr val="lt1"/>
+          </a:fontRef>
+        </p:style>
+        <p:txBody>
+          <a:bodyPr rtlCol="0" anchor="ctr"/>
+          <a:lstStyle/>
+          <a:p>
+            <a:pPr algn="ctr"/>
+          </a:p>
+        </p:txBody>
+      </p:sp>
+      <p:sp>
+        <p:nvSpPr>
+          <p:cNvPr id="8" name="TextBox 7"/>
           <p:cNvSpPr txBox="1"/>
           <p:nvPr/>
         </p:nvSpPr>
         <p:spPr>
           <a:xfrm>
-            <a:off x="320040" y="4873752"/>
-            <a:ext cx="6217920" cy="219456"/>
+            <a:off x="3401568" y="1883664"/>
+            <a:ext cx="2331720" cy="2743200"/>
           </a:xfrm>
           <a:prstGeom prst="rect">
             <a:avLst/>
@@ -12581,10 +12839,316 @@
           <a:p>
             <a:pPr algn="l">
               <a:spcAft>
+                <a:spcPts val="500"/>
+              </a:spcAft>
+            </a:pPr>
+            <a:r>
+              <a:rPr sz="1200" b="1" i="0">
+                <a:solidFill>
+                  <a:srgbClr val="003359"/>
+                </a:solidFill>
+                <a:latin typeface="Arial"/>
+              </a:rPr>
+              <a:t>By demand regime</a:t>
+            </a:r>
+          </a:p>
+          <a:p>
+            <a:pPr algn="l">
+              <a:spcAft>
+                <a:spcPts val="100"/>
+              </a:spcAft>
+            </a:pPr>
+            <a:r>
+              <a:rPr sz="1500" b="1" i="0">
+                <a:solidFill>
+                  <a:srgbClr val="005293"/>
+                </a:solidFill>
+                <a:latin typeface="Arial"/>
+              </a:rPr>
+              <a:t>47%  </a:t>
+            </a:r>
+            <a:r>
+              <a:rPr sz="950">
+                <a:solidFill>
+                  <a:srgbClr val="000000"/>
+                </a:solidFill>
+                <a:latin typeface="Arial"/>
+              </a:rPr>
+              <a:t>high pressure</a:t>
+            </a:r>
+          </a:p>
+          <a:p>
+            <a:pPr algn="l">
+              <a:spcAft>
+                <a:spcPts val="100"/>
+              </a:spcAft>
+            </a:pPr>
+            <a:r>
+              <a:rPr sz="1500" b="1" i="0">
+                <a:solidFill>
+                  <a:srgbClr val="005293"/>
+                </a:solidFill>
+                <a:latin typeface="Arial"/>
+              </a:rPr>
+              <a:t>67%  </a:t>
+            </a:r>
+            <a:r>
+              <a:rPr sz="950">
+                <a:solidFill>
+                  <a:srgbClr val="000000"/>
+                </a:solidFill>
+                <a:latin typeface="Arial"/>
+              </a:rPr>
+              <a:t>low variance</a:t>
+            </a:r>
+          </a:p>
+          <a:p>
+            <a:pPr algn="l">
+              <a:spcAft>
+                <a:spcPts val="100"/>
+              </a:spcAft>
+            </a:pPr>
+            <a:r>
+              <a:rPr sz="1500" b="1" i="0">
+                <a:solidFill>
+                  <a:srgbClr val="005293"/>
+                </a:solidFill>
+                <a:latin typeface="Arial"/>
+              </a:rPr>
+              <a:t>69%  </a:t>
+            </a:r>
+            <a:r>
+              <a:rPr sz="950">
+                <a:solidFill>
+                  <a:srgbClr val="000000"/>
+                </a:solidFill>
+                <a:latin typeface="Arial"/>
+              </a:rPr>
+              <a:t>high var. / low pressure</a:t>
+            </a:r>
+          </a:p>
+          <a:p>
+            <a:pPr algn="l">
+              <a:spcAft>
                 <a:spcPts val="0"/>
               </a:spcAft>
             </a:pPr>
             <a:r>
+              <a:rPr sz="900" b="0" i="1">
+                <a:solidFill>
+                  <a:srgbClr val="595959"/>
+                </a:solidFill>
+                <a:latin typeface="Arial"/>
+              </a:rPr>
+              <a:t>Tightly constrained instances are intrinsically harder.</a:t>
+            </a:r>
+          </a:p>
+        </p:txBody>
+      </p:sp>
+      <p:sp>
+        <p:nvSpPr>
+          <p:cNvPr id="9" name="Rounded Rectangle 8"/>
+          <p:cNvSpPr/>
+          <p:nvPr/>
+        </p:nvSpPr>
+        <p:spPr>
+          <a:xfrm>
+            <a:off x="6117336" y="1737360"/>
+            <a:ext cx="2697480" cy="3017520"/>
+          </a:xfrm>
+          <a:prstGeom prst="roundRect">
+            <a:avLst>
+              <a:gd name="adj" fmla="val 7000"/>
+            </a:avLst>
+          </a:prstGeom>
+          <a:solidFill>
+            <a:srgbClr val="F2F2F2"/>
+          </a:solidFill>
+          <a:ln>
+            <a:noFill/>
+          </a:ln>
+          <a:effectLst/>
+        </p:spPr>
+        <p:style>
+          <a:lnRef idx="1">
+            <a:schemeClr val="accent1"/>
+          </a:lnRef>
+          <a:fillRef idx="3">
+            <a:schemeClr val="accent1"/>
+          </a:fillRef>
+          <a:effectRef idx="2">
+            <a:schemeClr val="accent1"/>
+          </a:effectRef>
+          <a:fontRef idx="minor">
+            <a:schemeClr val="lt1"/>
+          </a:fontRef>
+        </p:style>
+        <p:txBody>
+          <a:bodyPr rtlCol="0" anchor="ctr"/>
+          <a:lstStyle/>
+          <a:p>
+            <a:pPr algn="ctr"/>
+          </a:p>
+        </p:txBody>
+      </p:sp>
+      <p:sp>
+        <p:nvSpPr>
+          <p:cNvPr id="10" name="TextBox 9"/>
+          <p:cNvSpPr txBox="1"/>
+          <p:nvPr/>
+        </p:nvSpPr>
+        <p:spPr>
+          <a:xfrm>
+            <a:off x="6300216" y="1883664"/>
+            <a:ext cx="2331720" cy="2743200"/>
+          </a:xfrm>
+          <a:prstGeom prst="rect">
+            <a:avLst/>
+          </a:prstGeom>
+          <a:noFill/>
+        </p:spPr>
+        <p:txBody>
+          <a:bodyPr wrap="square" lIns="0" rIns="0" tIns="0" bIns="0">
+            <a:spAutoFit/>
+          </a:bodyPr>
+          <a:lstStyle/>
+          <a:p>
+            <a:pPr algn="l">
+              <a:spcAft>
+                <a:spcPts val="500"/>
+              </a:spcAft>
+            </a:pPr>
+            <a:r>
+              <a:rPr sz="1200" b="1" i="0">
+                <a:solidFill>
+                  <a:srgbClr val="003359"/>
+                </a:solidFill>
+                <a:latin typeface="Arial"/>
+              </a:rPr>
+              <a:t>By depot position</a:t>
+            </a:r>
+          </a:p>
+          <a:p>
+            <a:pPr algn="l">
+              <a:spcAft>
+                <a:spcPts val="100"/>
+              </a:spcAft>
+            </a:pPr>
+            <a:r>
+              <a:rPr sz="1500" b="1" i="0">
+                <a:solidFill>
+                  <a:srgbClr val="005293"/>
+                </a:solidFill>
+                <a:latin typeface="Arial"/>
+              </a:rPr>
+              <a:t>60%  </a:t>
+            </a:r>
+            <a:r>
+              <a:rPr sz="950">
+                <a:solidFill>
+                  <a:srgbClr val="000000"/>
+                </a:solidFill>
+                <a:latin typeface="Arial"/>
+              </a:rPr>
+              <a:t>random</a:t>
+            </a:r>
+          </a:p>
+          <a:p>
+            <a:pPr algn="l">
+              <a:spcAft>
+                <a:spcPts val="100"/>
+              </a:spcAft>
+            </a:pPr>
+            <a:r>
+              <a:rPr sz="1500" b="1" i="0">
+                <a:solidFill>
+                  <a:srgbClr val="005293"/>
+                </a:solidFill>
+                <a:latin typeface="Arial"/>
+              </a:rPr>
+              <a:t>61%  </a:t>
+            </a:r>
+            <a:r>
+              <a:rPr sz="950">
+                <a:solidFill>
+                  <a:srgbClr val="000000"/>
+                </a:solidFill>
+                <a:latin typeface="Arial"/>
+              </a:rPr>
+              <a:t>center</a:t>
+            </a:r>
+          </a:p>
+          <a:p>
+            <a:pPr algn="l">
+              <a:spcAft>
+                <a:spcPts val="100"/>
+              </a:spcAft>
+            </a:pPr>
+            <a:r>
+              <a:rPr sz="1500" b="1" i="0">
+                <a:solidFill>
+                  <a:srgbClr val="005293"/>
+                </a:solidFill>
+                <a:latin typeface="Arial"/>
+              </a:rPr>
+              <a:t>70%  </a:t>
+            </a:r>
+            <a:r>
+              <a:rPr sz="950">
+                <a:solidFill>
+                  <a:srgbClr val="000000"/>
+                </a:solidFill>
+                <a:latin typeface="Arial"/>
+              </a:rPr>
+              <a:t>corner</a:t>
+            </a:r>
+          </a:p>
+          <a:p>
+            <a:pPr algn="l">
+              <a:spcAft>
+                <a:spcPts val="0"/>
+              </a:spcAft>
+            </a:pPr>
+            <a:r>
+              <a:rPr sz="900" b="0" i="1">
+                <a:solidFill>
+                  <a:srgbClr val="595959"/>
+                </a:solidFill>
+                <a:latin typeface="Arial"/>
+              </a:rPr>
+              <a:t>Random depots also have the lowest accuracy (33%).</a:t>
+            </a:r>
+          </a:p>
+        </p:txBody>
+      </p:sp>
+      <p:sp>
+        <p:nvSpPr>
+          <p:cNvPr id="11" name="TextBox 10"/>
+          <p:cNvSpPr txBox="1"/>
+          <p:nvPr/>
+        </p:nvSpPr>
+        <p:spPr>
+          <a:xfrm>
+            <a:off x="320040" y="4873752"/>
+            <a:ext cx="6217920" cy="219456"/>
+          </a:xfrm>
+          <a:prstGeom prst="rect">
+            <a:avLst/>
+          </a:prstGeom>
+          <a:noFill/>
+        </p:spPr>
+        <p:txBody>
+          <a:bodyPr wrap="square" lIns="0" rIns="0" tIns="0" bIns="0">
+            <a:spAutoFit/>
+          </a:bodyPr>
+          <a:lstStyle/>
+          <a:p>
+            <a:pPr algn="l">
+              <a:spcAft>
+                <a:spcPts val="0"/>
+              </a:spcAft>
+            </a:pPr>
+            <a:r>
               <a:rPr sz="800" b="0" i="0">
                 <a:solidFill>
                   <a:srgbClr val="595959"/>
@@ -12598,7 +13162,7 @@
       </p:sp>
       <p:sp>
         <p:nvSpPr>
-          <p:cNvPr id="8" name="TextBox 7"/>
+          <p:cNvPr id="12" name="TextBox 11"/>
           <p:cNvSpPr txBox="1"/>
           <p:nvPr/>
         </p:nvSpPr>
@@ -12689,7 +13253,7 @@
               <a:rPr>
                 <a:latin typeface="Arial"/>
               </a:rPr>
-              <a:t>Extension: What Does 20 s of Compute Buy?</a:t>
+              <a:t>Does It Transfer to Real Benchmarks?</a:t>
             </a:r>
           </a:p>
         </p:txBody>
@@ -12728,21 +13292,39 @@
                 </a:solidFill>
                 <a:latin typeface="Arial"/>
               </a:rPr>
-              <a:t>PyVRP hybrid genetic search at the same 20 s budget — 45 test instances + E-n51-k5</a:t>
-            </a:r>
-          </a:p>
-        </p:txBody>
-      </p:sp>
-      <p:sp>
-        <p:nvSpPr>
-          <p:cNvPr id="5" name="TextBox 4"/>
+              <a:t>Trained only on synthetic data — tested on 85 classic CVRPLIB instances (sets A, B, E, P)</a:t>
+            </a:r>
+          </a:p>
+        </p:txBody>
+      </p:sp>
+      <p:graphicFrame>
+        <p:nvGraphicFramePr>
+          <p:cNvPr id="5" name="Chart 4"/>
+          <p:cNvGraphicFramePr>
+            <a:graphicFrameLocks noGrp="1"/>
+          </p:cNvGraphicFramePr>
+          <p:nvPr/>
+        </p:nvGraphicFramePr>
+        <p:xfrm>
+          <a:off x="320040" y="1691640"/>
+          <a:ext cx="4937760" cy="3154680"/>
+        </p:xfrm>
+        <a:graphic>
+          <a:graphicData uri="http://schemas.openxmlformats.org/drawingml/2006/chart">
+            <c:chart xmlns:c="http://schemas.openxmlformats.org/drawingml/2006/chart" r:id="rId2"/>
+          </a:graphicData>
+        </a:graphic>
+      </p:graphicFrame>
+      <p:sp>
+        <p:nvSpPr>
+          <p:cNvPr id="6" name="TextBox 5"/>
           <p:cNvSpPr txBox="1"/>
           <p:nvPr/>
         </p:nvSpPr>
         <p:spPr>
           <a:xfrm>
-            <a:off x="502920" y="1737360"/>
-            <a:ext cx="4389120" cy="274320"/>
+            <a:off x="5532120" y="1783080"/>
+            <a:ext cx="3291840" cy="3017520"/>
           </a:xfrm>
           <a:prstGeom prst="rect">
             <a:avLst/>
@@ -12757,62 +13339,82 @@
           <a:p>
             <a:pPr algn="l">
               <a:spcAft>
-                <a:spcPts val="0"/>
-              </a:spcAft>
-            </a:pPr>
-            <a:r>
-              <a:rPr sz="1150" b="1" i="0">
+                <a:spcPts val="500"/>
+              </a:spcAft>
+            </a:pPr>
+            <a:r>
+              <a:rPr sz="1300" b="1" i="0">
                 <a:solidFill>
                   <a:srgbClr val="003359"/>
                 </a:solidFill>
                 <a:latin typeface="Arial"/>
               </a:rPr>
-              <a:t>Time to answer (mean)</a:t>
-            </a:r>
-          </a:p>
-        </p:txBody>
-      </p:sp>
-      <p:sp>
-        <p:nvSpPr>
-          <p:cNvPr id="6" name="Rectangle 5"/>
-          <p:cNvSpPr/>
-          <p:nvPr/>
-        </p:nvSpPr>
-        <p:spPr>
-          <a:xfrm>
-            <a:off x="502920" y="2103120"/>
-            <a:ext cx="73152" cy="310896"/>
-          </a:xfrm>
-          <a:prstGeom prst="rect">
-            <a:avLst/>
-          </a:prstGeom>
-          <a:solidFill>
-            <a:srgbClr val="E37222"/>
-          </a:solidFill>
-          <a:ln>
-            <a:noFill/>
-          </a:ln>
-          <a:effectLst/>
-        </p:spPr>
-        <p:style>
-          <a:lnRef idx="1">
-            <a:schemeClr val="accent1"/>
-          </a:lnRef>
-          <a:fillRef idx="3">
-            <a:schemeClr val="accent1"/>
-          </a:fillRef>
-          <a:effectRef idx="2">
-            <a:schemeClr val="accent1"/>
-          </a:effectRef>
-          <a:fontRef idx="minor">
-            <a:schemeClr val="lt1"/>
-          </a:fontRef>
-        </p:style>
-        <p:txBody>
-          <a:bodyPr rtlCol="0" anchor="ctr"/>
-          <a:lstStyle/>
-          <a:p>
-            <a:pPr algn="ctr"/>
+              <a:t>The honest read</a:t>
+            </a:r>
+          </a:p>
+          <a:p>
+            <a:pPr algn="l">
+              <a:spcAft>
+                <a:spcPts val="500"/>
+              </a:spcAft>
+            </a:pPr>
+            <a:r>
+              <a:rPr sz="950" b="0" i="0">
+                <a:solidFill>
+                  <a:srgbClr val="000000"/>
+                </a:solidFill>
+                <a:latin typeface="Arial"/>
+              </a:rPr>
+              <a:t>•  Within-1% rate still clearly better: 52.9% vs 43.5%.</a:t>
+            </a:r>
+          </a:p>
+          <a:p>
+            <a:pPr algn="l">
+              <a:spcAft>
+                <a:spcPts val="500"/>
+              </a:spcAft>
+            </a:pPr>
+            <a:r>
+              <a:rPr sz="950" b="0" i="0">
+                <a:solidFill>
+                  <a:srgbClr val="000000"/>
+                </a:solidFill>
+                <a:latin typeface="Arial"/>
+              </a:rPr>
+              <a:t>•  But mean regret is essentially tied (1.84% vs 1.88%, m̂ = 0.98) — the in-distribution edge largely fades.</a:t>
+            </a:r>
+          </a:p>
+          <a:p>
+            <a:pPr algn="l">
+              <a:spcAft>
+                <a:spcPts val="500"/>
+              </a:spcAft>
+            </a:pPr>
+            <a:r>
+              <a:rPr sz="950" b="0" i="0">
+                <a:solidFill>
+                  <a:srgbClr val="000000"/>
+                </a:solidFill>
+                <a:latin typeface="Arial"/>
+              </a:rPr>
+              <a:t>•  Mirrors the paper: stylized benchmark families are hard for synthetically trained selectors.</a:t>
+            </a:r>
+          </a:p>
+          <a:p>
+            <a:pPr algn="l">
+              <a:spcAft>
+                <a:spcPts val="500"/>
+              </a:spcAft>
+            </a:pPr>
+            <a:r>
+              <a:rPr sz="950" b="0" i="0">
+                <a:solidFill>
+                  <a:srgbClr val="000000"/>
+                </a:solidFill>
+                <a:latin typeface="Arial"/>
+              </a:rPr>
+              <a:t>•  Portfolio quality holds: best solver +1.98% vs proven optima; on E-n51-k5 the selector picks the winner (+0.19%, 0.16 s).</a:t>
+            </a:r>
           </a:p>
         </p:txBody>
       </p:sp>
@@ -12824,8 +13426,8 @@
         </p:nvSpPr>
         <p:spPr>
           <a:xfrm>
-            <a:off x="685800" y="2130552"/>
-            <a:ext cx="3931920" cy="274320"/>
+            <a:off x="320040" y="4873752"/>
+            <a:ext cx="6217920" cy="219456"/>
           </a:xfrm>
           <a:prstGeom prst="rect">
             <a:avLst/>
@@ -12844,432 +13446,12 @@
               </a:spcAft>
             </a:pPr>
             <a:r>
-              <a:rPr sz="1000" b="1" i="0">
-                <a:solidFill>
-                  <a:srgbClr val="000000"/>
-                </a:solidFill>
-                <a:latin typeface="Arial"/>
-              </a:rPr>
-              <a:t>ML-selected heuristic — 0.22 s</a:t>
-            </a:r>
-          </a:p>
-        </p:txBody>
-      </p:sp>
-      <p:sp>
-        <p:nvSpPr>
-          <p:cNvPr id="8" name="Rectangle 7"/>
-          <p:cNvSpPr/>
-          <p:nvPr/>
-        </p:nvSpPr>
-        <p:spPr>
-          <a:xfrm>
-            <a:off x="502920" y="2578608"/>
-            <a:ext cx="4297680" cy="310896"/>
-          </a:xfrm>
-          <a:prstGeom prst="rect">
-            <a:avLst/>
-          </a:prstGeom>
-          <a:solidFill>
-            <a:srgbClr val="005293"/>
-          </a:solidFill>
-          <a:ln>
-            <a:noFill/>
-          </a:ln>
-          <a:effectLst/>
-        </p:spPr>
-        <p:style>
-          <a:lnRef idx="1">
-            <a:schemeClr val="accent1"/>
-          </a:lnRef>
-          <a:fillRef idx="3">
-            <a:schemeClr val="accent1"/>
-          </a:fillRef>
-          <a:effectRef idx="2">
-            <a:schemeClr val="accent1"/>
-          </a:effectRef>
-          <a:fontRef idx="minor">
-            <a:schemeClr val="lt1"/>
-          </a:fontRef>
-        </p:style>
-        <p:txBody>
-          <a:bodyPr rtlCol="0" anchor="ctr"/>
-          <a:lstStyle/>
-          <a:p>
-            <a:pPr algn="ctr"/>
-          </a:p>
-        </p:txBody>
-      </p:sp>
-      <p:sp>
-        <p:nvSpPr>
-          <p:cNvPr id="9" name="TextBox 8"/>
-          <p:cNvSpPr txBox="1"/>
-          <p:nvPr/>
-        </p:nvSpPr>
-        <p:spPr>
-          <a:xfrm>
-            <a:off x="612648" y="2606040"/>
-            <a:ext cx="4114800" cy="274320"/>
-          </a:xfrm>
-          <a:prstGeom prst="rect">
-            <a:avLst/>
-          </a:prstGeom>
-          <a:noFill/>
-        </p:spPr>
-        <p:txBody>
-          <a:bodyPr wrap="square" lIns="0" rIns="0" tIns="0" bIns="0">
-            <a:spAutoFit/>
-          </a:bodyPr>
-          <a:lstStyle/>
-          <a:p>
-            <a:pPr algn="l">
-              <a:spcAft>
-                <a:spcPts val="0"/>
-              </a:spcAft>
-            </a:pPr>
-            <a:r>
-              <a:rPr sz="1000" b="1" i="0">
-                <a:solidFill>
-                  <a:srgbClr val="FFFFFF"/>
-                </a:solidFill>
-                <a:latin typeface="Arial"/>
-              </a:rPr>
-              <a:t>HGS — 20.0 s (the entire budget)</a:t>
-            </a:r>
-          </a:p>
-        </p:txBody>
-      </p:sp>
-      <p:sp>
-        <p:nvSpPr>
-          <p:cNvPr id="10" name="TextBox 9"/>
-          <p:cNvSpPr txBox="1"/>
-          <p:nvPr/>
-        </p:nvSpPr>
-        <p:spPr>
-          <a:xfrm>
-            <a:off x="502920" y="3017520"/>
-            <a:ext cx="4389120" cy="274320"/>
-          </a:xfrm>
-          <a:prstGeom prst="rect">
-            <a:avLst/>
-          </a:prstGeom>
-          <a:noFill/>
-        </p:spPr>
-        <p:txBody>
-          <a:bodyPr wrap="square" lIns="0" rIns="0" tIns="0" bIns="0">
-            <a:spAutoFit/>
-          </a:bodyPr>
-          <a:lstStyle/>
-          <a:p>
-            <a:pPr algn="l">
-              <a:spcAft>
-                <a:spcPts val="0"/>
-              </a:spcAft>
-            </a:pPr>
-            <a:r>
-              <a:rPr sz="1100" b="1" i="0">
-                <a:solidFill>
-                  <a:srgbClr val="E37222"/>
-                </a:solidFill>
-                <a:latin typeface="Arial"/>
-              </a:rPr>
-              <a:t>≈ 91× more compute per answer</a:t>
-            </a:r>
-          </a:p>
-        </p:txBody>
-      </p:sp>
-      <p:sp>
-        <p:nvSpPr>
-          <p:cNvPr id="11" name="TextBox 10"/>
-          <p:cNvSpPr txBox="1"/>
-          <p:nvPr/>
-        </p:nvSpPr>
-        <p:spPr>
-          <a:xfrm>
-            <a:off x="502920" y="3474720"/>
-            <a:ext cx="4206240" cy="1280160"/>
-          </a:xfrm>
-          <a:prstGeom prst="rect">
-            <a:avLst/>
-          </a:prstGeom>
-          <a:noFill/>
-        </p:spPr>
-        <p:txBody>
-          <a:bodyPr wrap="square" lIns="0" rIns="0" tIns="0" bIns="0">
-            <a:spAutoFit/>
-          </a:bodyPr>
-          <a:lstStyle/>
-          <a:p>
-            <a:pPr algn="l">
-              <a:spcAft>
-                <a:spcPts val="300"/>
-              </a:spcAft>
-            </a:pPr>
-            <a:r>
-              <a:rPr sz="1150" b="1" i="0">
-                <a:solidFill>
-                  <a:srgbClr val="003359"/>
-                </a:solidFill>
-                <a:latin typeface="Arial"/>
-              </a:rPr>
-              <a:t>Why HGS stays out of the portfolio</a:t>
-            </a:r>
-          </a:p>
-          <a:p>
-            <a:pPr algn="l">
-              <a:spcAft>
-                <a:spcPts val="0"/>
-              </a:spcAft>
-            </a:pPr>
-            <a:r>
-              <a:rPr sz="950" b="0" i="0">
-                <a:solidFill>
-                  <a:srgbClr val="000000"/>
-                </a:solidFill>
-                <a:latin typeface="Arial"/>
-              </a:rPr>
-              <a:t>It wins or ties the portfolio oracle on 100% of sampled instances — as a label class it would swallow the dataset. As a reference, it prices the trade-off.</a:t>
-            </a:r>
-          </a:p>
-        </p:txBody>
-      </p:sp>
-      <p:sp>
-        <p:nvSpPr>
-          <p:cNvPr id="12" name="TextBox 11"/>
-          <p:cNvSpPr txBox="1"/>
-          <p:nvPr/>
-        </p:nvSpPr>
-        <p:spPr>
-          <a:xfrm>
-            <a:off x="5212080" y="1783080"/>
-            <a:ext cx="3566160" cy="914400"/>
-          </a:xfrm>
-          <a:prstGeom prst="rect">
-            <a:avLst/>
-          </a:prstGeom>
-          <a:noFill/>
-        </p:spPr>
-        <p:txBody>
-          <a:bodyPr wrap="square" lIns="0" rIns="0" tIns="0" bIns="0">
-            <a:spAutoFit/>
-          </a:bodyPr>
-          <a:lstStyle/>
-          <a:p>
-            <a:pPr algn="l">
-              <a:spcAft>
-                <a:spcPts val="100"/>
-              </a:spcAft>
-            </a:pPr>
-            <a:r>
-              <a:rPr sz="2600" b="1" i="0">
-                <a:solidFill>
-                  <a:srgbClr val="003359"/>
-                </a:solidFill>
-                <a:latin typeface="Arial"/>
-              </a:rPr>
-              <a:t>+3.5%</a:t>
-            </a:r>
-          </a:p>
-          <a:p>
-            <a:pPr algn="l">
-              <a:spcAft>
-                <a:spcPts val="400"/>
-              </a:spcAft>
-            </a:pPr>
-            <a:r>
-              <a:rPr sz="950" b="0" i="0">
+              <a:rPr sz="800" b="0" i="0">
                 <a:solidFill>
                   <a:srgbClr val="595959"/>
                 </a:solidFill>
                 <a:latin typeface="Arial"/>
               </a:rPr>
-              <a:t>mean quality gain of HGS over the ML-selected heuristic (+2.1% over the oracle)</a:t>
-            </a:r>
-          </a:p>
-        </p:txBody>
-      </p:sp>
-      <p:sp>
-        <p:nvSpPr>
-          <p:cNvPr id="13" name="TextBox 12"/>
-          <p:cNvSpPr txBox="1"/>
-          <p:nvPr/>
-        </p:nvSpPr>
-        <p:spPr>
-          <a:xfrm>
-            <a:off x="5212080" y="2743200"/>
-            <a:ext cx="3566160" cy="914400"/>
-          </a:xfrm>
-          <a:prstGeom prst="rect">
-            <a:avLst/>
-          </a:prstGeom>
-          <a:noFill/>
-        </p:spPr>
-        <p:txBody>
-          <a:bodyPr wrap="square" lIns="0" rIns="0" tIns="0" bIns="0">
-            <a:spAutoFit/>
-          </a:bodyPr>
-          <a:lstStyle/>
-          <a:p>
-            <a:pPr algn="l">
-              <a:spcAft>
-                <a:spcPts val="100"/>
-              </a:spcAft>
-            </a:pPr>
-            <a:r>
-              <a:rPr sz="1700" b="1" i="0">
-                <a:solidFill>
-                  <a:srgbClr val="003359"/>
-                </a:solidFill>
-                <a:latin typeface="Arial"/>
-              </a:rPr>
-              <a:t>2.5% → 4.3%</a:t>
-            </a:r>
-          </a:p>
-          <a:p>
-            <a:pPr algn="l">
-              <a:spcAft>
-                <a:spcPts val="400"/>
-              </a:spcAft>
-            </a:pPr>
-            <a:r>
-              <a:rPr sz="950" b="0" i="0">
-                <a:solidFill>
-                  <a:srgbClr val="595959"/>
-                </a:solidFill>
-                <a:latin typeface="Arial"/>
-              </a:rPr>
-              <a:t>the gain grows with instance size (n = 20 → 100)</a:t>
-            </a:r>
-          </a:p>
-        </p:txBody>
-      </p:sp>
-      <p:sp>
-        <p:nvSpPr>
-          <p:cNvPr id="14" name="TextBox 13"/>
-          <p:cNvSpPr txBox="1"/>
-          <p:nvPr/>
-        </p:nvSpPr>
-        <p:spPr>
-          <a:xfrm>
-            <a:off x="5212080" y="3520440"/>
-            <a:ext cx="3566160" cy="914400"/>
-          </a:xfrm>
-          <a:prstGeom prst="rect">
-            <a:avLst/>
-          </a:prstGeom>
-          <a:noFill/>
-        </p:spPr>
-        <p:txBody>
-          <a:bodyPr wrap="square" lIns="0" rIns="0" tIns="0" bIns="0">
-            <a:spAutoFit/>
-          </a:bodyPr>
-          <a:lstStyle/>
-          <a:p>
-            <a:pPr algn="l">
-              <a:spcAft>
-                <a:spcPts val="100"/>
-              </a:spcAft>
-            </a:pPr>
-            <a:r>
-              <a:rPr sz="1700" b="1" i="0">
-                <a:solidFill>
-                  <a:srgbClr val="003359"/>
-                </a:solidFill>
-                <a:latin typeface="Arial"/>
-              </a:rPr>
-              <a:t>521 = optimum</a:t>
-            </a:r>
-          </a:p>
-          <a:p>
-            <a:pPr algn="l">
-              <a:spcAft>
-                <a:spcPts val="400"/>
-              </a:spcAft>
-            </a:pPr>
-            <a:r>
-              <a:rPr sz="950" b="0" i="0">
-                <a:solidFill>
-                  <a:srgbClr val="595959"/>
-                </a:solidFill>
-                <a:latin typeface="Arial"/>
-              </a:rPr>
-              <a:t>HGS recovers the proven optimum on E-n51-k5 within the budget</a:t>
-            </a:r>
-          </a:p>
-        </p:txBody>
-      </p:sp>
-      <p:sp>
-        <p:nvSpPr>
-          <p:cNvPr id="15" name="TextBox 14"/>
-          <p:cNvSpPr txBox="1"/>
-          <p:nvPr/>
-        </p:nvSpPr>
-        <p:spPr>
-          <a:xfrm>
-            <a:off x="320040" y="4526280"/>
-            <a:ext cx="8503920" cy="320040"/>
-          </a:xfrm>
-          <a:prstGeom prst="rect">
-            <a:avLst/>
-          </a:prstGeom>
-          <a:noFill/>
-        </p:spPr>
-        <p:txBody>
-          <a:bodyPr wrap="square" lIns="0" rIns="0" tIns="0" bIns="0">
-            <a:spAutoFit/>
-          </a:bodyPr>
-          <a:lstStyle/>
-          <a:p>
-            <a:pPr algn="l">
-              <a:spcAft>
-                <a:spcPts val="0"/>
-              </a:spcAft>
-            </a:pPr>
-            <a:r>
-              <a:rPr sz="1050" b="1" i="0">
-                <a:solidFill>
-                  <a:srgbClr val="003359"/>
-                </a:solidFill>
-                <a:latin typeface="Arial"/>
-              </a:rPr>
-              <a:t>Real-time answers &amp; warm starts → ML-selected heuristic;  quality at 20 s per instance → run HGS.</a:t>
-            </a:r>
-          </a:p>
-        </p:txBody>
-      </p:sp>
-      <p:sp>
-        <p:nvSpPr>
-          <p:cNvPr id="16" name="TextBox 15"/>
-          <p:cNvSpPr txBox="1"/>
-          <p:nvPr/>
-        </p:nvSpPr>
-        <p:spPr>
-          <a:xfrm>
-            <a:off x="320040" y="4873752"/>
-            <a:ext cx="6217920" cy="219456"/>
-          </a:xfrm>
-          <a:prstGeom prst="rect">
-            <a:avLst/>
-          </a:prstGeom>
-          <a:noFill/>
-        </p:spPr>
-        <p:txBody>
-          <a:bodyPr wrap="square" lIns="0" rIns="0" tIns="0" bIns="0">
-            <a:spAutoFit/>
-          </a:bodyPr>
-          <a:lstStyle/>
-          <a:p>
-            <a:pPr algn="l">
-              <a:spcAft>
-                <a:spcPts val="0"/>
-              </a:spcAft>
-            </a:pPr>
-            <a:r>
-              <a:rPr sz="800" b="0" i="0">
-                <a:solidFill>
-                  <a:srgbClr val="595959"/>
-                </a:solidFill>
-                <a:latin typeface="Arial"/>
-              </a:rPr>
               <a:t>Learning which VRP solver works best | Computational Logistics | 21. Juli 2026</a:t>
             </a:r>
           </a:p>
@@ -13277,7 +13459,7 @@
       </p:sp>
       <p:sp>
         <p:nvSpPr>
-          <p:cNvPr id="17" name="TextBox 16"/>
+          <p:cNvPr id="8" name="TextBox 7"/>
           <p:cNvSpPr txBox="1"/>
           <p:nvPr/>
         </p:nvSpPr>
@@ -13368,29 +13550,105 @@
               <a:rPr>
                 <a:latin typeface="Arial"/>
               </a:rPr>
-              <a:t>Limitations and Takeaways</a:t>
-            </a:r>
-          </a:p>
-        </p:txBody>
-      </p:sp>
-      <p:sp>
-        <p:nvSpPr>
-          <p:cNvPr id="4" name="Rounded Rectangle 3"/>
+              <a:t>Extension: What Does 20 s of Compute Buy?</a:t>
+            </a:r>
+          </a:p>
+        </p:txBody>
+      </p:sp>
+      <p:sp>
+        <p:nvSpPr>
+          <p:cNvPr id="4" name="TextBox 3"/>
+          <p:cNvSpPr txBox="1"/>
+          <p:nvPr/>
+        </p:nvSpPr>
+        <p:spPr>
+          <a:xfrm>
+            <a:off x="320040" y="1435608"/>
+            <a:ext cx="8503920" cy="274320"/>
+          </a:xfrm>
+          <a:prstGeom prst="rect">
+            <a:avLst/>
+          </a:prstGeom>
+          <a:noFill/>
+        </p:spPr>
+        <p:txBody>
+          <a:bodyPr wrap="square" lIns="0" rIns="0" tIns="0" bIns="0">
+            <a:spAutoFit/>
+          </a:bodyPr>
+          <a:lstStyle/>
+          <a:p>
+            <a:pPr algn="l">
+              <a:spcAft>
+                <a:spcPts val="400"/>
+              </a:spcAft>
+            </a:pPr>
+            <a:r>
+              <a:rPr sz="1100" b="0" i="1">
+                <a:solidFill>
+                  <a:srgbClr val="595959"/>
+                </a:solidFill>
+                <a:latin typeface="Arial"/>
+              </a:rPr>
+              <a:t>PyVRP hybrid genetic search at the same 20 s budget — 45 test instances + E-n51-k5</a:t>
+            </a:r>
+          </a:p>
+        </p:txBody>
+      </p:sp>
+      <p:sp>
+        <p:nvSpPr>
+          <p:cNvPr id="5" name="TextBox 4"/>
+          <p:cNvSpPr txBox="1"/>
+          <p:nvPr/>
+        </p:nvSpPr>
+        <p:spPr>
+          <a:xfrm>
+            <a:off x="502920" y="1737360"/>
+            <a:ext cx="4389120" cy="274320"/>
+          </a:xfrm>
+          <a:prstGeom prst="rect">
+            <a:avLst/>
+          </a:prstGeom>
+          <a:noFill/>
+        </p:spPr>
+        <p:txBody>
+          <a:bodyPr wrap="square" lIns="0" rIns="0" tIns="0" bIns="0">
+            <a:spAutoFit/>
+          </a:bodyPr>
+          <a:lstStyle/>
+          <a:p>
+            <a:pPr algn="l">
+              <a:spcAft>
+                <a:spcPts val="0"/>
+              </a:spcAft>
+            </a:pPr>
+            <a:r>
+              <a:rPr sz="1150" b="1" i="0">
+                <a:solidFill>
+                  <a:srgbClr val="003359"/>
+                </a:solidFill>
+                <a:latin typeface="Arial"/>
+              </a:rPr>
+              <a:t>Time to answer (mean)</a:t>
+            </a:r>
+          </a:p>
+        </p:txBody>
+      </p:sp>
+      <p:sp>
+        <p:nvSpPr>
+          <p:cNvPr id="6" name="Rectangle 5"/>
           <p:cNvSpPr/>
           <p:nvPr/>
         </p:nvSpPr>
         <p:spPr>
           <a:xfrm>
-            <a:off x="320040" y="1600200"/>
-            <a:ext cx="4114800" cy="3154680"/>
-          </a:xfrm>
-          <a:prstGeom prst="roundRect">
-            <a:avLst>
-              <a:gd name="adj" fmla="val 7000"/>
-            </a:avLst>
-          </a:prstGeom>
-          <a:solidFill>
-            <a:srgbClr val="F2F2F2"/>
+            <a:off x="502920" y="2103120"/>
+            <a:ext cx="73152" cy="310896"/>
+          </a:xfrm>
+          <a:prstGeom prst="rect">
+            <a:avLst/>
+          </a:prstGeom>
+          <a:solidFill>
+            <a:srgbClr val="E37222"/>
           </a:solidFill>
           <a:ln>
             <a:noFill/>
@@ -13421,14 +13679,14 @@
       </p:sp>
       <p:sp>
         <p:nvSpPr>
-          <p:cNvPr id="5" name="TextBox 4"/>
+          <p:cNvPr id="7" name="TextBox 6"/>
           <p:cNvSpPr txBox="1"/>
           <p:nvPr/>
         </p:nvSpPr>
         <p:spPr>
           <a:xfrm>
-            <a:off x="521207" y="1764792"/>
-            <a:ext cx="3712463" cy="2834640"/>
+            <a:off x="685800" y="2130552"/>
+            <a:ext cx="3931920" cy="274320"/>
           </a:xfrm>
           <a:prstGeom prst="rect">
             <a:avLst/>
@@ -13443,103 +13701,37 @@
           <a:p>
             <a:pPr algn="l">
               <a:spcAft>
-                <a:spcPts val="500"/>
-              </a:spcAft>
-            </a:pPr>
-            <a:r>
-              <a:rPr sz="1250" b="1" i="0">
-                <a:solidFill>
-                  <a:srgbClr val="003359"/>
-                </a:solidFill>
-                <a:latin typeface="Arial"/>
-              </a:rPr>
-              <a:t>Limitations — stated plainly</a:t>
-            </a:r>
-          </a:p>
-          <a:p>
-            <a:pPr algn="l">
-              <a:spcAft>
-                <a:spcPts val="500"/>
-              </a:spcAft>
-            </a:pPr>
-            <a:r>
-              <a:rPr sz="950" b="0" i="0">
+                <a:spcPts val="0"/>
+              </a:spcAft>
+            </a:pPr>
+            <a:r>
+              <a:rPr sz="1000" b="1" i="0">
                 <a:solidFill>
                   <a:srgbClr val="000000"/>
                 </a:solidFill>
                 <a:latin typeface="Arial"/>
               </a:rPr>
-              <a:t>•  Trained on synthetic data; transfer to real benchmarks is partial (m̂ ≈ 1 there).</a:t>
-            </a:r>
-          </a:p>
-          <a:p>
-            <a:pPr algn="l">
-              <a:spcAft>
-                <a:spcPts val="500"/>
-              </a:spcAft>
-            </a:pPr>
-            <a:r>
-              <a:rPr sz="950" b="0" i="0">
-                <a:solidFill>
-                  <a:srgbClr val="000000"/>
-                </a:solidFill>
-                <a:latin typeface="Arial"/>
-              </a:rPr>
-              <a:t>•  Labels are the portfolio's best, not true optima (portfolio best ≈ +2% vs proven optima).</a:t>
-            </a:r>
-          </a:p>
-          <a:p>
-            <a:pPr algn="l">
-              <a:spcAft>
-                <a:spcPts val="500"/>
-              </a:spcAft>
-            </a:pPr>
-            <a:r>
-              <a:rPr sz="950" b="0" i="0">
-                <a:solidFill>
-                  <a:srgbClr val="000000"/>
-                </a:solidFill>
-                <a:latin typeface="Arial"/>
-              </a:rPr>
-              <a:t>•  The 20 s budget bounds runtime but doesn't reward faster solvers among non-ties.</a:t>
-            </a:r>
-          </a:p>
-          <a:p>
-            <a:pPr algn="l">
-              <a:spcAft>
-                <a:spcPts val="500"/>
-              </a:spcAft>
-            </a:pPr>
-            <a:r>
-              <a:rPr sz="950" b="0" i="0">
-                <a:solidFill>
-                  <a:srgbClr val="000000"/>
-                </a:solidFill>
-                <a:latin typeface="Arial"/>
-              </a:rPr>
-              <a:t>•  Exact baseline uses a weak MTZ formulation; free-license size caps apply.</a:t>
-            </a:r>
-          </a:p>
-        </p:txBody>
-      </p:sp>
-      <p:sp>
-        <p:nvSpPr>
-          <p:cNvPr id="6" name="Rounded Rectangle 5"/>
+              <a:t>ML-selected heuristic — 0.22 s</a:t>
+            </a:r>
+          </a:p>
+        </p:txBody>
+      </p:sp>
+      <p:sp>
+        <p:nvSpPr>
+          <p:cNvPr id="8" name="Rectangle 7"/>
           <p:cNvSpPr/>
           <p:nvPr/>
         </p:nvSpPr>
         <p:spPr>
           <a:xfrm>
-            <a:off x="4709160" y="1600200"/>
-            <a:ext cx="4114800" cy="3154680"/>
-          </a:xfrm>
-          <a:prstGeom prst="roundRect">
-            <a:avLst>
-              <a:gd name="adj" fmla="val 7000"/>
-            </a:avLst>
-          </a:prstGeom>
-          <a:solidFill>
-            <a:srgbClr val="0065BD"/>
+            <a:off x="502920" y="2578608"/>
+            <a:ext cx="4297680" cy="310896"/>
+          </a:xfrm>
+          <a:prstGeom prst="rect">
+            <a:avLst/>
+          </a:prstGeom>
+          <a:solidFill>
+            <a:srgbClr val="005293"/>
           </a:solidFill>
           <a:ln>
             <a:noFill/>
@@ -13570,14 +13762,14 @@
       </p:sp>
       <p:sp>
         <p:nvSpPr>
-          <p:cNvPr id="7" name="TextBox 6"/>
+          <p:cNvPr id="9" name="TextBox 8"/>
           <p:cNvSpPr txBox="1"/>
           <p:nvPr/>
         </p:nvSpPr>
         <p:spPr>
           <a:xfrm>
-            <a:off x="4910328" y="1764792"/>
-            <a:ext cx="3712463" cy="2834640"/>
+            <a:off x="612648" y="2606040"/>
+            <a:ext cx="4114800" cy="274320"/>
           </a:xfrm>
           <a:prstGeom prst="rect">
             <a:avLst/>
@@ -13592,95 +13784,31 @@
           <a:p>
             <a:pPr algn="l">
               <a:spcAft>
-                <a:spcPts val="500"/>
-              </a:spcAft>
-            </a:pPr>
-            <a:r>
-              <a:rPr sz="1250" b="1" i="0">
+                <a:spcPts val="0"/>
+              </a:spcAft>
+            </a:pPr>
+            <a:r>
+              <a:rPr sz="1000" b="1" i="0">
                 <a:solidFill>
                   <a:srgbClr val="FFFFFF"/>
                 </a:solidFill>
                 <a:latin typeface="Arial"/>
               </a:rPr>
-              <a:t>What holds up</a:t>
-            </a:r>
-          </a:p>
-          <a:p>
-            <a:pPr algn="l">
-              <a:spcAft>
-                <a:spcPts val="500"/>
-              </a:spcAft>
-            </a:pPr>
-            <a:r>
-              <a:rPr sz="950" b="0" i="0">
-                <a:solidFill>
-                  <a:srgbClr val="FFFFFF"/>
-                </a:solidFill>
-                <a:latin typeface="Arial"/>
-              </a:rPr>
-              <a:t>•  Per-instance selection beats the single-best-solver baseline in-distribution (m̂ = 0.741).</a:t>
-            </a:r>
-          </a:p>
-          <a:p>
-            <a:pPr algn="l">
-              <a:spcAft>
-                <a:spcPts val="500"/>
-              </a:spcAft>
-            </a:pPr>
-            <a:r>
-              <a:rPr sz="950" b="0" i="0">
-                <a:solidFill>
-                  <a:srgbClr val="FFFFFF"/>
-                </a:solidFill>
-                <a:latin typeface="Arial"/>
-              </a:rPr>
-              <a:t>•  Cheap pre-solution features carry real signal — depot geometry above all.</a:t>
-            </a:r>
-          </a:p>
-          <a:p>
-            <a:pPr algn="l">
-              <a:spcAft>
-                <a:spcPts val="500"/>
-              </a:spcAft>
-            </a:pPr>
-            <a:r>
-              <a:rPr sz="950" b="0" i="0">
-                <a:solidFill>
-                  <a:srgbClr val="FFFFFF"/>
-                </a:solidFill>
-                <a:latin typeface="Arial"/>
-              </a:rPr>
-              <a:t>•  Every claim is backed by frozen, integrity-checked, reproducible artifacts.</a:t>
-            </a:r>
-          </a:p>
-          <a:p>
-            <a:pPr algn="l">
-              <a:spcAft>
-                <a:spcPts val="500"/>
-              </a:spcAft>
-            </a:pPr>
-            <a:r>
-              <a:rPr sz="950" b="0" i="0">
-                <a:solidFill>
-                  <a:srgbClr val="FFFFFF"/>
-                </a:solidFill>
-                <a:latin typeface="Arial"/>
-              </a:rPr>
-              <a:t>•  The speed-quality trade-off is quantified, not asserted: 3.5% quality vs 91× compute.</a:t>
-            </a:r>
-          </a:p>
-        </p:txBody>
-      </p:sp>
-      <p:sp>
-        <p:nvSpPr>
-          <p:cNvPr id="8" name="TextBox 7"/>
+              <a:t>HGS — 20.0 s (the entire budget)</a:t>
+            </a:r>
+          </a:p>
+        </p:txBody>
+      </p:sp>
+      <p:sp>
+        <p:nvSpPr>
+          <p:cNvPr id="10" name="TextBox 9"/>
           <p:cNvSpPr txBox="1"/>
           <p:nvPr/>
         </p:nvSpPr>
         <p:spPr>
           <a:xfrm>
-            <a:off x="320040" y="4873752"/>
-            <a:ext cx="6217920" cy="219456"/>
+            <a:off x="502920" y="3017520"/>
+            <a:ext cx="4389120" cy="274320"/>
           </a:xfrm>
           <a:prstGeom prst="rect">
             <a:avLst/>
@@ -13699,6 +13827,304 @@
               </a:spcAft>
             </a:pPr>
             <a:r>
+              <a:rPr sz="1100" b="1" i="0">
+                <a:solidFill>
+                  <a:srgbClr val="E37222"/>
+                </a:solidFill>
+                <a:latin typeface="Arial"/>
+              </a:rPr>
+              <a:t>≈ 91× more compute per answer</a:t>
+            </a:r>
+          </a:p>
+        </p:txBody>
+      </p:sp>
+      <p:sp>
+        <p:nvSpPr>
+          <p:cNvPr id="11" name="TextBox 10"/>
+          <p:cNvSpPr txBox="1"/>
+          <p:nvPr/>
+        </p:nvSpPr>
+        <p:spPr>
+          <a:xfrm>
+            <a:off x="502920" y="3474720"/>
+            <a:ext cx="4206240" cy="1280160"/>
+          </a:xfrm>
+          <a:prstGeom prst="rect">
+            <a:avLst/>
+          </a:prstGeom>
+          <a:noFill/>
+        </p:spPr>
+        <p:txBody>
+          <a:bodyPr wrap="square" lIns="0" rIns="0" tIns="0" bIns="0">
+            <a:spAutoFit/>
+          </a:bodyPr>
+          <a:lstStyle/>
+          <a:p>
+            <a:pPr algn="l">
+              <a:spcAft>
+                <a:spcPts val="300"/>
+              </a:spcAft>
+            </a:pPr>
+            <a:r>
+              <a:rPr sz="1150" b="1" i="0">
+                <a:solidFill>
+                  <a:srgbClr val="003359"/>
+                </a:solidFill>
+                <a:latin typeface="Arial"/>
+              </a:rPr>
+              <a:t>Why HGS stays out of the portfolio</a:t>
+            </a:r>
+          </a:p>
+          <a:p>
+            <a:pPr algn="l">
+              <a:spcAft>
+                <a:spcPts val="0"/>
+              </a:spcAft>
+            </a:pPr>
+            <a:r>
+              <a:rPr sz="950" b="0" i="0">
+                <a:solidFill>
+                  <a:srgbClr val="000000"/>
+                </a:solidFill>
+                <a:latin typeface="Arial"/>
+              </a:rPr>
+              <a:t>It wins or ties the portfolio oracle on 100% of sampled instances — as a label class it would swallow the dataset. As a reference, it prices the trade-off.</a:t>
+            </a:r>
+          </a:p>
+        </p:txBody>
+      </p:sp>
+      <p:sp>
+        <p:nvSpPr>
+          <p:cNvPr id="12" name="TextBox 11"/>
+          <p:cNvSpPr txBox="1"/>
+          <p:nvPr/>
+        </p:nvSpPr>
+        <p:spPr>
+          <a:xfrm>
+            <a:off x="5212080" y="1783080"/>
+            <a:ext cx="3566160" cy="914400"/>
+          </a:xfrm>
+          <a:prstGeom prst="rect">
+            <a:avLst/>
+          </a:prstGeom>
+          <a:noFill/>
+        </p:spPr>
+        <p:txBody>
+          <a:bodyPr wrap="square" lIns="0" rIns="0" tIns="0" bIns="0">
+            <a:spAutoFit/>
+          </a:bodyPr>
+          <a:lstStyle/>
+          <a:p>
+            <a:pPr algn="l">
+              <a:spcAft>
+                <a:spcPts val="100"/>
+              </a:spcAft>
+            </a:pPr>
+            <a:r>
+              <a:rPr sz="2600" b="1" i="0">
+                <a:solidFill>
+                  <a:srgbClr val="003359"/>
+                </a:solidFill>
+                <a:latin typeface="Arial"/>
+              </a:rPr>
+              <a:t>+3.5%</a:t>
+            </a:r>
+          </a:p>
+          <a:p>
+            <a:pPr algn="l">
+              <a:spcAft>
+                <a:spcPts val="400"/>
+              </a:spcAft>
+            </a:pPr>
+            <a:r>
+              <a:rPr sz="950" b="0" i="0">
+                <a:solidFill>
+                  <a:srgbClr val="595959"/>
+                </a:solidFill>
+                <a:latin typeface="Arial"/>
+              </a:rPr>
+              <a:t>mean quality gain of HGS over the ML-selected heuristic (+2.1% over the oracle)</a:t>
+            </a:r>
+          </a:p>
+        </p:txBody>
+      </p:sp>
+      <p:sp>
+        <p:nvSpPr>
+          <p:cNvPr id="13" name="TextBox 12"/>
+          <p:cNvSpPr txBox="1"/>
+          <p:nvPr/>
+        </p:nvSpPr>
+        <p:spPr>
+          <a:xfrm>
+            <a:off x="5212080" y="2743200"/>
+            <a:ext cx="3566160" cy="914400"/>
+          </a:xfrm>
+          <a:prstGeom prst="rect">
+            <a:avLst/>
+          </a:prstGeom>
+          <a:noFill/>
+        </p:spPr>
+        <p:txBody>
+          <a:bodyPr wrap="square" lIns="0" rIns="0" tIns="0" bIns="0">
+            <a:spAutoFit/>
+          </a:bodyPr>
+          <a:lstStyle/>
+          <a:p>
+            <a:pPr algn="l">
+              <a:spcAft>
+                <a:spcPts val="100"/>
+              </a:spcAft>
+            </a:pPr>
+            <a:r>
+              <a:rPr sz="1700" b="1" i="0">
+                <a:solidFill>
+                  <a:srgbClr val="003359"/>
+                </a:solidFill>
+                <a:latin typeface="Arial"/>
+              </a:rPr>
+              <a:t>2.5% → 4.3%</a:t>
+            </a:r>
+          </a:p>
+          <a:p>
+            <a:pPr algn="l">
+              <a:spcAft>
+                <a:spcPts val="400"/>
+              </a:spcAft>
+            </a:pPr>
+            <a:r>
+              <a:rPr sz="950" b="0" i="0">
+                <a:solidFill>
+                  <a:srgbClr val="595959"/>
+                </a:solidFill>
+                <a:latin typeface="Arial"/>
+              </a:rPr>
+              <a:t>the gain grows with instance size (n = 20 → 100)</a:t>
+            </a:r>
+          </a:p>
+        </p:txBody>
+      </p:sp>
+      <p:sp>
+        <p:nvSpPr>
+          <p:cNvPr id="14" name="TextBox 13"/>
+          <p:cNvSpPr txBox="1"/>
+          <p:nvPr/>
+        </p:nvSpPr>
+        <p:spPr>
+          <a:xfrm>
+            <a:off x="5212080" y="3520440"/>
+            <a:ext cx="3566160" cy="914400"/>
+          </a:xfrm>
+          <a:prstGeom prst="rect">
+            <a:avLst/>
+          </a:prstGeom>
+          <a:noFill/>
+        </p:spPr>
+        <p:txBody>
+          <a:bodyPr wrap="square" lIns="0" rIns="0" tIns="0" bIns="0">
+            <a:spAutoFit/>
+          </a:bodyPr>
+          <a:lstStyle/>
+          <a:p>
+            <a:pPr algn="l">
+              <a:spcAft>
+                <a:spcPts val="100"/>
+              </a:spcAft>
+            </a:pPr>
+            <a:r>
+              <a:rPr sz="1700" b="1" i="0">
+                <a:solidFill>
+                  <a:srgbClr val="003359"/>
+                </a:solidFill>
+                <a:latin typeface="Arial"/>
+              </a:rPr>
+              <a:t>521 = optimum</a:t>
+            </a:r>
+          </a:p>
+          <a:p>
+            <a:pPr algn="l">
+              <a:spcAft>
+                <a:spcPts val="400"/>
+              </a:spcAft>
+            </a:pPr>
+            <a:r>
+              <a:rPr sz="950" b="0" i="0">
+                <a:solidFill>
+                  <a:srgbClr val="595959"/>
+                </a:solidFill>
+                <a:latin typeface="Arial"/>
+              </a:rPr>
+              <a:t>HGS recovers the proven optimum on E-n51-k5 within the budget</a:t>
+            </a:r>
+          </a:p>
+        </p:txBody>
+      </p:sp>
+      <p:sp>
+        <p:nvSpPr>
+          <p:cNvPr id="15" name="TextBox 14"/>
+          <p:cNvSpPr txBox="1"/>
+          <p:nvPr/>
+        </p:nvSpPr>
+        <p:spPr>
+          <a:xfrm>
+            <a:off x="320040" y="4526280"/>
+            <a:ext cx="8503920" cy="320040"/>
+          </a:xfrm>
+          <a:prstGeom prst="rect">
+            <a:avLst/>
+          </a:prstGeom>
+          <a:noFill/>
+        </p:spPr>
+        <p:txBody>
+          <a:bodyPr wrap="square" lIns="0" rIns="0" tIns="0" bIns="0">
+            <a:spAutoFit/>
+          </a:bodyPr>
+          <a:lstStyle/>
+          <a:p>
+            <a:pPr algn="l">
+              <a:spcAft>
+                <a:spcPts val="0"/>
+              </a:spcAft>
+            </a:pPr>
+            <a:r>
+              <a:rPr sz="1050" b="1" i="0">
+                <a:solidFill>
+                  <a:srgbClr val="003359"/>
+                </a:solidFill>
+                <a:latin typeface="Arial"/>
+              </a:rPr>
+              <a:t>Real-time answers &amp; warm starts → ML-selected heuristic;  quality at 20 s per instance → run HGS.</a:t>
+            </a:r>
+          </a:p>
+        </p:txBody>
+      </p:sp>
+      <p:sp>
+        <p:nvSpPr>
+          <p:cNvPr id="16" name="TextBox 15"/>
+          <p:cNvSpPr txBox="1"/>
+          <p:nvPr/>
+        </p:nvSpPr>
+        <p:spPr>
+          <a:xfrm>
+            <a:off x="320040" y="4873752"/>
+            <a:ext cx="6217920" cy="219456"/>
+          </a:xfrm>
+          <a:prstGeom prst="rect">
+            <a:avLst/>
+          </a:prstGeom>
+          <a:noFill/>
+        </p:spPr>
+        <p:txBody>
+          <a:bodyPr wrap="square" lIns="0" rIns="0" tIns="0" bIns="0">
+            <a:spAutoFit/>
+          </a:bodyPr>
+          <a:lstStyle/>
+          <a:p>
+            <a:pPr algn="l">
+              <a:spcAft>
+                <a:spcPts val="0"/>
+              </a:spcAft>
+            </a:pPr>
+            <a:r>
               <a:rPr sz="800" b="0" i="0">
                 <a:solidFill>
                   <a:srgbClr val="595959"/>
@@ -13712,7 +14138,7 @@
       </p:sp>
       <p:sp>
         <p:nvSpPr>
-          <p:cNvPr id="9" name="TextBox 8"/>
+          <p:cNvPr id="17" name="TextBox 16"/>
           <p:cNvSpPr txBox="1"/>
           <p:nvPr/>
         </p:nvSpPr>
@@ -13769,7 +14195,24 @@
       <p:grpSpPr/>
       <p:sp>
         <p:nvSpPr>
-          <p:cNvPr id="2" name="Title 1"/>
+          <p:cNvPr id="2" name="Content Placeholder 1"/>
+          <p:cNvSpPr>
+            <a:spLocks noGrp="1"/>
+          </p:cNvSpPr>
+          <p:nvPr>
+            <p:ph idx="1"/>
+          </p:nvPr>
+        </p:nvSpPr>
+        <p:spPr/>
+        <p:txBody>
+          <a:bodyPr/>
+          <a:lstStyle/>
+          <a:p/>
+        </p:txBody>
+      </p:sp>
+      <p:sp>
+        <p:nvSpPr>
+          <p:cNvPr id="3" name="Title 2"/>
           <p:cNvSpPr>
             <a:spLocks noGrp="1"/>
           </p:cNvSpPr>
@@ -13786,21 +14229,21 @@
               <a:rPr>
                 <a:latin typeface="Arial"/>
               </a:rPr>
-              <a:t>Look at the instance first — then pick the solver.</a:t>
-            </a:r>
-          </a:p>
-        </p:txBody>
-      </p:sp>
-      <p:sp>
-        <p:nvSpPr>
-          <p:cNvPr id="3" name="Rounded Rectangle 2"/>
+              <a:t>Limitations and Takeaways</a:t>
+            </a:r>
+          </a:p>
+        </p:txBody>
+      </p:sp>
+      <p:sp>
+        <p:nvSpPr>
+          <p:cNvPr id="4" name="Rounded Rectangle 3"/>
           <p:cNvSpPr/>
           <p:nvPr/>
         </p:nvSpPr>
         <p:spPr>
           <a:xfrm>
-            <a:off x="320040" y="2468880"/>
-            <a:ext cx="1965960" cy="1143000"/>
+            <a:off x="320040" y="1600200"/>
+            <a:ext cx="4114800" cy="3154680"/>
           </a:xfrm>
           <a:prstGeom prst="roundRect">
             <a:avLst>
@@ -13808,7 +14251,7 @@
             </a:avLst>
           </a:prstGeom>
           <a:solidFill>
-            <a:srgbClr val="0065BD"/>
+            <a:srgbClr val="F2F2F2"/>
           </a:solidFill>
           <a:ln>
             <a:noFill/>
@@ -13839,14 +14282,14 @@
       </p:sp>
       <p:sp>
         <p:nvSpPr>
-          <p:cNvPr id="4" name="TextBox 3"/>
+          <p:cNvPr id="5" name="TextBox 4"/>
           <p:cNvSpPr txBox="1"/>
           <p:nvPr/>
         </p:nvSpPr>
         <p:spPr>
           <a:xfrm>
-            <a:off x="448056" y="2615184"/>
-            <a:ext cx="1709928" cy="868680"/>
+            <a:off x="521207" y="1764792"/>
+            <a:ext cx="3712463" cy="2834640"/>
           </a:xfrm>
           <a:prstGeom prst="rect">
             <a:avLst/>
@@ -13859,49 +14302,97 @@
           </a:bodyPr>
           <a:lstStyle/>
           <a:p>
-            <a:pPr algn="ctr">
-              <a:spcAft>
-                <a:spcPts val="300"/>
-              </a:spcAft>
-            </a:pPr>
-            <a:r>
-              <a:rPr sz="1550" b="1" i="0">
-                <a:solidFill>
-                  <a:srgbClr val="FFFFFF"/>
-                </a:solidFill>
-                <a:latin typeface="Arial"/>
-              </a:rPr>
-              <a:t>m̂ = 0.741</a:t>
-            </a:r>
-          </a:p>
-          <a:p>
-            <a:pPr algn="ctr">
-              <a:spcAft>
-                <a:spcPts val="0"/>
-              </a:spcAft>
-            </a:pPr>
-            <a:r>
-              <a:rPr sz="850" b="0" i="0">
-                <a:solidFill>
-                  <a:srgbClr val="FFFFFF"/>
-                </a:solidFill>
-                <a:latin typeface="Arial"/>
-              </a:rPr>
-              <a:t>closes ~26% of the baseline→oracle gap</a:t>
-            </a:r>
-          </a:p>
-        </p:txBody>
-      </p:sp>
-      <p:sp>
-        <p:nvSpPr>
-          <p:cNvPr id="5" name="Rounded Rectangle 4"/>
+            <a:pPr algn="l">
+              <a:spcAft>
+                <a:spcPts val="500"/>
+              </a:spcAft>
+            </a:pPr>
+            <a:r>
+              <a:rPr sz="1250" b="1" i="0">
+                <a:solidFill>
+                  <a:srgbClr val="003359"/>
+                </a:solidFill>
+                <a:latin typeface="Arial"/>
+              </a:rPr>
+              <a:t>Limitations — stated plainly</a:t>
+            </a:r>
+          </a:p>
+          <a:p>
+            <a:pPr algn="l">
+              <a:spcAft>
+                <a:spcPts val="500"/>
+              </a:spcAft>
+            </a:pPr>
+            <a:r>
+              <a:rPr sz="950" b="0" i="0">
+                <a:solidFill>
+                  <a:srgbClr val="000000"/>
+                </a:solidFill>
+                <a:latin typeface="Arial"/>
+              </a:rPr>
+              <a:t>•  Trained on synthetic data; transfer to real benchmarks is partial (m̂ ≈ 1 there).</a:t>
+            </a:r>
+          </a:p>
+          <a:p>
+            <a:pPr algn="l">
+              <a:spcAft>
+                <a:spcPts val="500"/>
+              </a:spcAft>
+            </a:pPr>
+            <a:r>
+              <a:rPr sz="950" b="0" i="0">
+                <a:solidFill>
+                  <a:srgbClr val="000000"/>
+                </a:solidFill>
+                <a:latin typeface="Arial"/>
+              </a:rPr>
+              <a:t>•  Labels are the portfolio's best, not true optima (portfolio best ≈ +2% vs proven optima).</a:t>
+            </a:r>
+          </a:p>
+          <a:p>
+            <a:pPr algn="l">
+              <a:spcAft>
+                <a:spcPts val="500"/>
+              </a:spcAft>
+            </a:pPr>
+            <a:r>
+              <a:rPr sz="950" b="0" i="0">
+                <a:solidFill>
+                  <a:srgbClr val="000000"/>
+                </a:solidFill>
+                <a:latin typeface="Arial"/>
+              </a:rPr>
+              <a:t>•  The 20 s budget bounds runtime but doesn't reward faster solvers among non-ties.</a:t>
+            </a:r>
+          </a:p>
+          <a:p>
+            <a:pPr algn="l">
+              <a:spcAft>
+                <a:spcPts val="500"/>
+              </a:spcAft>
+            </a:pPr>
+            <a:r>
+              <a:rPr sz="950" b="0" i="0">
+                <a:solidFill>
+                  <a:srgbClr val="000000"/>
+                </a:solidFill>
+                <a:latin typeface="Arial"/>
+              </a:rPr>
+              <a:t>•  Exact baseline uses a weak MTZ formulation; free-license size caps apply.</a:t>
+            </a:r>
+          </a:p>
+        </p:txBody>
+      </p:sp>
+      <p:sp>
+        <p:nvSpPr>
+          <p:cNvPr id="6" name="Rounded Rectangle 5"/>
           <p:cNvSpPr/>
           <p:nvPr/>
         </p:nvSpPr>
         <p:spPr>
           <a:xfrm>
-            <a:off x="2450592" y="2468880"/>
-            <a:ext cx="1965960" cy="1143000"/>
+            <a:off x="4709160" y="1600200"/>
+            <a:ext cx="4114800" cy="3154680"/>
           </a:xfrm>
           <a:prstGeom prst="roundRect">
             <a:avLst>
@@ -13940,14 +14431,14 @@
       </p:sp>
       <p:sp>
         <p:nvSpPr>
-          <p:cNvPr id="6" name="TextBox 5"/>
+          <p:cNvPr id="7" name="TextBox 6"/>
           <p:cNvSpPr txBox="1"/>
           <p:nvPr/>
         </p:nvSpPr>
         <p:spPr>
           <a:xfrm>
-            <a:off x="2578608" y="2615184"/>
-            <a:ext cx="1709928" cy="868680"/>
+            <a:off x="4910328" y="1764792"/>
+            <a:ext cx="3712463" cy="2834640"/>
           </a:xfrm>
           <a:prstGeom prst="rect">
             <a:avLst/>
@@ -13960,82 +14451,84 @@
           </a:bodyPr>
           <a:lstStyle/>
           <a:p>
-            <a:pPr algn="ctr">
-              <a:spcAft>
-                <a:spcPts val="300"/>
-              </a:spcAft>
-            </a:pPr>
-            <a:r>
-              <a:rPr sz="1550" b="1" i="0">
+            <a:pPr algn="l">
+              <a:spcAft>
+                <a:spcPts val="500"/>
+              </a:spcAft>
+            </a:pPr>
+            <a:r>
+              <a:rPr sz="1250" b="1" i="0">
                 <a:solidFill>
                   <a:srgbClr val="FFFFFF"/>
                 </a:solidFill>
                 <a:latin typeface="Arial"/>
               </a:rPr>
-              <a:t>63% vs 45%</a:t>
-            </a:r>
-          </a:p>
-          <a:p>
-            <a:pPr algn="ctr">
-              <a:spcAft>
-                <a:spcPts val="0"/>
-              </a:spcAft>
-            </a:pPr>
-            <a:r>
-              <a:rPr sz="850" b="0" i="0">
+              <a:t>What holds up</a:t>
+            </a:r>
+          </a:p>
+          <a:p>
+            <a:pPr algn="l">
+              <a:spcAft>
+                <a:spcPts val="500"/>
+              </a:spcAft>
+            </a:pPr>
+            <a:r>
+              <a:rPr sz="950" b="0" i="0">
                 <a:solidFill>
                   <a:srgbClr val="FFFFFF"/>
                 </a:solidFill>
                 <a:latin typeface="Arial"/>
               </a:rPr>
-              <a:t>within 1% of best, selector vs baseline</a:t>
-            </a:r>
-          </a:p>
-        </p:txBody>
-      </p:sp>
-      <p:sp>
-        <p:nvSpPr>
-          <p:cNvPr id="7" name="Rounded Rectangle 6"/>
-          <p:cNvSpPr/>
-          <p:nvPr/>
-        </p:nvSpPr>
-        <p:spPr>
-          <a:xfrm>
-            <a:off x="4581144" y="2468880"/>
-            <a:ext cx="1965960" cy="1143000"/>
-          </a:xfrm>
-          <a:prstGeom prst="roundRect">
-            <a:avLst>
-              <a:gd name="adj" fmla="val 7000"/>
-            </a:avLst>
-          </a:prstGeom>
-          <a:solidFill>
-            <a:srgbClr val="E37222"/>
-          </a:solidFill>
-          <a:ln>
-            <a:noFill/>
-          </a:ln>
-          <a:effectLst/>
-        </p:spPr>
-        <p:style>
-          <a:lnRef idx="1">
-            <a:schemeClr val="accent1"/>
-          </a:lnRef>
-          <a:fillRef idx="3">
-            <a:schemeClr val="accent1"/>
-          </a:fillRef>
-          <a:effectRef idx="2">
-            <a:schemeClr val="accent1"/>
-          </a:effectRef>
-          <a:fontRef idx="minor">
-            <a:schemeClr val="lt1"/>
-          </a:fontRef>
-        </p:style>
-        <p:txBody>
-          <a:bodyPr rtlCol="0" anchor="ctr"/>
-          <a:lstStyle/>
-          <a:p>
-            <a:pPr algn="ctr"/>
+              <a:t>•  Per-instance selection beats the single-best-solver baseline in-distribution (m̂ = 0.741).</a:t>
+            </a:r>
+          </a:p>
+          <a:p>
+            <a:pPr algn="l">
+              <a:spcAft>
+                <a:spcPts val="500"/>
+              </a:spcAft>
+            </a:pPr>
+            <a:r>
+              <a:rPr sz="950" b="0" i="0">
+                <a:solidFill>
+                  <a:srgbClr val="FFFFFF"/>
+                </a:solidFill>
+                <a:latin typeface="Arial"/>
+              </a:rPr>
+              <a:t>•  Cheap pre-solution features carry real signal — depot geometry above all.</a:t>
+            </a:r>
+          </a:p>
+          <a:p>
+            <a:pPr algn="l">
+              <a:spcAft>
+                <a:spcPts val="500"/>
+              </a:spcAft>
+            </a:pPr>
+            <a:r>
+              <a:rPr sz="950" b="0" i="0">
+                <a:solidFill>
+                  <a:srgbClr val="FFFFFF"/>
+                </a:solidFill>
+                <a:latin typeface="Arial"/>
+              </a:rPr>
+              <a:t>•  Every claim is backed by frozen, integrity-checked, reproducible artifacts.</a:t>
+            </a:r>
+          </a:p>
+          <a:p>
+            <a:pPr algn="l">
+              <a:spcAft>
+                <a:spcPts val="500"/>
+              </a:spcAft>
+            </a:pPr>
+            <a:r>
+              <a:rPr sz="950" b="0" i="0">
+                <a:solidFill>
+                  <a:srgbClr val="FFFFFF"/>
+                </a:solidFill>
+                <a:latin typeface="Arial"/>
+              </a:rPr>
+              <a:t>•  The speed-quality trade-off is quantified, not asserted: 3.5% quality vs 91× compute.</a:t>
+            </a:r>
           </a:p>
         </p:txBody>
       </p:sp>
@@ -14047,8 +14540,8 @@
         </p:nvSpPr>
         <p:spPr>
           <a:xfrm>
-            <a:off x="4709159" y="2615184"/>
-            <a:ext cx="1709928" cy="868680"/>
+            <a:off x="320040" y="4873752"/>
+            <a:ext cx="6217920" cy="219456"/>
           </a:xfrm>
           <a:prstGeom prst="rect">
             <a:avLst/>
@@ -14061,95 +14554,33 @@
           </a:bodyPr>
           <a:lstStyle/>
           <a:p>
-            <a:pPr algn="ctr">
-              <a:spcAft>
-                <a:spcPts val="300"/>
-              </a:spcAft>
-            </a:pPr>
-            <a:r>
-              <a:rPr sz="1550" b="1" i="0">
-                <a:solidFill>
-                  <a:srgbClr val="FFFFFF"/>
-                </a:solidFill>
-                <a:latin typeface="Arial"/>
-              </a:rPr>
-              <a:t>0.22 s vs 20 s</a:t>
-            </a:r>
-          </a:p>
-          <a:p>
-            <a:pPr algn="ctr">
+            <a:pPr algn="l">
               <a:spcAft>
                 <a:spcPts val="0"/>
               </a:spcAft>
             </a:pPr>
             <a:r>
-              <a:rPr sz="850" b="0" i="0">
-                <a:solidFill>
-                  <a:srgbClr val="FFFFFF"/>
-                </a:solidFill>
-                <a:latin typeface="Arial"/>
-              </a:rPr>
-              <a:t>ML-selected heuristic vs genetic search</a:t>
-            </a:r>
-          </a:p>
-        </p:txBody>
-      </p:sp>
-      <p:sp>
-        <p:nvSpPr>
-          <p:cNvPr id="9" name="Rounded Rectangle 8"/>
-          <p:cNvSpPr/>
-          <p:nvPr/>
-        </p:nvSpPr>
-        <p:spPr>
-          <a:xfrm>
-            <a:off x="6711696" y="2468880"/>
-            <a:ext cx="1965960" cy="1143000"/>
-          </a:xfrm>
-          <a:prstGeom prst="roundRect">
-            <a:avLst>
-              <a:gd name="adj" fmla="val 7000"/>
-            </a:avLst>
-          </a:prstGeom>
-          <a:solidFill>
-            <a:srgbClr val="0065BD"/>
-          </a:solidFill>
-          <a:ln>
-            <a:noFill/>
-          </a:ln>
-          <a:effectLst/>
-        </p:spPr>
-        <p:style>
-          <a:lnRef idx="1">
-            <a:schemeClr val="accent1"/>
-          </a:lnRef>
-          <a:fillRef idx="3">
-            <a:schemeClr val="accent1"/>
-          </a:fillRef>
-          <a:effectRef idx="2">
-            <a:schemeClr val="accent1"/>
-          </a:effectRef>
-          <a:fontRef idx="minor">
-            <a:schemeClr val="lt1"/>
-          </a:fontRef>
-        </p:style>
-        <p:txBody>
-          <a:bodyPr rtlCol="0" anchor="ctr"/>
-          <a:lstStyle/>
-          <a:p>
-            <a:pPr algn="ctr"/>
-          </a:p>
-        </p:txBody>
-      </p:sp>
-      <p:sp>
-        <p:nvSpPr>
-          <p:cNvPr id="10" name="TextBox 9"/>
+              <a:rPr sz="800" b="0" i="0">
+                <a:solidFill>
+                  <a:srgbClr val="595959"/>
+                </a:solidFill>
+                <a:latin typeface="Arial"/>
+              </a:rPr>
+              <a:t>Learning which VRP solver works best | Computational Logistics | 21. Juli 2026</a:t>
+            </a:r>
+          </a:p>
+        </p:txBody>
+      </p:sp>
+      <p:sp>
+        <p:nvSpPr>
+          <p:cNvPr id="9" name="TextBox 8"/>
           <p:cNvSpPr txBox="1"/>
           <p:nvPr/>
         </p:nvSpPr>
         <p:spPr>
           <a:xfrm>
-            <a:off x="6839712" y="2615184"/>
-            <a:ext cx="1709928" cy="868680"/>
+            <a:off x="8229600" y="4873752"/>
+            <a:ext cx="566928" cy="219456"/>
           </a:xfrm>
           <a:prstGeom prst="rect">
             <a:avLst/>
@@ -14162,113 +14593,19 @@
           </a:bodyPr>
           <a:lstStyle/>
           <a:p>
-            <a:pPr algn="ctr">
-              <a:spcAft>
-                <a:spcPts val="300"/>
-              </a:spcAft>
-            </a:pPr>
-            <a:r>
-              <a:rPr sz="1550" b="1" i="0">
-                <a:solidFill>
-                  <a:srgbClr val="FFFFFF"/>
-                </a:solidFill>
-                <a:latin typeface="Arial"/>
-              </a:rPr>
-              <a:t>85 + 1,260</a:t>
-            </a:r>
-          </a:p>
-          <a:p>
-            <a:pPr algn="ctr">
+            <a:pPr algn="r">
               <a:spcAft>
                 <a:spcPts val="0"/>
               </a:spcAft>
             </a:pPr>
             <a:r>
-              <a:rPr sz="850" b="0" i="0">
-                <a:solidFill>
-                  <a:srgbClr val="FFFFFF"/>
-                </a:solidFill>
-                <a:latin typeface="Arial"/>
-              </a:rPr>
-              <a:t>real benchmark + synthetic instances</a:t>
-            </a:r>
-          </a:p>
-        </p:txBody>
-      </p:sp>
-      <p:sp>
-        <p:nvSpPr>
-          <p:cNvPr id="11" name="TextBox 10"/>
-          <p:cNvSpPr txBox="1"/>
-          <p:nvPr/>
-        </p:nvSpPr>
-        <p:spPr>
-          <a:xfrm>
-            <a:off x="320040" y="3977639"/>
-            <a:ext cx="8503920" cy="320040"/>
-          </a:xfrm>
-          <a:prstGeom prst="rect">
-            <a:avLst/>
-          </a:prstGeom>
-          <a:noFill/>
-        </p:spPr>
-        <p:txBody>
-          <a:bodyPr wrap="square" lIns="0" rIns="0" tIns="0" bIns="0">
-            <a:spAutoFit/>
-          </a:bodyPr>
-          <a:lstStyle/>
-          <a:p>
-            <a:pPr algn="ctr">
-              <a:spcAft>
-                <a:spcPts val="0"/>
-              </a:spcAft>
-            </a:pPr>
-            <a:r>
-              <a:rPr sz="1200" b="0" i="1">
-                <a:solidFill>
-                  <a:srgbClr val="005293"/>
-                </a:solidFill>
-                <a:latin typeface="Arial"/>
-              </a:rPr>
-              <a:t>Exact where it proves, heuristic where it scales, learned where it chooses.</a:t>
-            </a:r>
-          </a:p>
-        </p:txBody>
-      </p:sp>
-      <p:sp>
-        <p:nvSpPr>
-          <p:cNvPr id="12" name="TextBox 11"/>
-          <p:cNvSpPr txBox="1"/>
-          <p:nvPr/>
-        </p:nvSpPr>
-        <p:spPr>
-          <a:xfrm>
-            <a:off x="320040" y="4389120"/>
-            <a:ext cx="8503920" cy="320040"/>
-          </a:xfrm>
-          <a:prstGeom prst="rect">
-            <a:avLst/>
-          </a:prstGeom>
-          <a:noFill/>
-        </p:spPr>
-        <p:txBody>
-          <a:bodyPr wrap="square" lIns="0" rIns="0" tIns="0" bIns="0">
-            <a:spAutoFit/>
-          </a:bodyPr>
-          <a:lstStyle/>
-          <a:p>
-            <a:pPr algn="ctr">
-              <a:spcAft>
-                <a:spcPts val="0"/>
-              </a:spcAft>
-            </a:pPr>
-            <a:r>
-              <a:rPr sz="1400" b="1" i="0">
-                <a:solidFill>
-                  <a:srgbClr val="003359"/>
-                </a:solidFill>
-                <a:latin typeface="Arial"/>
-              </a:rPr>
-              <a:t>Thank you — questions welcome.</a:t>
+              <a:rPr sz="800" b="0" i="0">
+                <a:solidFill>
+                  <a:srgbClr val="595959"/>
+                </a:solidFill>
+                <a:latin typeface="Arial"/>
+              </a:rPr>
+              <a:t>16</a:t>
             </a:r>
           </a:p>
         </p:txBody>
@@ -14310,21 +14647,67 @@
               <a:rPr>
                 <a:latin typeface="Arial"/>
               </a:rPr>
-              <a:t>Backup Slides</a:t>
-            </a:r>
-          </a:p>
-        </p:txBody>
-      </p:sp>
-      <p:sp>
-        <p:nvSpPr>
-          <p:cNvPr id="3" name="TextBox 2"/>
+              <a:t>Look at the instance first — then pick the solver.</a:t>
+            </a:r>
+          </a:p>
+        </p:txBody>
+      </p:sp>
+      <p:sp>
+        <p:nvSpPr>
+          <p:cNvPr id="3" name="Rounded Rectangle 2"/>
+          <p:cNvSpPr/>
+          <p:nvPr/>
+        </p:nvSpPr>
+        <p:spPr>
+          <a:xfrm>
+            <a:off x="320040" y="2468880"/>
+            <a:ext cx="1965960" cy="1143000"/>
+          </a:xfrm>
+          <a:prstGeom prst="roundRect">
+            <a:avLst>
+              <a:gd name="adj" fmla="val 7000"/>
+            </a:avLst>
+          </a:prstGeom>
+          <a:solidFill>
+            <a:srgbClr val="0065BD"/>
+          </a:solidFill>
+          <a:ln>
+            <a:noFill/>
+          </a:ln>
+          <a:effectLst/>
+        </p:spPr>
+        <p:style>
+          <a:lnRef idx="1">
+            <a:schemeClr val="accent1"/>
+          </a:lnRef>
+          <a:fillRef idx="3">
+            <a:schemeClr val="accent1"/>
+          </a:fillRef>
+          <a:effectRef idx="2">
+            <a:schemeClr val="accent1"/>
+          </a:effectRef>
+          <a:fontRef idx="minor">
+            <a:schemeClr val="lt1"/>
+          </a:fontRef>
+        </p:style>
+        <p:txBody>
+          <a:bodyPr rtlCol="0" anchor="ctr"/>
+          <a:lstStyle/>
+          <a:p>
+            <a:pPr algn="ctr"/>
+          </a:p>
+        </p:txBody>
+      </p:sp>
+      <p:sp>
+        <p:nvSpPr>
+          <p:cNvPr id="4" name="TextBox 3"/>
           <p:cNvSpPr txBox="1"/>
           <p:nvPr/>
         </p:nvSpPr>
         <p:spPr>
           <a:xfrm>
-            <a:off x="320040" y="2377440"/>
-            <a:ext cx="8503920" cy="365760"/>
+            <a:off x="448056" y="2615184"/>
+            <a:ext cx="1709928" cy="868680"/>
           </a:xfrm>
           <a:prstGeom prst="rect">
             <a:avLst/>
@@ -14337,19 +14720,416 @@
           </a:bodyPr>
           <a:lstStyle/>
           <a:p>
-            <a:pPr algn="l">
+            <a:pPr algn="ctr">
+              <a:spcAft>
+                <a:spcPts val="300"/>
+              </a:spcAft>
+            </a:pPr>
+            <a:r>
+              <a:rPr sz="1550" b="1" i="0">
+                <a:solidFill>
+                  <a:srgbClr val="FFFFFF"/>
+                </a:solidFill>
+                <a:latin typeface="Arial"/>
+              </a:rPr>
+              <a:t>m̂ = 0.741</a:t>
+            </a:r>
+          </a:p>
+          <a:p>
+            <a:pPr algn="ctr">
               <a:spcAft>
                 <a:spcPts val="0"/>
               </a:spcAft>
             </a:pPr>
             <a:r>
-              <a:rPr sz="1200" b="0" i="0">
-                <a:solidFill>
-                  <a:srgbClr val="595959"/>
-                </a:solidFill>
-                <a:latin typeface="Arial"/>
-              </a:rPr>
-              <a:t>Hyperparameter tuning  ·  Exact MIP formulation  ·  Protocol details</a:t>
+              <a:rPr sz="850" b="0" i="0">
+                <a:solidFill>
+                  <a:srgbClr val="FFFFFF"/>
+                </a:solidFill>
+                <a:latin typeface="Arial"/>
+              </a:rPr>
+              <a:t>closes ~26% of the baseline→oracle gap</a:t>
+            </a:r>
+          </a:p>
+        </p:txBody>
+      </p:sp>
+      <p:sp>
+        <p:nvSpPr>
+          <p:cNvPr id="5" name="Rounded Rectangle 4"/>
+          <p:cNvSpPr/>
+          <p:nvPr/>
+        </p:nvSpPr>
+        <p:spPr>
+          <a:xfrm>
+            <a:off x="2450592" y="2468880"/>
+            <a:ext cx="1965960" cy="1143000"/>
+          </a:xfrm>
+          <a:prstGeom prst="roundRect">
+            <a:avLst>
+              <a:gd name="adj" fmla="val 7000"/>
+            </a:avLst>
+          </a:prstGeom>
+          <a:solidFill>
+            <a:srgbClr val="0065BD"/>
+          </a:solidFill>
+          <a:ln>
+            <a:noFill/>
+          </a:ln>
+          <a:effectLst/>
+        </p:spPr>
+        <p:style>
+          <a:lnRef idx="1">
+            <a:schemeClr val="accent1"/>
+          </a:lnRef>
+          <a:fillRef idx="3">
+            <a:schemeClr val="accent1"/>
+          </a:fillRef>
+          <a:effectRef idx="2">
+            <a:schemeClr val="accent1"/>
+          </a:effectRef>
+          <a:fontRef idx="minor">
+            <a:schemeClr val="lt1"/>
+          </a:fontRef>
+        </p:style>
+        <p:txBody>
+          <a:bodyPr rtlCol="0" anchor="ctr"/>
+          <a:lstStyle/>
+          <a:p>
+            <a:pPr algn="ctr"/>
+          </a:p>
+        </p:txBody>
+      </p:sp>
+      <p:sp>
+        <p:nvSpPr>
+          <p:cNvPr id="6" name="TextBox 5"/>
+          <p:cNvSpPr txBox="1"/>
+          <p:nvPr/>
+        </p:nvSpPr>
+        <p:spPr>
+          <a:xfrm>
+            <a:off x="2578608" y="2615184"/>
+            <a:ext cx="1709928" cy="868680"/>
+          </a:xfrm>
+          <a:prstGeom prst="rect">
+            <a:avLst/>
+          </a:prstGeom>
+          <a:noFill/>
+        </p:spPr>
+        <p:txBody>
+          <a:bodyPr wrap="square" lIns="0" rIns="0" tIns="0" bIns="0">
+            <a:spAutoFit/>
+          </a:bodyPr>
+          <a:lstStyle/>
+          <a:p>
+            <a:pPr algn="ctr">
+              <a:spcAft>
+                <a:spcPts val="300"/>
+              </a:spcAft>
+            </a:pPr>
+            <a:r>
+              <a:rPr sz="1550" b="1" i="0">
+                <a:solidFill>
+                  <a:srgbClr val="FFFFFF"/>
+                </a:solidFill>
+                <a:latin typeface="Arial"/>
+              </a:rPr>
+              <a:t>63% vs 45%</a:t>
+            </a:r>
+          </a:p>
+          <a:p>
+            <a:pPr algn="ctr">
+              <a:spcAft>
+                <a:spcPts val="0"/>
+              </a:spcAft>
+            </a:pPr>
+            <a:r>
+              <a:rPr sz="850" b="0" i="0">
+                <a:solidFill>
+                  <a:srgbClr val="FFFFFF"/>
+                </a:solidFill>
+                <a:latin typeface="Arial"/>
+              </a:rPr>
+              <a:t>within 1% of best, selector vs baseline</a:t>
+            </a:r>
+          </a:p>
+        </p:txBody>
+      </p:sp>
+      <p:sp>
+        <p:nvSpPr>
+          <p:cNvPr id="7" name="Rounded Rectangle 6"/>
+          <p:cNvSpPr/>
+          <p:nvPr/>
+        </p:nvSpPr>
+        <p:spPr>
+          <a:xfrm>
+            <a:off x="4581144" y="2468880"/>
+            <a:ext cx="1965960" cy="1143000"/>
+          </a:xfrm>
+          <a:prstGeom prst="roundRect">
+            <a:avLst>
+              <a:gd name="adj" fmla="val 7000"/>
+            </a:avLst>
+          </a:prstGeom>
+          <a:solidFill>
+            <a:srgbClr val="E37222"/>
+          </a:solidFill>
+          <a:ln>
+            <a:noFill/>
+          </a:ln>
+          <a:effectLst/>
+        </p:spPr>
+        <p:style>
+          <a:lnRef idx="1">
+            <a:schemeClr val="accent1"/>
+          </a:lnRef>
+          <a:fillRef idx="3">
+            <a:schemeClr val="accent1"/>
+          </a:fillRef>
+          <a:effectRef idx="2">
+            <a:schemeClr val="accent1"/>
+          </a:effectRef>
+          <a:fontRef idx="minor">
+            <a:schemeClr val="lt1"/>
+          </a:fontRef>
+        </p:style>
+        <p:txBody>
+          <a:bodyPr rtlCol="0" anchor="ctr"/>
+          <a:lstStyle/>
+          <a:p>
+            <a:pPr algn="ctr"/>
+          </a:p>
+        </p:txBody>
+      </p:sp>
+      <p:sp>
+        <p:nvSpPr>
+          <p:cNvPr id="8" name="TextBox 7"/>
+          <p:cNvSpPr txBox="1"/>
+          <p:nvPr/>
+        </p:nvSpPr>
+        <p:spPr>
+          <a:xfrm>
+            <a:off x="4709159" y="2615184"/>
+            <a:ext cx="1709928" cy="868680"/>
+          </a:xfrm>
+          <a:prstGeom prst="rect">
+            <a:avLst/>
+          </a:prstGeom>
+          <a:noFill/>
+        </p:spPr>
+        <p:txBody>
+          <a:bodyPr wrap="square" lIns="0" rIns="0" tIns="0" bIns="0">
+            <a:spAutoFit/>
+          </a:bodyPr>
+          <a:lstStyle/>
+          <a:p>
+            <a:pPr algn="ctr">
+              <a:spcAft>
+                <a:spcPts val="300"/>
+              </a:spcAft>
+            </a:pPr>
+            <a:r>
+              <a:rPr sz="1550" b="1" i="0">
+                <a:solidFill>
+                  <a:srgbClr val="FFFFFF"/>
+                </a:solidFill>
+                <a:latin typeface="Arial"/>
+              </a:rPr>
+              <a:t>0.22 s vs 20 s</a:t>
+            </a:r>
+          </a:p>
+          <a:p>
+            <a:pPr algn="ctr">
+              <a:spcAft>
+                <a:spcPts val="0"/>
+              </a:spcAft>
+            </a:pPr>
+            <a:r>
+              <a:rPr sz="850" b="0" i="0">
+                <a:solidFill>
+                  <a:srgbClr val="FFFFFF"/>
+                </a:solidFill>
+                <a:latin typeface="Arial"/>
+              </a:rPr>
+              <a:t>ML-selected heuristic vs genetic search</a:t>
+            </a:r>
+          </a:p>
+        </p:txBody>
+      </p:sp>
+      <p:sp>
+        <p:nvSpPr>
+          <p:cNvPr id="9" name="Rounded Rectangle 8"/>
+          <p:cNvSpPr/>
+          <p:nvPr/>
+        </p:nvSpPr>
+        <p:spPr>
+          <a:xfrm>
+            <a:off x="6711696" y="2468880"/>
+            <a:ext cx="1965960" cy="1143000"/>
+          </a:xfrm>
+          <a:prstGeom prst="roundRect">
+            <a:avLst>
+              <a:gd name="adj" fmla="val 7000"/>
+            </a:avLst>
+          </a:prstGeom>
+          <a:solidFill>
+            <a:srgbClr val="0065BD"/>
+          </a:solidFill>
+          <a:ln>
+            <a:noFill/>
+          </a:ln>
+          <a:effectLst/>
+        </p:spPr>
+        <p:style>
+          <a:lnRef idx="1">
+            <a:schemeClr val="accent1"/>
+          </a:lnRef>
+          <a:fillRef idx="3">
+            <a:schemeClr val="accent1"/>
+          </a:fillRef>
+          <a:effectRef idx="2">
+            <a:schemeClr val="accent1"/>
+          </a:effectRef>
+          <a:fontRef idx="minor">
+            <a:schemeClr val="lt1"/>
+          </a:fontRef>
+        </p:style>
+        <p:txBody>
+          <a:bodyPr rtlCol="0" anchor="ctr"/>
+          <a:lstStyle/>
+          <a:p>
+            <a:pPr algn="ctr"/>
+          </a:p>
+        </p:txBody>
+      </p:sp>
+      <p:sp>
+        <p:nvSpPr>
+          <p:cNvPr id="10" name="TextBox 9"/>
+          <p:cNvSpPr txBox="1"/>
+          <p:nvPr/>
+        </p:nvSpPr>
+        <p:spPr>
+          <a:xfrm>
+            <a:off x="6839712" y="2615184"/>
+            <a:ext cx="1709928" cy="868680"/>
+          </a:xfrm>
+          <a:prstGeom prst="rect">
+            <a:avLst/>
+          </a:prstGeom>
+          <a:noFill/>
+        </p:spPr>
+        <p:txBody>
+          <a:bodyPr wrap="square" lIns="0" rIns="0" tIns="0" bIns="0">
+            <a:spAutoFit/>
+          </a:bodyPr>
+          <a:lstStyle/>
+          <a:p>
+            <a:pPr algn="ctr">
+              <a:spcAft>
+                <a:spcPts val="300"/>
+              </a:spcAft>
+            </a:pPr>
+            <a:r>
+              <a:rPr sz="1550" b="1" i="0">
+                <a:solidFill>
+                  <a:srgbClr val="FFFFFF"/>
+                </a:solidFill>
+                <a:latin typeface="Arial"/>
+              </a:rPr>
+              <a:t>85 + 1,260</a:t>
+            </a:r>
+          </a:p>
+          <a:p>
+            <a:pPr algn="ctr">
+              <a:spcAft>
+                <a:spcPts val="0"/>
+              </a:spcAft>
+            </a:pPr>
+            <a:r>
+              <a:rPr sz="850" b="0" i="0">
+                <a:solidFill>
+                  <a:srgbClr val="FFFFFF"/>
+                </a:solidFill>
+                <a:latin typeface="Arial"/>
+              </a:rPr>
+              <a:t>real benchmark + synthetic instances</a:t>
+            </a:r>
+          </a:p>
+        </p:txBody>
+      </p:sp>
+      <p:sp>
+        <p:nvSpPr>
+          <p:cNvPr id="11" name="TextBox 10"/>
+          <p:cNvSpPr txBox="1"/>
+          <p:nvPr/>
+        </p:nvSpPr>
+        <p:spPr>
+          <a:xfrm>
+            <a:off x="320040" y="3977639"/>
+            <a:ext cx="8503920" cy="320040"/>
+          </a:xfrm>
+          <a:prstGeom prst="rect">
+            <a:avLst/>
+          </a:prstGeom>
+          <a:noFill/>
+        </p:spPr>
+        <p:txBody>
+          <a:bodyPr wrap="square" lIns="0" rIns="0" tIns="0" bIns="0">
+            <a:spAutoFit/>
+          </a:bodyPr>
+          <a:lstStyle/>
+          <a:p>
+            <a:pPr algn="ctr">
+              <a:spcAft>
+                <a:spcPts val="0"/>
+              </a:spcAft>
+            </a:pPr>
+            <a:r>
+              <a:rPr sz="1200" b="0" i="1">
+                <a:solidFill>
+                  <a:srgbClr val="005293"/>
+                </a:solidFill>
+                <a:latin typeface="Arial"/>
+              </a:rPr>
+              <a:t>Exact where it proves, heuristic where it scales, learned where it chooses.</a:t>
+            </a:r>
+          </a:p>
+        </p:txBody>
+      </p:sp>
+      <p:sp>
+        <p:nvSpPr>
+          <p:cNvPr id="12" name="TextBox 11"/>
+          <p:cNvSpPr txBox="1"/>
+          <p:nvPr/>
+        </p:nvSpPr>
+        <p:spPr>
+          <a:xfrm>
+            <a:off x="320040" y="4389120"/>
+            <a:ext cx="8503920" cy="320040"/>
+          </a:xfrm>
+          <a:prstGeom prst="rect">
+            <a:avLst/>
+          </a:prstGeom>
+          <a:noFill/>
+        </p:spPr>
+        <p:txBody>
+          <a:bodyPr wrap="square" lIns="0" rIns="0" tIns="0" bIns="0">
+            <a:spAutoFit/>
+          </a:bodyPr>
+          <a:lstStyle/>
+          <a:p>
+            <a:pPr algn="ctr">
+              <a:spcAft>
+                <a:spcPts val="0"/>
+              </a:spcAft>
+            </a:pPr>
+            <a:r>
+              <a:rPr sz="1400" b="1" i="0">
+                <a:solidFill>
+                  <a:srgbClr val="003359"/>
+                </a:solidFill>
+                <a:latin typeface="Arial"/>
+              </a:rPr>
+              <a:t>Thank you — questions welcome.</a:t>
             </a:r>
           </a:p>
         </p:txBody>
@@ -14374,24 +15154,7 @@
       <p:grpSpPr/>
       <p:sp>
         <p:nvSpPr>
-          <p:cNvPr id="2" name="Content Placeholder 1"/>
-          <p:cNvSpPr>
-            <a:spLocks noGrp="1"/>
-          </p:cNvSpPr>
-          <p:nvPr>
-            <p:ph idx="1"/>
-          </p:nvPr>
-        </p:nvSpPr>
-        <p:spPr/>
-        <p:txBody>
-          <a:bodyPr/>
-          <a:lstStyle/>
-          <a:p/>
-        </p:txBody>
-      </p:sp>
-      <p:sp>
-        <p:nvSpPr>
-          <p:cNvPr id="3" name="Title 2"/>
+          <p:cNvPr id="2" name="Title 1"/>
           <p:cNvSpPr>
             <a:spLocks noGrp="1"/>
           </p:cNvSpPr>
@@ -14408,21 +15171,21 @@
               <a:rPr>
                 <a:latin typeface="Arial"/>
               </a:rPr>
-              <a:t>Backup — Hyperparameter Tuning Supplement</a:t>
-            </a:r>
-          </a:p>
-        </p:txBody>
-      </p:sp>
-      <p:sp>
-        <p:nvSpPr>
-          <p:cNvPr id="4" name="TextBox 3"/>
+              <a:t>Backup Slides</a:t>
+            </a:r>
+          </a:p>
+        </p:txBody>
+      </p:sp>
+      <p:sp>
+        <p:nvSpPr>
+          <p:cNvPr id="3" name="TextBox 2"/>
           <p:cNvSpPr txBox="1"/>
           <p:nvPr/>
         </p:nvSpPr>
         <p:spPr>
           <a:xfrm>
-            <a:off x="320040" y="1435608"/>
-            <a:ext cx="8503920" cy="274320"/>
+            <a:off x="320040" y="2377440"/>
+            <a:ext cx="8503920" cy="365760"/>
           </a:xfrm>
           <a:prstGeom prst="rect">
             <a:avLst/>
@@ -14437,1002 +15200,17 @@
           <a:p>
             <a:pPr algn="l">
               <a:spcAft>
-                <a:spcPts val="400"/>
-              </a:spcAft>
-            </a:pPr>
-            <a:r>
-              <a:rPr sz="1100" b="0" i="1">
+                <a:spcPts val="0"/>
+              </a:spcAft>
+            </a:pPr>
+            <a:r>
+              <a:rPr sz="1200" b="0" i="0">
                 <a:solidFill>
                   <a:srgbClr val="595959"/>
                 </a:solidFill>
                 <a:latin typeface="Arial"/>
               </a:rPr>
-              <a:t>Paper-style grid search, 5-fold stratified CV on the frozen training split only</a:t>
-            </a:r>
-          </a:p>
-        </p:txBody>
-      </p:sp>
-      <p:sp>
-        <p:nvSpPr>
-          <p:cNvPr id="5" name="TextBox 4"/>
-          <p:cNvSpPr txBox="1"/>
-          <p:nvPr/>
-        </p:nvSpPr>
-        <p:spPr>
-          <a:xfrm>
-            <a:off x="502920" y="1783080"/>
-            <a:ext cx="1828800" cy="347472"/>
-          </a:xfrm>
-          <a:prstGeom prst="rect">
-            <a:avLst/>
-          </a:prstGeom>
-          <a:noFill/>
-        </p:spPr>
-        <p:txBody>
-          <a:bodyPr wrap="square" lIns="0" rIns="0" tIns="0" bIns="0">
-            <a:spAutoFit/>
-          </a:bodyPr>
-          <a:lstStyle/>
-          <a:p>
-            <a:pPr algn="l">
-              <a:spcAft>
-                <a:spcPts val="0"/>
-              </a:spcAft>
-            </a:pPr>
-            <a:r>
-              <a:rPr sz="950" b="1" i="0">
-                <a:solidFill>
-                  <a:srgbClr val="003359"/>
-                </a:solidFill>
-                <a:latin typeface="Arial"/>
-              </a:rPr>
-              <a:t>Model</a:t>
-            </a:r>
-          </a:p>
-        </p:txBody>
-      </p:sp>
-      <p:sp>
-        <p:nvSpPr>
-          <p:cNvPr id="6" name="TextBox 5"/>
-          <p:cNvSpPr txBox="1"/>
-          <p:nvPr/>
-        </p:nvSpPr>
-        <p:spPr>
-          <a:xfrm>
-            <a:off x="2423160" y="1783080"/>
-            <a:ext cx="1645920" cy="347472"/>
-          </a:xfrm>
-          <a:prstGeom prst="rect">
-            <a:avLst/>
-          </a:prstGeom>
-          <a:noFill/>
-        </p:spPr>
-        <p:txBody>
-          <a:bodyPr wrap="square" lIns="0" rIns="0" tIns="0" bIns="0">
-            <a:spAutoFit/>
-          </a:bodyPr>
-          <a:lstStyle/>
-          <a:p>
-            <a:pPr algn="l">
-              <a:spcAft>
-                <a:spcPts val="0"/>
-              </a:spcAft>
-            </a:pPr>
-            <a:r>
-              <a:rPr sz="950" b="1" i="0">
-                <a:solidFill>
-                  <a:srgbClr val="003359"/>
-                </a:solidFill>
-                <a:latin typeface="Arial"/>
-              </a:rPr>
-              <a:t>Best CV accuracy</a:t>
-            </a:r>
-          </a:p>
-        </p:txBody>
-      </p:sp>
-      <p:sp>
-        <p:nvSpPr>
-          <p:cNvPr id="7" name="TextBox 6"/>
-          <p:cNvSpPr txBox="1"/>
-          <p:nvPr/>
-        </p:nvSpPr>
-        <p:spPr>
-          <a:xfrm>
-            <a:off x="4160520" y="1783080"/>
-            <a:ext cx="1645920" cy="347472"/>
-          </a:xfrm>
-          <a:prstGeom prst="rect">
-            <a:avLst/>
-          </a:prstGeom>
-          <a:noFill/>
-        </p:spPr>
-        <p:txBody>
-          <a:bodyPr wrap="square" lIns="0" rIns="0" tIns="0" bIns="0">
-            <a:spAutoFit/>
-          </a:bodyPr>
-          <a:lstStyle/>
-          <a:p>
-            <a:pPr algn="l">
-              <a:spcAft>
-                <a:spcPts val="0"/>
-              </a:spcAft>
-            </a:pPr>
-            <a:r>
-              <a:rPr sz="950" b="1" i="0">
-                <a:solidFill>
-                  <a:srgbClr val="003359"/>
-                </a:solidFill>
-                <a:latin typeface="Arial"/>
-              </a:rPr>
-              <a:t>Tuned test regret</a:t>
-            </a:r>
-          </a:p>
-        </p:txBody>
-      </p:sp>
-      <p:sp>
-        <p:nvSpPr>
-          <p:cNvPr id="8" name="TextBox 7"/>
-          <p:cNvSpPr txBox="1"/>
-          <p:nvPr/>
-        </p:nvSpPr>
-        <p:spPr>
-          <a:xfrm>
-            <a:off x="5897880" y="1783080"/>
-            <a:ext cx="2834640" cy="347472"/>
-          </a:xfrm>
-          <a:prstGeom prst="rect">
-            <a:avLst/>
-          </a:prstGeom>
-          <a:noFill/>
-        </p:spPr>
-        <p:txBody>
-          <a:bodyPr wrap="square" lIns="0" rIns="0" tIns="0" bIns="0">
-            <a:spAutoFit/>
-          </a:bodyPr>
-          <a:lstStyle/>
-          <a:p>
-            <a:pPr algn="l">
-              <a:spcAft>
-                <a:spcPts val="0"/>
-              </a:spcAft>
-            </a:pPr>
-            <a:r>
-              <a:rPr sz="950" b="1" i="0">
-                <a:solidFill>
-                  <a:srgbClr val="003359"/>
-                </a:solidFill>
-                <a:latin typeface="Arial"/>
-              </a:rPr>
-              <a:t>Best parameters</a:t>
-            </a:r>
-          </a:p>
-        </p:txBody>
-      </p:sp>
-      <p:sp>
-        <p:nvSpPr>
-          <p:cNvPr id="9" name="TextBox 8"/>
-          <p:cNvSpPr txBox="1"/>
-          <p:nvPr/>
-        </p:nvSpPr>
-        <p:spPr>
-          <a:xfrm>
-            <a:off x="502920" y="2185416"/>
-            <a:ext cx="1828800" cy="347472"/>
-          </a:xfrm>
-          <a:prstGeom prst="rect">
-            <a:avLst/>
-          </a:prstGeom>
-          <a:noFill/>
-        </p:spPr>
-        <p:txBody>
-          <a:bodyPr wrap="square" lIns="0" rIns="0" tIns="0" bIns="0">
-            <a:spAutoFit/>
-          </a:bodyPr>
-          <a:lstStyle/>
-          <a:p>
-            <a:pPr algn="l">
-              <a:spcAft>
-                <a:spcPts val="0"/>
-              </a:spcAft>
-            </a:pPr>
-            <a:r>
-              <a:rPr sz="1000" b="0" i="0">
-                <a:solidFill>
-                  <a:srgbClr val="000000"/>
-                </a:solidFill>
-                <a:latin typeface="Arial"/>
-              </a:rPr>
-              <a:t>Random Forest</a:t>
-            </a:r>
-          </a:p>
-        </p:txBody>
-      </p:sp>
-      <p:sp>
-        <p:nvSpPr>
-          <p:cNvPr id="10" name="TextBox 9"/>
-          <p:cNvSpPr txBox="1"/>
-          <p:nvPr/>
-        </p:nvSpPr>
-        <p:spPr>
-          <a:xfrm>
-            <a:off x="2423160" y="2185416"/>
-            <a:ext cx="1645920" cy="347472"/>
-          </a:xfrm>
-          <a:prstGeom prst="rect">
-            <a:avLst/>
-          </a:prstGeom>
-          <a:noFill/>
-        </p:spPr>
-        <p:txBody>
-          <a:bodyPr wrap="square" lIns="0" rIns="0" tIns="0" bIns="0">
-            <a:spAutoFit/>
-          </a:bodyPr>
-          <a:lstStyle/>
-          <a:p>
-            <a:pPr algn="l">
-              <a:spcAft>
-                <a:spcPts val="0"/>
-              </a:spcAft>
-            </a:pPr>
-            <a:r>
-              <a:rPr sz="1000" b="0" i="0">
-                <a:solidFill>
-                  <a:srgbClr val="000000"/>
-                </a:solidFill>
-                <a:latin typeface="Arial"/>
-              </a:rPr>
-              <a:t>0.392</a:t>
-            </a:r>
-          </a:p>
-        </p:txBody>
-      </p:sp>
-      <p:sp>
-        <p:nvSpPr>
-          <p:cNvPr id="11" name="TextBox 10"/>
-          <p:cNvSpPr txBox="1"/>
-          <p:nvPr/>
-        </p:nvSpPr>
-        <p:spPr>
-          <a:xfrm>
-            <a:off x="4160520" y="2185416"/>
-            <a:ext cx="1645920" cy="347472"/>
-          </a:xfrm>
-          <a:prstGeom prst="rect">
-            <a:avLst/>
-          </a:prstGeom>
-          <a:noFill/>
-        </p:spPr>
-        <p:txBody>
-          <a:bodyPr wrap="square" lIns="0" rIns="0" tIns="0" bIns="0">
-            <a:spAutoFit/>
-          </a:bodyPr>
-          <a:lstStyle/>
-          <a:p>
-            <a:pPr algn="l">
-              <a:spcAft>
-                <a:spcPts val="0"/>
-              </a:spcAft>
-            </a:pPr>
-            <a:r>
-              <a:rPr sz="1000" b="0" i="0">
-                <a:solidFill>
-                  <a:srgbClr val="000000"/>
-                </a:solidFill>
-                <a:latin typeface="Arial"/>
-              </a:rPr>
-              <a:t>1.33%</a:t>
-            </a:r>
-          </a:p>
-        </p:txBody>
-      </p:sp>
-      <p:sp>
-        <p:nvSpPr>
-          <p:cNvPr id="12" name="TextBox 11"/>
-          <p:cNvSpPr txBox="1"/>
-          <p:nvPr/>
-        </p:nvSpPr>
-        <p:spPr>
-          <a:xfrm>
-            <a:off x="5897880" y="2185416"/>
-            <a:ext cx="2834640" cy="347472"/>
-          </a:xfrm>
-          <a:prstGeom prst="rect">
-            <a:avLst/>
-          </a:prstGeom>
-          <a:noFill/>
-        </p:spPr>
-        <p:txBody>
-          <a:bodyPr wrap="square" lIns="0" rIns="0" tIns="0" bIns="0">
-            <a:spAutoFit/>
-          </a:bodyPr>
-          <a:lstStyle/>
-          <a:p>
-            <a:pPr algn="l">
-              <a:spcAft>
-                <a:spcPts val="0"/>
-              </a:spcAft>
-            </a:pPr>
-            <a:r>
-              <a:rPr sz="1000" b="0" i="0">
-                <a:solidFill>
-                  <a:srgbClr val="000000"/>
-                </a:solidFill>
-                <a:latin typeface="Arial"/>
-              </a:rPr>
-              <a:t>100 trees, sqrt features, leaf ≥ 5</a:t>
-            </a:r>
-          </a:p>
-        </p:txBody>
-      </p:sp>
-      <p:sp>
-        <p:nvSpPr>
-          <p:cNvPr id="13" name="Rectangle 12"/>
-          <p:cNvSpPr/>
-          <p:nvPr/>
-        </p:nvSpPr>
-        <p:spPr>
-          <a:xfrm>
-            <a:off x="320040" y="2551176"/>
-            <a:ext cx="8503920" cy="384048"/>
-          </a:xfrm>
-          <a:prstGeom prst="rect">
-            <a:avLst/>
-          </a:prstGeom>
-          <a:solidFill>
-            <a:srgbClr val="F2F2F2"/>
-          </a:solidFill>
-          <a:ln>
-            <a:noFill/>
-          </a:ln>
-          <a:effectLst/>
-        </p:spPr>
-        <p:style>
-          <a:lnRef idx="1">
-            <a:schemeClr val="accent1"/>
-          </a:lnRef>
-          <a:fillRef idx="3">
-            <a:schemeClr val="accent1"/>
-          </a:fillRef>
-          <a:effectRef idx="2">
-            <a:schemeClr val="accent1"/>
-          </a:effectRef>
-          <a:fontRef idx="minor">
-            <a:schemeClr val="lt1"/>
-          </a:fontRef>
-        </p:style>
-        <p:txBody>
-          <a:bodyPr rtlCol="0" anchor="ctr"/>
-          <a:lstStyle/>
-          <a:p>
-            <a:pPr algn="ctr"/>
-          </a:p>
-        </p:txBody>
-      </p:sp>
-      <p:sp>
-        <p:nvSpPr>
-          <p:cNvPr id="14" name="TextBox 13"/>
-          <p:cNvSpPr txBox="1"/>
-          <p:nvPr/>
-        </p:nvSpPr>
-        <p:spPr>
-          <a:xfrm>
-            <a:off x="502920" y="2587752"/>
-            <a:ext cx="1828800" cy="347472"/>
-          </a:xfrm>
-          <a:prstGeom prst="rect">
-            <a:avLst/>
-          </a:prstGeom>
-          <a:noFill/>
-        </p:spPr>
-        <p:txBody>
-          <a:bodyPr wrap="square" lIns="0" rIns="0" tIns="0" bIns="0">
-            <a:spAutoFit/>
-          </a:bodyPr>
-          <a:lstStyle/>
-          <a:p>
-            <a:pPr algn="l">
-              <a:spcAft>
-                <a:spcPts val="0"/>
-              </a:spcAft>
-            </a:pPr>
-            <a:r>
-              <a:rPr sz="1000" b="0" i="0">
-                <a:solidFill>
-                  <a:srgbClr val="000000"/>
-                </a:solidFill>
-                <a:latin typeface="Arial"/>
-              </a:rPr>
-              <a:t>KNN</a:t>
-            </a:r>
-          </a:p>
-        </p:txBody>
-      </p:sp>
-      <p:sp>
-        <p:nvSpPr>
-          <p:cNvPr id="15" name="TextBox 14"/>
-          <p:cNvSpPr txBox="1"/>
-          <p:nvPr/>
-        </p:nvSpPr>
-        <p:spPr>
-          <a:xfrm>
-            <a:off x="2423160" y="2587752"/>
-            <a:ext cx="1645920" cy="347472"/>
-          </a:xfrm>
-          <a:prstGeom prst="rect">
-            <a:avLst/>
-          </a:prstGeom>
-          <a:noFill/>
-        </p:spPr>
-        <p:txBody>
-          <a:bodyPr wrap="square" lIns="0" rIns="0" tIns="0" bIns="0">
-            <a:spAutoFit/>
-          </a:bodyPr>
-          <a:lstStyle/>
-          <a:p>
-            <a:pPr algn="l">
-              <a:spcAft>
-                <a:spcPts val="0"/>
-              </a:spcAft>
-            </a:pPr>
-            <a:r>
-              <a:rPr sz="1000" b="0" i="0">
-                <a:solidFill>
-                  <a:srgbClr val="000000"/>
-                </a:solidFill>
-                <a:latin typeface="Arial"/>
-              </a:rPr>
-              <a:t>0.404</a:t>
-            </a:r>
-          </a:p>
-        </p:txBody>
-      </p:sp>
-      <p:sp>
-        <p:nvSpPr>
-          <p:cNvPr id="16" name="TextBox 15"/>
-          <p:cNvSpPr txBox="1"/>
-          <p:nvPr/>
-        </p:nvSpPr>
-        <p:spPr>
-          <a:xfrm>
-            <a:off x="4160520" y="2587752"/>
-            <a:ext cx="1645920" cy="347472"/>
-          </a:xfrm>
-          <a:prstGeom prst="rect">
-            <a:avLst/>
-          </a:prstGeom>
-          <a:noFill/>
-        </p:spPr>
-        <p:txBody>
-          <a:bodyPr wrap="square" lIns="0" rIns="0" tIns="0" bIns="0">
-            <a:spAutoFit/>
-          </a:bodyPr>
-          <a:lstStyle/>
-          <a:p>
-            <a:pPr algn="l">
-              <a:spcAft>
-                <a:spcPts val="0"/>
-              </a:spcAft>
-            </a:pPr>
-            <a:r>
-              <a:rPr sz="1000" b="0" i="0">
-                <a:solidFill>
-                  <a:srgbClr val="000000"/>
-                </a:solidFill>
-                <a:latin typeface="Arial"/>
-              </a:rPr>
-              <a:t>1.22%</a:t>
-            </a:r>
-          </a:p>
-        </p:txBody>
-      </p:sp>
-      <p:sp>
-        <p:nvSpPr>
-          <p:cNvPr id="17" name="TextBox 16"/>
-          <p:cNvSpPr txBox="1"/>
-          <p:nvPr/>
-        </p:nvSpPr>
-        <p:spPr>
-          <a:xfrm>
-            <a:off x="5897880" y="2587752"/>
-            <a:ext cx="2834640" cy="347472"/>
-          </a:xfrm>
-          <a:prstGeom prst="rect">
-            <a:avLst/>
-          </a:prstGeom>
-          <a:noFill/>
-        </p:spPr>
-        <p:txBody>
-          <a:bodyPr wrap="square" lIns="0" rIns="0" tIns="0" bIns="0">
-            <a:spAutoFit/>
-          </a:bodyPr>
-          <a:lstStyle/>
-          <a:p>
-            <a:pPr algn="l">
-              <a:spcAft>
-                <a:spcPts val="0"/>
-              </a:spcAft>
-            </a:pPr>
-            <a:r>
-              <a:rPr sz="1000" b="0" i="0">
-                <a:solidFill>
-                  <a:srgbClr val="000000"/>
-                </a:solidFill>
-                <a:latin typeface="Arial"/>
-              </a:rPr>
-              <a:t>k = 15, distance weights</a:t>
-            </a:r>
-          </a:p>
-        </p:txBody>
-      </p:sp>
-      <p:sp>
-        <p:nvSpPr>
-          <p:cNvPr id="18" name="TextBox 17"/>
-          <p:cNvSpPr txBox="1"/>
-          <p:nvPr/>
-        </p:nvSpPr>
-        <p:spPr>
-          <a:xfrm>
-            <a:off x="502920" y="2990088"/>
-            <a:ext cx="1828800" cy="347472"/>
-          </a:xfrm>
-          <a:prstGeom prst="rect">
-            <a:avLst/>
-          </a:prstGeom>
-          <a:noFill/>
-        </p:spPr>
-        <p:txBody>
-          <a:bodyPr wrap="square" lIns="0" rIns="0" tIns="0" bIns="0">
-            <a:spAutoFit/>
-          </a:bodyPr>
-          <a:lstStyle/>
-          <a:p>
-            <a:pPr algn="l">
-              <a:spcAft>
-                <a:spcPts val="0"/>
-              </a:spcAft>
-            </a:pPr>
-            <a:r>
-              <a:rPr sz="1000" b="0" i="0">
-                <a:solidFill>
-                  <a:srgbClr val="000000"/>
-                </a:solidFill>
-                <a:latin typeface="Arial"/>
-              </a:rPr>
-              <a:t>Decision Tree</a:t>
-            </a:r>
-          </a:p>
-        </p:txBody>
-      </p:sp>
-      <p:sp>
-        <p:nvSpPr>
-          <p:cNvPr id="19" name="TextBox 18"/>
-          <p:cNvSpPr txBox="1"/>
-          <p:nvPr/>
-        </p:nvSpPr>
-        <p:spPr>
-          <a:xfrm>
-            <a:off x="2423160" y="2990088"/>
-            <a:ext cx="1645920" cy="347472"/>
-          </a:xfrm>
-          <a:prstGeom prst="rect">
-            <a:avLst/>
-          </a:prstGeom>
-          <a:noFill/>
-        </p:spPr>
-        <p:txBody>
-          <a:bodyPr wrap="square" lIns="0" rIns="0" tIns="0" bIns="0">
-            <a:spAutoFit/>
-          </a:bodyPr>
-          <a:lstStyle/>
-          <a:p>
-            <a:pPr algn="l">
-              <a:spcAft>
-                <a:spcPts val="0"/>
-              </a:spcAft>
-            </a:pPr>
-            <a:r>
-              <a:rPr sz="1000" b="0" i="0">
-                <a:solidFill>
-                  <a:srgbClr val="000000"/>
-                </a:solidFill>
-                <a:latin typeface="Arial"/>
-              </a:rPr>
-              <a:t>0.402</a:t>
-            </a:r>
-          </a:p>
-        </p:txBody>
-      </p:sp>
-      <p:sp>
-        <p:nvSpPr>
-          <p:cNvPr id="20" name="TextBox 19"/>
-          <p:cNvSpPr txBox="1"/>
-          <p:nvPr/>
-        </p:nvSpPr>
-        <p:spPr>
-          <a:xfrm>
-            <a:off x="4160520" y="2990088"/>
-            <a:ext cx="1645920" cy="347472"/>
-          </a:xfrm>
-          <a:prstGeom prst="rect">
-            <a:avLst/>
-          </a:prstGeom>
-          <a:noFill/>
-        </p:spPr>
-        <p:txBody>
-          <a:bodyPr wrap="square" lIns="0" rIns="0" tIns="0" bIns="0">
-            <a:spAutoFit/>
-          </a:bodyPr>
-          <a:lstStyle/>
-          <a:p>
-            <a:pPr algn="l">
-              <a:spcAft>
-                <a:spcPts val="0"/>
-              </a:spcAft>
-            </a:pPr>
-            <a:r>
-              <a:rPr sz="1000" b="0" i="0">
-                <a:solidFill>
-                  <a:srgbClr val="000000"/>
-                </a:solidFill>
-                <a:latin typeface="Arial"/>
-              </a:rPr>
-              <a:t>1.14%</a:t>
-            </a:r>
-          </a:p>
-        </p:txBody>
-      </p:sp>
-      <p:sp>
-        <p:nvSpPr>
-          <p:cNvPr id="21" name="TextBox 20"/>
-          <p:cNvSpPr txBox="1"/>
-          <p:nvPr/>
-        </p:nvSpPr>
-        <p:spPr>
-          <a:xfrm>
-            <a:off x="5897880" y="2990088"/>
-            <a:ext cx="2834640" cy="347472"/>
-          </a:xfrm>
-          <a:prstGeom prst="rect">
-            <a:avLst/>
-          </a:prstGeom>
-          <a:noFill/>
-        </p:spPr>
-        <p:txBody>
-          <a:bodyPr wrap="square" lIns="0" rIns="0" tIns="0" bIns="0">
-            <a:spAutoFit/>
-          </a:bodyPr>
-          <a:lstStyle/>
-          <a:p>
-            <a:pPr algn="l">
-              <a:spcAft>
-                <a:spcPts val="0"/>
-              </a:spcAft>
-            </a:pPr>
-            <a:r>
-              <a:rPr sz="1000" b="0" i="0">
-                <a:solidFill>
-                  <a:srgbClr val="000000"/>
-                </a:solidFill>
-                <a:latin typeface="Arial"/>
-              </a:rPr>
-              <a:t>depth 4</a:t>
-            </a:r>
-          </a:p>
-        </p:txBody>
-      </p:sp>
-      <p:sp>
-        <p:nvSpPr>
-          <p:cNvPr id="22" name="Rectangle 21"/>
-          <p:cNvSpPr/>
-          <p:nvPr/>
-        </p:nvSpPr>
-        <p:spPr>
-          <a:xfrm>
-            <a:off x="320040" y="3355848"/>
-            <a:ext cx="8503920" cy="384048"/>
-          </a:xfrm>
-          <a:prstGeom prst="rect">
-            <a:avLst/>
-          </a:prstGeom>
-          <a:solidFill>
-            <a:srgbClr val="F2F2F2"/>
-          </a:solidFill>
-          <a:ln>
-            <a:noFill/>
-          </a:ln>
-          <a:effectLst/>
-        </p:spPr>
-        <p:style>
-          <a:lnRef idx="1">
-            <a:schemeClr val="accent1"/>
-          </a:lnRef>
-          <a:fillRef idx="3">
-            <a:schemeClr val="accent1"/>
-          </a:fillRef>
-          <a:effectRef idx="2">
-            <a:schemeClr val="accent1"/>
-          </a:effectRef>
-          <a:fontRef idx="minor">
-            <a:schemeClr val="lt1"/>
-          </a:fontRef>
-        </p:style>
-        <p:txBody>
-          <a:bodyPr rtlCol="0" anchor="ctr"/>
-          <a:lstStyle/>
-          <a:p>
-            <a:pPr algn="ctr"/>
-          </a:p>
-        </p:txBody>
-      </p:sp>
-      <p:sp>
-        <p:nvSpPr>
-          <p:cNvPr id="23" name="TextBox 22"/>
-          <p:cNvSpPr txBox="1"/>
-          <p:nvPr/>
-        </p:nvSpPr>
-        <p:spPr>
-          <a:xfrm>
-            <a:off x="502920" y="3392424"/>
-            <a:ext cx="1828800" cy="347472"/>
-          </a:xfrm>
-          <a:prstGeom prst="rect">
-            <a:avLst/>
-          </a:prstGeom>
-          <a:noFill/>
-        </p:spPr>
-        <p:txBody>
-          <a:bodyPr wrap="square" lIns="0" rIns="0" tIns="0" bIns="0">
-            <a:spAutoFit/>
-          </a:bodyPr>
-          <a:lstStyle/>
-          <a:p>
-            <a:pPr algn="l">
-              <a:spcAft>
-                <a:spcPts val="0"/>
-              </a:spcAft>
-            </a:pPr>
-            <a:r>
-              <a:rPr sz="1000" b="0" i="0">
-                <a:solidFill>
-                  <a:srgbClr val="000000"/>
-                </a:solidFill>
-                <a:latin typeface="Arial"/>
-              </a:rPr>
-              <a:t>Gradient Boosting</a:t>
-            </a:r>
-          </a:p>
-        </p:txBody>
-      </p:sp>
-      <p:sp>
-        <p:nvSpPr>
-          <p:cNvPr id="24" name="TextBox 23"/>
-          <p:cNvSpPr txBox="1"/>
-          <p:nvPr/>
-        </p:nvSpPr>
-        <p:spPr>
-          <a:xfrm>
-            <a:off x="2423160" y="3392424"/>
-            <a:ext cx="1645920" cy="347472"/>
-          </a:xfrm>
-          <a:prstGeom prst="rect">
-            <a:avLst/>
-          </a:prstGeom>
-          <a:noFill/>
-        </p:spPr>
-        <p:txBody>
-          <a:bodyPr wrap="square" lIns="0" rIns="0" tIns="0" bIns="0">
-            <a:spAutoFit/>
-          </a:bodyPr>
-          <a:lstStyle/>
-          <a:p>
-            <a:pPr algn="l">
-              <a:spcAft>
-                <a:spcPts val="0"/>
-              </a:spcAft>
-            </a:pPr>
-            <a:r>
-              <a:rPr sz="1000" b="0" i="0">
-                <a:solidFill>
-                  <a:srgbClr val="000000"/>
-                </a:solidFill>
-                <a:latin typeface="Arial"/>
-              </a:rPr>
-              <a:t>0.394</a:t>
-            </a:r>
-          </a:p>
-        </p:txBody>
-      </p:sp>
-      <p:sp>
-        <p:nvSpPr>
-          <p:cNvPr id="25" name="TextBox 24"/>
-          <p:cNvSpPr txBox="1"/>
-          <p:nvPr/>
-        </p:nvSpPr>
-        <p:spPr>
-          <a:xfrm>
-            <a:off x="4160520" y="3392424"/>
-            <a:ext cx="1645920" cy="347472"/>
-          </a:xfrm>
-          <a:prstGeom prst="rect">
-            <a:avLst/>
-          </a:prstGeom>
-          <a:noFill/>
-        </p:spPr>
-        <p:txBody>
-          <a:bodyPr wrap="square" lIns="0" rIns="0" tIns="0" bIns="0">
-            <a:spAutoFit/>
-          </a:bodyPr>
-          <a:lstStyle/>
-          <a:p>
-            <a:pPr algn="l">
-              <a:spcAft>
-                <a:spcPts val="0"/>
-              </a:spcAft>
-            </a:pPr>
-            <a:r>
-              <a:rPr sz="1000" b="0" i="0">
-                <a:solidFill>
-                  <a:srgbClr val="000000"/>
-                </a:solidFill>
-                <a:latin typeface="Arial"/>
-              </a:rPr>
-              <a:t>1.24%</a:t>
-            </a:r>
-          </a:p>
-        </p:txBody>
-      </p:sp>
-      <p:sp>
-        <p:nvSpPr>
-          <p:cNvPr id="26" name="TextBox 25"/>
-          <p:cNvSpPr txBox="1"/>
-          <p:nvPr/>
-        </p:nvSpPr>
-        <p:spPr>
-          <a:xfrm>
-            <a:off x="5897880" y="3392424"/>
-            <a:ext cx="2834640" cy="347472"/>
-          </a:xfrm>
-          <a:prstGeom prst="rect">
-            <a:avLst/>
-          </a:prstGeom>
-          <a:noFill/>
-        </p:spPr>
-        <p:txBody>
-          <a:bodyPr wrap="square" lIns="0" rIns="0" tIns="0" bIns="0">
-            <a:spAutoFit/>
-          </a:bodyPr>
-          <a:lstStyle/>
-          <a:p>
-            <a:pPr algn="l">
-              <a:spcAft>
-                <a:spcPts val="0"/>
-              </a:spcAft>
-            </a:pPr>
-            <a:r>
-              <a:rPr sz="1000" b="0" i="0">
-                <a:solidFill>
-                  <a:srgbClr val="000000"/>
-                </a:solidFill>
-                <a:latin typeface="Arial"/>
-              </a:rPr>
-              <a:t>100 est., lr 0.05, depth 2</a:t>
-            </a:r>
-          </a:p>
-        </p:txBody>
-      </p:sp>
-      <p:sp>
-        <p:nvSpPr>
-          <p:cNvPr id="27" name="TextBox 26"/>
-          <p:cNvSpPr txBox="1"/>
-          <p:nvPr/>
-        </p:nvSpPr>
-        <p:spPr>
-          <a:xfrm>
-            <a:off x="320040" y="4069080"/>
-            <a:ext cx="8503920" cy="731520"/>
-          </a:xfrm>
-          <a:prstGeom prst="rect">
-            <a:avLst/>
-          </a:prstGeom>
-          <a:noFill/>
-        </p:spPr>
-        <p:txBody>
-          <a:bodyPr wrap="square" lIns="0" rIns="0" tIns="0" bIns="0">
-            <a:spAutoFit/>
-          </a:bodyPr>
-          <a:lstStyle/>
-          <a:p>
-            <a:pPr algn="l">
-              <a:spcAft>
-                <a:spcPts val="0"/>
-              </a:spcAft>
-            </a:pPr>
-            <a:r>
-              <a:rPr sz="1050" b="0" i="0">
-                <a:solidFill>
-                  <a:srgbClr val="000000"/>
-                </a:solidFill>
-                <a:latin typeface="Arial"/>
-              </a:rPr>
-              <a:t>All CV accuracies land in a narrow band (0.392–0.404); tuned test regrets straddle the frozen Random Forest's 1.24% within noise. The fixed hyperparameters were reasonable — the frozen headline results stand.</a:t>
-            </a:r>
-          </a:p>
-        </p:txBody>
-      </p:sp>
-      <p:sp>
-        <p:nvSpPr>
-          <p:cNvPr id="28" name="TextBox 27"/>
-          <p:cNvSpPr txBox="1"/>
-          <p:nvPr/>
-        </p:nvSpPr>
-        <p:spPr>
-          <a:xfrm>
-            <a:off x="320040" y="4873752"/>
-            <a:ext cx="6217920" cy="219456"/>
-          </a:xfrm>
-          <a:prstGeom prst="rect">
-            <a:avLst/>
-          </a:prstGeom>
-          <a:noFill/>
-        </p:spPr>
-        <p:txBody>
-          <a:bodyPr wrap="square" lIns="0" rIns="0" tIns="0" bIns="0">
-            <a:spAutoFit/>
-          </a:bodyPr>
-          <a:lstStyle/>
-          <a:p>
-            <a:pPr algn="l">
-              <a:spcAft>
-                <a:spcPts val="0"/>
-              </a:spcAft>
-            </a:pPr>
-            <a:r>
-              <a:rPr sz="800" b="0" i="0">
-                <a:solidFill>
-                  <a:srgbClr val="595959"/>
-                </a:solidFill>
-                <a:latin typeface="Arial"/>
-              </a:rPr>
-              <a:t>Learning which VRP solver works best | Computational Logistics | 21. Juli 2026</a:t>
-            </a:r>
-          </a:p>
-        </p:txBody>
-      </p:sp>
-      <p:sp>
-        <p:nvSpPr>
-          <p:cNvPr id="29" name="TextBox 28"/>
-          <p:cNvSpPr txBox="1"/>
-          <p:nvPr/>
-        </p:nvSpPr>
-        <p:spPr>
-          <a:xfrm>
-            <a:off x="8229600" y="4873752"/>
-            <a:ext cx="566928" cy="219456"/>
-          </a:xfrm>
-          <a:prstGeom prst="rect">
-            <a:avLst/>
-          </a:prstGeom>
-          <a:noFill/>
-        </p:spPr>
-        <p:txBody>
-          <a:bodyPr wrap="square" lIns="0" rIns="0" tIns="0" bIns="0">
-            <a:spAutoFit/>
-          </a:bodyPr>
-          <a:lstStyle/>
-          <a:p>
-            <a:pPr algn="r">
-              <a:spcAft>
-                <a:spcPts val="0"/>
-              </a:spcAft>
-            </a:pPr>
-            <a:r>
-              <a:rPr sz="800" b="0" i="0">
-                <a:solidFill>
-                  <a:srgbClr val="595959"/>
-                </a:solidFill>
-                <a:latin typeface="Arial"/>
-              </a:rPr>
-              <a:t>18</a:t>
+              <a:t>Hyperparameter tuning  ·  Exact MIP formulation  ·  Protocol details</a:t>
             </a:r>
           </a:p>
         </p:txBody>
@@ -15491,7 +15269,7 @@
               <a:rPr>
                 <a:latin typeface="Arial"/>
               </a:rPr>
-              <a:t>Backup — Exact MIP Formulation</a:t>
+              <a:t>Backup — Hyperparameter Tuning Supplement</a:t>
             </a:r>
           </a:p>
         </p:txBody>
@@ -15530,7 +15308,7 @@
                 </a:solidFill>
                 <a:latin typeface="Arial"/>
               </a:rPr>
-              <a:t>Two-index arc formulation with load propagation (MTZ-style), gurobipy</a:t>
+              <a:t>Paper-style grid search, 5-fold stratified CV on the frozen training split only</a:t>
             </a:r>
           </a:p>
         </p:txBody>
@@ -15543,8 +15321,8 @@
         </p:nvSpPr>
         <p:spPr>
           <a:xfrm>
-            <a:off x="320040" y="1783080"/>
-            <a:ext cx="4937760" cy="2926080"/>
+            <a:off x="502920" y="1783080"/>
+            <a:ext cx="1828800" cy="347472"/>
           </a:xfrm>
           <a:prstGeom prst="rect">
             <a:avLst/>
@@ -15559,97 +15337,17 @@
           <a:p>
             <a:pPr algn="l">
               <a:spcAft>
-                <a:spcPts val="700"/>
-              </a:spcAft>
-            </a:pPr>
-            <a:r>
-              <a:rPr sz="1150" b="1" i="0">
+                <a:spcPts val="0"/>
+              </a:spcAft>
+            </a:pPr>
+            <a:r>
+              <a:rPr sz="950" b="1" i="0">
                 <a:solidFill>
                   <a:srgbClr val="003359"/>
                 </a:solidFill>
                 <a:latin typeface="Arial"/>
               </a:rPr>
-              <a:t>min  Σ cᵢⱼ xᵢⱼ   over all arcs (i, j)</a:t>
-            </a:r>
-          </a:p>
-          <a:p>
-            <a:pPr algn="l">
-              <a:spcAft>
-                <a:spcPts val="700"/>
-              </a:spcAft>
-            </a:pPr>
-            <a:r>
-              <a:rPr sz="1050" b="0" i="0">
-                <a:solidFill>
-                  <a:srgbClr val="000000"/>
-                </a:solidFill>
-                <a:latin typeface="Arial"/>
-              </a:rPr>
-              <a:t>Σⱼ xᵢⱼ = 1  and  Σⱼ xⱼᵢ = 1   — each customer entered &amp; left once</a:t>
-            </a:r>
-          </a:p>
-          <a:p>
-            <a:pPr algn="l">
-              <a:spcAft>
-                <a:spcPts val="700"/>
-              </a:spcAft>
-            </a:pPr>
-            <a:r>
-              <a:rPr sz="1050" b="0" i="0">
-                <a:solidFill>
-                  <a:srgbClr val="000000"/>
-                </a:solidFill>
-                <a:latin typeface="Arial"/>
-              </a:rPr>
-              <a:t>depot departures = depot returns</a:t>
-            </a:r>
-          </a:p>
-          <a:p>
-            <a:pPr algn="l">
-              <a:spcAft>
-                <a:spcPts val="700"/>
-              </a:spcAft>
-            </a:pPr>
-            <a:r>
-              <a:rPr sz="1050" b="0" i="0">
-                <a:solidFill>
-                  <a:srgbClr val="000000"/>
-                </a:solidFill>
-                <a:latin typeface="Arial"/>
-              </a:rPr>
-              <a:t>uⱼ ≥ uᵢ + qⱼ − Q(1 − xᵢⱼ)   — load propagates along arcs</a:t>
-            </a:r>
-          </a:p>
-          <a:p>
-            <a:pPr algn="l">
-              <a:spcAft>
-                <a:spcPts val="700"/>
-              </a:spcAft>
-            </a:pPr>
-            <a:r>
-              <a:rPr sz="1050" b="0" i="0">
-                <a:solidFill>
-                  <a:srgbClr val="000000"/>
-                </a:solidFill>
-                <a:latin typeface="Arial"/>
-              </a:rPr>
-              <a:t>qᵢ ≤ uᵢ ≤ Q   — loads bounded by capacity</a:t>
-            </a:r>
-          </a:p>
-          <a:p>
-            <a:pPr algn="l">
-              <a:spcAft>
-                <a:spcPts val="700"/>
-              </a:spcAft>
-            </a:pPr>
-            <a:r>
-              <a:rPr sz="1050" b="0" i="0">
-                <a:solidFill>
-                  <a:srgbClr val="000000"/>
-                </a:solidFill>
-                <a:latin typeface="Arial"/>
-              </a:rPr>
-              <a:t>xᵢⱼ ∈ {0, 1}</a:t>
+              <a:t>Model</a:t>
             </a:r>
           </a:p>
         </p:txBody>
@@ -15662,8 +15360,8 @@
         </p:nvSpPr>
         <p:spPr>
           <a:xfrm>
-            <a:off x="5577840" y="1783080"/>
-            <a:ext cx="3246120" cy="2926080"/>
+            <a:off x="2423160" y="1783080"/>
+            <a:ext cx="1645920" cy="347472"/>
           </a:xfrm>
           <a:prstGeom prst="rect">
             <a:avLst/>
@@ -15678,81 +15376,17 @@
           <a:p>
             <a:pPr algn="l">
               <a:spcAft>
-                <a:spcPts val="500"/>
-              </a:spcAft>
-            </a:pPr>
-            <a:r>
-              <a:rPr sz="1250" b="1" i="0">
+                <a:spcPts val="0"/>
+              </a:spcAft>
+            </a:pPr>
+            <a:r>
+              <a:rPr sz="950" b="1" i="0">
                 <a:solidFill>
                   <a:srgbClr val="003359"/>
                 </a:solidFill>
                 <a:latin typeface="Arial"/>
               </a:rPr>
-              <a:t>Notes</a:t>
-            </a:r>
-          </a:p>
-          <a:p>
-            <a:pPr algn="l">
-              <a:spcAft>
-                <a:spcPts val="600"/>
-              </a:spcAft>
-            </a:pPr>
-            <a:r>
-              <a:rPr sz="950" b="0" i="0">
-                <a:solidFill>
-                  <a:srgbClr val="000000"/>
-                </a:solidFill>
-                <a:latin typeface="Arial"/>
-              </a:rPr>
-              <a:t>•  Load constraints eliminate subtours and enforce capacity simultaneously.</a:t>
-            </a:r>
-          </a:p>
-          <a:p>
-            <a:pPr algn="l">
-              <a:spcAft>
-                <a:spcPts val="600"/>
-              </a:spcAft>
-            </a:pPr>
-            <a:r>
-              <a:rPr sz="950" b="0" i="0">
-                <a:solidFill>
-                  <a:srgbClr val="000000"/>
-                </a:solidFill>
-                <a:latin typeface="Arial"/>
-              </a:rPr>
-              <a:t>•  Unlimited fleet — matches the heuristic convention.</a:t>
-            </a:r>
-          </a:p>
-          <a:p>
-            <a:pPr algn="l">
-              <a:spcAft>
-                <a:spcPts val="600"/>
-              </a:spcAft>
-            </a:pPr>
-            <a:r>
-              <a:rPr sz="950" b="0" i="0">
-                <a:solidFill>
-                  <a:srgbClr val="000000"/>
-                </a:solidFill>
-                <a:latin typeface="Arial"/>
-              </a:rPr>
-              <a:t>•  n = 20 → 440 binary variables; the free license caps at 2,000 (hence no exact solve at n = 51).</a:t>
-            </a:r>
-          </a:p>
-          <a:p>
-            <a:pPr algn="l">
-              <a:spcAft>
-                <a:spcPts val="600"/>
-              </a:spcAft>
-            </a:pPr>
-            <a:r>
-              <a:rPr sz="950" b="0" i="0">
-                <a:solidFill>
-                  <a:srgbClr val="000000"/>
-                </a:solidFill>
-                <a:latin typeface="Arial"/>
-              </a:rPr>
-              <a:t>•  Every Gurobi solution re-validated and re-costed independently.</a:t>
+              <a:t>Best CV accuracy</a:t>
             </a:r>
           </a:p>
         </p:txBody>
@@ -15765,8 +15399,8 @@
         </p:nvSpPr>
         <p:spPr>
           <a:xfrm>
-            <a:off x="320040" y="4873752"/>
-            <a:ext cx="6217920" cy="219456"/>
+            <a:off x="4160520" y="1783080"/>
+            <a:ext cx="1645920" cy="347472"/>
           </a:xfrm>
           <a:prstGeom prst="rect">
             <a:avLst/>
@@ -15785,6 +15419,835 @@
               </a:spcAft>
             </a:pPr>
             <a:r>
+              <a:rPr sz="950" b="1" i="0">
+                <a:solidFill>
+                  <a:srgbClr val="003359"/>
+                </a:solidFill>
+                <a:latin typeface="Arial"/>
+              </a:rPr>
+              <a:t>Tuned test regret</a:t>
+            </a:r>
+          </a:p>
+        </p:txBody>
+      </p:sp>
+      <p:sp>
+        <p:nvSpPr>
+          <p:cNvPr id="8" name="TextBox 7"/>
+          <p:cNvSpPr txBox="1"/>
+          <p:nvPr/>
+        </p:nvSpPr>
+        <p:spPr>
+          <a:xfrm>
+            <a:off x="5897880" y="1783080"/>
+            <a:ext cx="2834640" cy="347472"/>
+          </a:xfrm>
+          <a:prstGeom prst="rect">
+            <a:avLst/>
+          </a:prstGeom>
+          <a:noFill/>
+        </p:spPr>
+        <p:txBody>
+          <a:bodyPr wrap="square" lIns="0" rIns="0" tIns="0" bIns="0">
+            <a:spAutoFit/>
+          </a:bodyPr>
+          <a:lstStyle/>
+          <a:p>
+            <a:pPr algn="l">
+              <a:spcAft>
+                <a:spcPts val="0"/>
+              </a:spcAft>
+            </a:pPr>
+            <a:r>
+              <a:rPr sz="950" b="1" i="0">
+                <a:solidFill>
+                  <a:srgbClr val="003359"/>
+                </a:solidFill>
+                <a:latin typeface="Arial"/>
+              </a:rPr>
+              <a:t>Best parameters</a:t>
+            </a:r>
+          </a:p>
+        </p:txBody>
+      </p:sp>
+      <p:sp>
+        <p:nvSpPr>
+          <p:cNvPr id="9" name="TextBox 8"/>
+          <p:cNvSpPr txBox="1"/>
+          <p:nvPr/>
+        </p:nvSpPr>
+        <p:spPr>
+          <a:xfrm>
+            <a:off x="502920" y="2185416"/>
+            <a:ext cx="1828800" cy="347472"/>
+          </a:xfrm>
+          <a:prstGeom prst="rect">
+            <a:avLst/>
+          </a:prstGeom>
+          <a:noFill/>
+        </p:spPr>
+        <p:txBody>
+          <a:bodyPr wrap="square" lIns="0" rIns="0" tIns="0" bIns="0">
+            <a:spAutoFit/>
+          </a:bodyPr>
+          <a:lstStyle/>
+          <a:p>
+            <a:pPr algn="l">
+              <a:spcAft>
+                <a:spcPts val="0"/>
+              </a:spcAft>
+            </a:pPr>
+            <a:r>
+              <a:rPr sz="1000" b="0" i="0">
+                <a:solidFill>
+                  <a:srgbClr val="000000"/>
+                </a:solidFill>
+                <a:latin typeface="Arial"/>
+              </a:rPr>
+              <a:t>Random Forest</a:t>
+            </a:r>
+          </a:p>
+        </p:txBody>
+      </p:sp>
+      <p:sp>
+        <p:nvSpPr>
+          <p:cNvPr id="10" name="TextBox 9"/>
+          <p:cNvSpPr txBox="1"/>
+          <p:nvPr/>
+        </p:nvSpPr>
+        <p:spPr>
+          <a:xfrm>
+            <a:off x="2423160" y="2185416"/>
+            <a:ext cx="1645920" cy="347472"/>
+          </a:xfrm>
+          <a:prstGeom prst="rect">
+            <a:avLst/>
+          </a:prstGeom>
+          <a:noFill/>
+        </p:spPr>
+        <p:txBody>
+          <a:bodyPr wrap="square" lIns="0" rIns="0" tIns="0" bIns="0">
+            <a:spAutoFit/>
+          </a:bodyPr>
+          <a:lstStyle/>
+          <a:p>
+            <a:pPr algn="l">
+              <a:spcAft>
+                <a:spcPts val="0"/>
+              </a:spcAft>
+            </a:pPr>
+            <a:r>
+              <a:rPr sz="1000" b="0" i="0">
+                <a:solidFill>
+                  <a:srgbClr val="000000"/>
+                </a:solidFill>
+                <a:latin typeface="Arial"/>
+              </a:rPr>
+              <a:t>0.392</a:t>
+            </a:r>
+          </a:p>
+        </p:txBody>
+      </p:sp>
+      <p:sp>
+        <p:nvSpPr>
+          <p:cNvPr id="11" name="TextBox 10"/>
+          <p:cNvSpPr txBox="1"/>
+          <p:nvPr/>
+        </p:nvSpPr>
+        <p:spPr>
+          <a:xfrm>
+            <a:off x="4160520" y="2185416"/>
+            <a:ext cx="1645920" cy="347472"/>
+          </a:xfrm>
+          <a:prstGeom prst="rect">
+            <a:avLst/>
+          </a:prstGeom>
+          <a:noFill/>
+        </p:spPr>
+        <p:txBody>
+          <a:bodyPr wrap="square" lIns="0" rIns="0" tIns="0" bIns="0">
+            <a:spAutoFit/>
+          </a:bodyPr>
+          <a:lstStyle/>
+          <a:p>
+            <a:pPr algn="l">
+              <a:spcAft>
+                <a:spcPts val="0"/>
+              </a:spcAft>
+            </a:pPr>
+            <a:r>
+              <a:rPr sz="1000" b="0" i="0">
+                <a:solidFill>
+                  <a:srgbClr val="000000"/>
+                </a:solidFill>
+                <a:latin typeface="Arial"/>
+              </a:rPr>
+              <a:t>1.33%</a:t>
+            </a:r>
+          </a:p>
+        </p:txBody>
+      </p:sp>
+      <p:sp>
+        <p:nvSpPr>
+          <p:cNvPr id="12" name="TextBox 11"/>
+          <p:cNvSpPr txBox="1"/>
+          <p:nvPr/>
+        </p:nvSpPr>
+        <p:spPr>
+          <a:xfrm>
+            <a:off x="5897880" y="2185416"/>
+            <a:ext cx="2834640" cy="347472"/>
+          </a:xfrm>
+          <a:prstGeom prst="rect">
+            <a:avLst/>
+          </a:prstGeom>
+          <a:noFill/>
+        </p:spPr>
+        <p:txBody>
+          <a:bodyPr wrap="square" lIns="0" rIns="0" tIns="0" bIns="0">
+            <a:spAutoFit/>
+          </a:bodyPr>
+          <a:lstStyle/>
+          <a:p>
+            <a:pPr algn="l">
+              <a:spcAft>
+                <a:spcPts val="0"/>
+              </a:spcAft>
+            </a:pPr>
+            <a:r>
+              <a:rPr sz="1000" b="0" i="0">
+                <a:solidFill>
+                  <a:srgbClr val="000000"/>
+                </a:solidFill>
+                <a:latin typeface="Arial"/>
+              </a:rPr>
+              <a:t>100 trees, sqrt features, leaf ≥ 5</a:t>
+            </a:r>
+          </a:p>
+        </p:txBody>
+      </p:sp>
+      <p:sp>
+        <p:nvSpPr>
+          <p:cNvPr id="13" name="Rectangle 12"/>
+          <p:cNvSpPr/>
+          <p:nvPr/>
+        </p:nvSpPr>
+        <p:spPr>
+          <a:xfrm>
+            <a:off x="320040" y="2551176"/>
+            <a:ext cx="8503920" cy="384048"/>
+          </a:xfrm>
+          <a:prstGeom prst="rect">
+            <a:avLst/>
+          </a:prstGeom>
+          <a:solidFill>
+            <a:srgbClr val="F2F2F2"/>
+          </a:solidFill>
+          <a:ln>
+            <a:noFill/>
+          </a:ln>
+          <a:effectLst/>
+        </p:spPr>
+        <p:style>
+          <a:lnRef idx="1">
+            <a:schemeClr val="accent1"/>
+          </a:lnRef>
+          <a:fillRef idx="3">
+            <a:schemeClr val="accent1"/>
+          </a:fillRef>
+          <a:effectRef idx="2">
+            <a:schemeClr val="accent1"/>
+          </a:effectRef>
+          <a:fontRef idx="minor">
+            <a:schemeClr val="lt1"/>
+          </a:fontRef>
+        </p:style>
+        <p:txBody>
+          <a:bodyPr rtlCol="0" anchor="ctr"/>
+          <a:lstStyle/>
+          <a:p>
+            <a:pPr algn="ctr"/>
+          </a:p>
+        </p:txBody>
+      </p:sp>
+      <p:sp>
+        <p:nvSpPr>
+          <p:cNvPr id="14" name="TextBox 13"/>
+          <p:cNvSpPr txBox="1"/>
+          <p:nvPr/>
+        </p:nvSpPr>
+        <p:spPr>
+          <a:xfrm>
+            <a:off x="502920" y="2587752"/>
+            <a:ext cx="1828800" cy="347472"/>
+          </a:xfrm>
+          <a:prstGeom prst="rect">
+            <a:avLst/>
+          </a:prstGeom>
+          <a:noFill/>
+        </p:spPr>
+        <p:txBody>
+          <a:bodyPr wrap="square" lIns="0" rIns="0" tIns="0" bIns="0">
+            <a:spAutoFit/>
+          </a:bodyPr>
+          <a:lstStyle/>
+          <a:p>
+            <a:pPr algn="l">
+              <a:spcAft>
+                <a:spcPts val="0"/>
+              </a:spcAft>
+            </a:pPr>
+            <a:r>
+              <a:rPr sz="1000" b="0" i="0">
+                <a:solidFill>
+                  <a:srgbClr val="000000"/>
+                </a:solidFill>
+                <a:latin typeface="Arial"/>
+              </a:rPr>
+              <a:t>KNN</a:t>
+            </a:r>
+          </a:p>
+        </p:txBody>
+      </p:sp>
+      <p:sp>
+        <p:nvSpPr>
+          <p:cNvPr id="15" name="TextBox 14"/>
+          <p:cNvSpPr txBox="1"/>
+          <p:nvPr/>
+        </p:nvSpPr>
+        <p:spPr>
+          <a:xfrm>
+            <a:off x="2423160" y="2587752"/>
+            <a:ext cx="1645920" cy="347472"/>
+          </a:xfrm>
+          <a:prstGeom prst="rect">
+            <a:avLst/>
+          </a:prstGeom>
+          <a:noFill/>
+        </p:spPr>
+        <p:txBody>
+          <a:bodyPr wrap="square" lIns="0" rIns="0" tIns="0" bIns="0">
+            <a:spAutoFit/>
+          </a:bodyPr>
+          <a:lstStyle/>
+          <a:p>
+            <a:pPr algn="l">
+              <a:spcAft>
+                <a:spcPts val="0"/>
+              </a:spcAft>
+            </a:pPr>
+            <a:r>
+              <a:rPr sz="1000" b="0" i="0">
+                <a:solidFill>
+                  <a:srgbClr val="000000"/>
+                </a:solidFill>
+                <a:latin typeface="Arial"/>
+              </a:rPr>
+              <a:t>0.404</a:t>
+            </a:r>
+          </a:p>
+        </p:txBody>
+      </p:sp>
+      <p:sp>
+        <p:nvSpPr>
+          <p:cNvPr id="16" name="TextBox 15"/>
+          <p:cNvSpPr txBox="1"/>
+          <p:nvPr/>
+        </p:nvSpPr>
+        <p:spPr>
+          <a:xfrm>
+            <a:off x="4160520" y="2587752"/>
+            <a:ext cx="1645920" cy="347472"/>
+          </a:xfrm>
+          <a:prstGeom prst="rect">
+            <a:avLst/>
+          </a:prstGeom>
+          <a:noFill/>
+        </p:spPr>
+        <p:txBody>
+          <a:bodyPr wrap="square" lIns="0" rIns="0" tIns="0" bIns="0">
+            <a:spAutoFit/>
+          </a:bodyPr>
+          <a:lstStyle/>
+          <a:p>
+            <a:pPr algn="l">
+              <a:spcAft>
+                <a:spcPts val="0"/>
+              </a:spcAft>
+            </a:pPr>
+            <a:r>
+              <a:rPr sz="1000" b="0" i="0">
+                <a:solidFill>
+                  <a:srgbClr val="000000"/>
+                </a:solidFill>
+                <a:latin typeface="Arial"/>
+              </a:rPr>
+              <a:t>1.22%</a:t>
+            </a:r>
+          </a:p>
+        </p:txBody>
+      </p:sp>
+      <p:sp>
+        <p:nvSpPr>
+          <p:cNvPr id="17" name="TextBox 16"/>
+          <p:cNvSpPr txBox="1"/>
+          <p:nvPr/>
+        </p:nvSpPr>
+        <p:spPr>
+          <a:xfrm>
+            <a:off x="5897880" y="2587752"/>
+            <a:ext cx="2834640" cy="347472"/>
+          </a:xfrm>
+          <a:prstGeom prst="rect">
+            <a:avLst/>
+          </a:prstGeom>
+          <a:noFill/>
+        </p:spPr>
+        <p:txBody>
+          <a:bodyPr wrap="square" lIns="0" rIns="0" tIns="0" bIns="0">
+            <a:spAutoFit/>
+          </a:bodyPr>
+          <a:lstStyle/>
+          <a:p>
+            <a:pPr algn="l">
+              <a:spcAft>
+                <a:spcPts val="0"/>
+              </a:spcAft>
+            </a:pPr>
+            <a:r>
+              <a:rPr sz="1000" b="0" i="0">
+                <a:solidFill>
+                  <a:srgbClr val="000000"/>
+                </a:solidFill>
+                <a:latin typeface="Arial"/>
+              </a:rPr>
+              <a:t>k = 15, distance weights</a:t>
+            </a:r>
+          </a:p>
+        </p:txBody>
+      </p:sp>
+      <p:sp>
+        <p:nvSpPr>
+          <p:cNvPr id="18" name="TextBox 17"/>
+          <p:cNvSpPr txBox="1"/>
+          <p:nvPr/>
+        </p:nvSpPr>
+        <p:spPr>
+          <a:xfrm>
+            <a:off x="502920" y="2990088"/>
+            <a:ext cx="1828800" cy="347472"/>
+          </a:xfrm>
+          <a:prstGeom prst="rect">
+            <a:avLst/>
+          </a:prstGeom>
+          <a:noFill/>
+        </p:spPr>
+        <p:txBody>
+          <a:bodyPr wrap="square" lIns="0" rIns="0" tIns="0" bIns="0">
+            <a:spAutoFit/>
+          </a:bodyPr>
+          <a:lstStyle/>
+          <a:p>
+            <a:pPr algn="l">
+              <a:spcAft>
+                <a:spcPts val="0"/>
+              </a:spcAft>
+            </a:pPr>
+            <a:r>
+              <a:rPr sz="1000" b="0" i="0">
+                <a:solidFill>
+                  <a:srgbClr val="000000"/>
+                </a:solidFill>
+                <a:latin typeface="Arial"/>
+              </a:rPr>
+              <a:t>Decision Tree</a:t>
+            </a:r>
+          </a:p>
+        </p:txBody>
+      </p:sp>
+      <p:sp>
+        <p:nvSpPr>
+          <p:cNvPr id="19" name="TextBox 18"/>
+          <p:cNvSpPr txBox="1"/>
+          <p:nvPr/>
+        </p:nvSpPr>
+        <p:spPr>
+          <a:xfrm>
+            <a:off x="2423160" y="2990088"/>
+            <a:ext cx="1645920" cy="347472"/>
+          </a:xfrm>
+          <a:prstGeom prst="rect">
+            <a:avLst/>
+          </a:prstGeom>
+          <a:noFill/>
+        </p:spPr>
+        <p:txBody>
+          <a:bodyPr wrap="square" lIns="0" rIns="0" tIns="0" bIns="0">
+            <a:spAutoFit/>
+          </a:bodyPr>
+          <a:lstStyle/>
+          <a:p>
+            <a:pPr algn="l">
+              <a:spcAft>
+                <a:spcPts val="0"/>
+              </a:spcAft>
+            </a:pPr>
+            <a:r>
+              <a:rPr sz="1000" b="0" i="0">
+                <a:solidFill>
+                  <a:srgbClr val="000000"/>
+                </a:solidFill>
+                <a:latin typeface="Arial"/>
+              </a:rPr>
+              <a:t>0.402</a:t>
+            </a:r>
+          </a:p>
+        </p:txBody>
+      </p:sp>
+      <p:sp>
+        <p:nvSpPr>
+          <p:cNvPr id="20" name="TextBox 19"/>
+          <p:cNvSpPr txBox="1"/>
+          <p:nvPr/>
+        </p:nvSpPr>
+        <p:spPr>
+          <a:xfrm>
+            <a:off x="4160520" y="2990088"/>
+            <a:ext cx="1645920" cy="347472"/>
+          </a:xfrm>
+          <a:prstGeom prst="rect">
+            <a:avLst/>
+          </a:prstGeom>
+          <a:noFill/>
+        </p:spPr>
+        <p:txBody>
+          <a:bodyPr wrap="square" lIns="0" rIns="0" tIns="0" bIns="0">
+            <a:spAutoFit/>
+          </a:bodyPr>
+          <a:lstStyle/>
+          <a:p>
+            <a:pPr algn="l">
+              <a:spcAft>
+                <a:spcPts val="0"/>
+              </a:spcAft>
+            </a:pPr>
+            <a:r>
+              <a:rPr sz="1000" b="0" i="0">
+                <a:solidFill>
+                  <a:srgbClr val="000000"/>
+                </a:solidFill>
+                <a:latin typeface="Arial"/>
+              </a:rPr>
+              <a:t>1.14%</a:t>
+            </a:r>
+          </a:p>
+        </p:txBody>
+      </p:sp>
+      <p:sp>
+        <p:nvSpPr>
+          <p:cNvPr id="21" name="TextBox 20"/>
+          <p:cNvSpPr txBox="1"/>
+          <p:nvPr/>
+        </p:nvSpPr>
+        <p:spPr>
+          <a:xfrm>
+            <a:off x="5897880" y="2990088"/>
+            <a:ext cx="2834640" cy="347472"/>
+          </a:xfrm>
+          <a:prstGeom prst="rect">
+            <a:avLst/>
+          </a:prstGeom>
+          <a:noFill/>
+        </p:spPr>
+        <p:txBody>
+          <a:bodyPr wrap="square" lIns="0" rIns="0" tIns="0" bIns="0">
+            <a:spAutoFit/>
+          </a:bodyPr>
+          <a:lstStyle/>
+          <a:p>
+            <a:pPr algn="l">
+              <a:spcAft>
+                <a:spcPts val="0"/>
+              </a:spcAft>
+            </a:pPr>
+            <a:r>
+              <a:rPr sz="1000" b="0" i="0">
+                <a:solidFill>
+                  <a:srgbClr val="000000"/>
+                </a:solidFill>
+                <a:latin typeface="Arial"/>
+              </a:rPr>
+              <a:t>depth 4</a:t>
+            </a:r>
+          </a:p>
+        </p:txBody>
+      </p:sp>
+      <p:sp>
+        <p:nvSpPr>
+          <p:cNvPr id="22" name="Rectangle 21"/>
+          <p:cNvSpPr/>
+          <p:nvPr/>
+        </p:nvSpPr>
+        <p:spPr>
+          <a:xfrm>
+            <a:off x="320040" y="3355848"/>
+            <a:ext cx="8503920" cy="384048"/>
+          </a:xfrm>
+          <a:prstGeom prst="rect">
+            <a:avLst/>
+          </a:prstGeom>
+          <a:solidFill>
+            <a:srgbClr val="F2F2F2"/>
+          </a:solidFill>
+          <a:ln>
+            <a:noFill/>
+          </a:ln>
+          <a:effectLst/>
+        </p:spPr>
+        <p:style>
+          <a:lnRef idx="1">
+            <a:schemeClr val="accent1"/>
+          </a:lnRef>
+          <a:fillRef idx="3">
+            <a:schemeClr val="accent1"/>
+          </a:fillRef>
+          <a:effectRef idx="2">
+            <a:schemeClr val="accent1"/>
+          </a:effectRef>
+          <a:fontRef idx="minor">
+            <a:schemeClr val="lt1"/>
+          </a:fontRef>
+        </p:style>
+        <p:txBody>
+          <a:bodyPr rtlCol="0" anchor="ctr"/>
+          <a:lstStyle/>
+          <a:p>
+            <a:pPr algn="ctr"/>
+          </a:p>
+        </p:txBody>
+      </p:sp>
+      <p:sp>
+        <p:nvSpPr>
+          <p:cNvPr id="23" name="TextBox 22"/>
+          <p:cNvSpPr txBox="1"/>
+          <p:nvPr/>
+        </p:nvSpPr>
+        <p:spPr>
+          <a:xfrm>
+            <a:off x="502920" y="3392424"/>
+            <a:ext cx="1828800" cy="347472"/>
+          </a:xfrm>
+          <a:prstGeom prst="rect">
+            <a:avLst/>
+          </a:prstGeom>
+          <a:noFill/>
+        </p:spPr>
+        <p:txBody>
+          <a:bodyPr wrap="square" lIns="0" rIns="0" tIns="0" bIns="0">
+            <a:spAutoFit/>
+          </a:bodyPr>
+          <a:lstStyle/>
+          <a:p>
+            <a:pPr algn="l">
+              <a:spcAft>
+                <a:spcPts val="0"/>
+              </a:spcAft>
+            </a:pPr>
+            <a:r>
+              <a:rPr sz="1000" b="0" i="0">
+                <a:solidFill>
+                  <a:srgbClr val="000000"/>
+                </a:solidFill>
+                <a:latin typeface="Arial"/>
+              </a:rPr>
+              <a:t>Gradient Boosting</a:t>
+            </a:r>
+          </a:p>
+        </p:txBody>
+      </p:sp>
+      <p:sp>
+        <p:nvSpPr>
+          <p:cNvPr id="24" name="TextBox 23"/>
+          <p:cNvSpPr txBox="1"/>
+          <p:nvPr/>
+        </p:nvSpPr>
+        <p:spPr>
+          <a:xfrm>
+            <a:off x="2423160" y="3392424"/>
+            <a:ext cx="1645920" cy="347472"/>
+          </a:xfrm>
+          <a:prstGeom prst="rect">
+            <a:avLst/>
+          </a:prstGeom>
+          <a:noFill/>
+        </p:spPr>
+        <p:txBody>
+          <a:bodyPr wrap="square" lIns="0" rIns="0" tIns="0" bIns="0">
+            <a:spAutoFit/>
+          </a:bodyPr>
+          <a:lstStyle/>
+          <a:p>
+            <a:pPr algn="l">
+              <a:spcAft>
+                <a:spcPts val="0"/>
+              </a:spcAft>
+            </a:pPr>
+            <a:r>
+              <a:rPr sz="1000" b="0" i="0">
+                <a:solidFill>
+                  <a:srgbClr val="000000"/>
+                </a:solidFill>
+                <a:latin typeface="Arial"/>
+              </a:rPr>
+              <a:t>0.394</a:t>
+            </a:r>
+          </a:p>
+        </p:txBody>
+      </p:sp>
+      <p:sp>
+        <p:nvSpPr>
+          <p:cNvPr id="25" name="TextBox 24"/>
+          <p:cNvSpPr txBox="1"/>
+          <p:nvPr/>
+        </p:nvSpPr>
+        <p:spPr>
+          <a:xfrm>
+            <a:off x="4160520" y="3392424"/>
+            <a:ext cx="1645920" cy="347472"/>
+          </a:xfrm>
+          <a:prstGeom prst="rect">
+            <a:avLst/>
+          </a:prstGeom>
+          <a:noFill/>
+        </p:spPr>
+        <p:txBody>
+          <a:bodyPr wrap="square" lIns="0" rIns="0" tIns="0" bIns="0">
+            <a:spAutoFit/>
+          </a:bodyPr>
+          <a:lstStyle/>
+          <a:p>
+            <a:pPr algn="l">
+              <a:spcAft>
+                <a:spcPts val="0"/>
+              </a:spcAft>
+            </a:pPr>
+            <a:r>
+              <a:rPr sz="1000" b="0" i="0">
+                <a:solidFill>
+                  <a:srgbClr val="000000"/>
+                </a:solidFill>
+                <a:latin typeface="Arial"/>
+              </a:rPr>
+              <a:t>1.24%</a:t>
+            </a:r>
+          </a:p>
+        </p:txBody>
+      </p:sp>
+      <p:sp>
+        <p:nvSpPr>
+          <p:cNvPr id="26" name="TextBox 25"/>
+          <p:cNvSpPr txBox="1"/>
+          <p:nvPr/>
+        </p:nvSpPr>
+        <p:spPr>
+          <a:xfrm>
+            <a:off x="5897880" y="3392424"/>
+            <a:ext cx="2834640" cy="347472"/>
+          </a:xfrm>
+          <a:prstGeom prst="rect">
+            <a:avLst/>
+          </a:prstGeom>
+          <a:noFill/>
+        </p:spPr>
+        <p:txBody>
+          <a:bodyPr wrap="square" lIns="0" rIns="0" tIns="0" bIns="0">
+            <a:spAutoFit/>
+          </a:bodyPr>
+          <a:lstStyle/>
+          <a:p>
+            <a:pPr algn="l">
+              <a:spcAft>
+                <a:spcPts val="0"/>
+              </a:spcAft>
+            </a:pPr>
+            <a:r>
+              <a:rPr sz="1000" b="0" i="0">
+                <a:solidFill>
+                  <a:srgbClr val="000000"/>
+                </a:solidFill>
+                <a:latin typeface="Arial"/>
+              </a:rPr>
+              <a:t>100 est., lr 0.05, depth 2</a:t>
+            </a:r>
+          </a:p>
+        </p:txBody>
+      </p:sp>
+      <p:sp>
+        <p:nvSpPr>
+          <p:cNvPr id="27" name="TextBox 26"/>
+          <p:cNvSpPr txBox="1"/>
+          <p:nvPr/>
+        </p:nvSpPr>
+        <p:spPr>
+          <a:xfrm>
+            <a:off x="320040" y="4069080"/>
+            <a:ext cx="8503920" cy="731520"/>
+          </a:xfrm>
+          <a:prstGeom prst="rect">
+            <a:avLst/>
+          </a:prstGeom>
+          <a:noFill/>
+        </p:spPr>
+        <p:txBody>
+          <a:bodyPr wrap="square" lIns="0" rIns="0" tIns="0" bIns="0">
+            <a:spAutoFit/>
+          </a:bodyPr>
+          <a:lstStyle/>
+          <a:p>
+            <a:pPr algn="l">
+              <a:spcAft>
+                <a:spcPts val="0"/>
+              </a:spcAft>
+            </a:pPr>
+            <a:r>
+              <a:rPr sz="1050" b="0" i="0">
+                <a:solidFill>
+                  <a:srgbClr val="000000"/>
+                </a:solidFill>
+                <a:latin typeface="Arial"/>
+              </a:rPr>
+              <a:t>All CV accuracies land in a narrow band (0.392–0.404); tuned test regrets straddle the frozen Random Forest's 1.24% within noise. The fixed hyperparameters were reasonable — the frozen headline results stand.</a:t>
+            </a:r>
+          </a:p>
+        </p:txBody>
+      </p:sp>
+      <p:sp>
+        <p:nvSpPr>
+          <p:cNvPr id="28" name="TextBox 27"/>
+          <p:cNvSpPr txBox="1"/>
+          <p:nvPr/>
+        </p:nvSpPr>
+        <p:spPr>
+          <a:xfrm>
+            <a:off x="320040" y="4873752"/>
+            <a:ext cx="6217920" cy="219456"/>
+          </a:xfrm>
+          <a:prstGeom prst="rect">
+            <a:avLst/>
+          </a:prstGeom>
+          <a:noFill/>
+        </p:spPr>
+        <p:txBody>
+          <a:bodyPr wrap="square" lIns="0" rIns="0" tIns="0" bIns="0">
+            <a:spAutoFit/>
+          </a:bodyPr>
+          <a:lstStyle/>
+          <a:p>
+            <a:pPr algn="l">
+              <a:spcAft>
+                <a:spcPts val="0"/>
+              </a:spcAft>
+            </a:pPr>
+            <a:r>
               <a:rPr sz="800" b="0" i="0">
                 <a:solidFill>
                   <a:srgbClr val="595959"/>
@@ -15798,7 +16261,7 @@
       </p:sp>
       <p:sp>
         <p:nvSpPr>
-          <p:cNvPr id="8" name="TextBox 7"/>
+          <p:cNvPr id="29" name="TextBox 28"/>
           <p:cNvSpPr txBox="1"/>
           <p:nvPr/>
         </p:nvSpPr>
@@ -17393,6 +17856,404 @@
               <a:rPr>
                 <a:latin typeface="Arial"/>
               </a:rPr>
+              <a:t>Backup — Exact MIP Formulation</a:t>
+            </a:r>
+          </a:p>
+        </p:txBody>
+      </p:sp>
+      <p:sp>
+        <p:nvSpPr>
+          <p:cNvPr id="4" name="TextBox 3"/>
+          <p:cNvSpPr txBox="1"/>
+          <p:nvPr/>
+        </p:nvSpPr>
+        <p:spPr>
+          <a:xfrm>
+            <a:off x="320040" y="1435608"/>
+            <a:ext cx="8503920" cy="274320"/>
+          </a:xfrm>
+          <a:prstGeom prst="rect">
+            <a:avLst/>
+          </a:prstGeom>
+          <a:noFill/>
+        </p:spPr>
+        <p:txBody>
+          <a:bodyPr wrap="square" lIns="0" rIns="0" tIns="0" bIns="0">
+            <a:spAutoFit/>
+          </a:bodyPr>
+          <a:lstStyle/>
+          <a:p>
+            <a:pPr algn="l">
+              <a:spcAft>
+                <a:spcPts val="400"/>
+              </a:spcAft>
+            </a:pPr>
+            <a:r>
+              <a:rPr sz="1100" b="0" i="1">
+                <a:solidFill>
+                  <a:srgbClr val="595959"/>
+                </a:solidFill>
+                <a:latin typeface="Arial"/>
+              </a:rPr>
+              <a:t>Two-index arc formulation with load propagation (MTZ-style), gurobipy</a:t>
+            </a:r>
+          </a:p>
+        </p:txBody>
+      </p:sp>
+      <p:sp>
+        <p:nvSpPr>
+          <p:cNvPr id="5" name="TextBox 4"/>
+          <p:cNvSpPr txBox="1"/>
+          <p:nvPr/>
+        </p:nvSpPr>
+        <p:spPr>
+          <a:xfrm>
+            <a:off x="320040" y="1783080"/>
+            <a:ext cx="4937760" cy="2926080"/>
+          </a:xfrm>
+          <a:prstGeom prst="rect">
+            <a:avLst/>
+          </a:prstGeom>
+          <a:noFill/>
+        </p:spPr>
+        <p:txBody>
+          <a:bodyPr wrap="square" lIns="0" rIns="0" tIns="0" bIns="0">
+            <a:spAutoFit/>
+          </a:bodyPr>
+          <a:lstStyle/>
+          <a:p>
+            <a:pPr algn="l">
+              <a:spcAft>
+                <a:spcPts val="700"/>
+              </a:spcAft>
+            </a:pPr>
+            <a:r>
+              <a:rPr sz="1150" b="1" i="0">
+                <a:solidFill>
+                  <a:srgbClr val="003359"/>
+                </a:solidFill>
+                <a:latin typeface="Arial"/>
+              </a:rPr>
+              <a:t>min  Σ cᵢⱼ xᵢⱼ   over all arcs (i, j)</a:t>
+            </a:r>
+          </a:p>
+          <a:p>
+            <a:pPr algn="l">
+              <a:spcAft>
+                <a:spcPts val="700"/>
+              </a:spcAft>
+            </a:pPr>
+            <a:r>
+              <a:rPr sz="1050" b="0" i="0">
+                <a:solidFill>
+                  <a:srgbClr val="000000"/>
+                </a:solidFill>
+                <a:latin typeface="Arial"/>
+              </a:rPr>
+              <a:t>Σⱼ xᵢⱼ = 1  and  Σⱼ xⱼᵢ = 1   — each customer entered &amp; left once</a:t>
+            </a:r>
+          </a:p>
+          <a:p>
+            <a:pPr algn="l">
+              <a:spcAft>
+                <a:spcPts val="700"/>
+              </a:spcAft>
+            </a:pPr>
+            <a:r>
+              <a:rPr sz="1050" b="0" i="0">
+                <a:solidFill>
+                  <a:srgbClr val="000000"/>
+                </a:solidFill>
+                <a:latin typeface="Arial"/>
+              </a:rPr>
+              <a:t>depot departures = depot returns</a:t>
+            </a:r>
+          </a:p>
+          <a:p>
+            <a:pPr algn="l">
+              <a:spcAft>
+                <a:spcPts val="700"/>
+              </a:spcAft>
+            </a:pPr>
+            <a:r>
+              <a:rPr sz="1050" b="0" i="0">
+                <a:solidFill>
+                  <a:srgbClr val="000000"/>
+                </a:solidFill>
+                <a:latin typeface="Arial"/>
+              </a:rPr>
+              <a:t>uⱼ ≥ uᵢ + qⱼ − Q(1 − xᵢⱼ)   — load propagates along arcs</a:t>
+            </a:r>
+          </a:p>
+          <a:p>
+            <a:pPr algn="l">
+              <a:spcAft>
+                <a:spcPts val="700"/>
+              </a:spcAft>
+            </a:pPr>
+            <a:r>
+              <a:rPr sz="1050" b="0" i="0">
+                <a:solidFill>
+                  <a:srgbClr val="000000"/>
+                </a:solidFill>
+                <a:latin typeface="Arial"/>
+              </a:rPr>
+              <a:t>qᵢ ≤ uᵢ ≤ Q   — loads bounded by capacity</a:t>
+            </a:r>
+          </a:p>
+          <a:p>
+            <a:pPr algn="l">
+              <a:spcAft>
+                <a:spcPts val="700"/>
+              </a:spcAft>
+            </a:pPr>
+            <a:r>
+              <a:rPr sz="1050" b="0" i="0">
+                <a:solidFill>
+                  <a:srgbClr val="000000"/>
+                </a:solidFill>
+                <a:latin typeface="Arial"/>
+              </a:rPr>
+              <a:t>xᵢⱼ ∈ {0, 1}</a:t>
+            </a:r>
+          </a:p>
+        </p:txBody>
+      </p:sp>
+      <p:sp>
+        <p:nvSpPr>
+          <p:cNvPr id="6" name="TextBox 5"/>
+          <p:cNvSpPr txBox="1"/>
+          <p:nvPr/>
+        </p:nvSpPr>
+        <p:spPr>
+          <a:xfrm>
+            <a:off x="5577840" y="1783080"/>
+            <a:ext cx="3246120" cy="2926080"/>
+          </a:xfrm>
+          <a:prstGeom prst="rect">
+            <a:avLst/>
+          </a:prstGeom>
+          <a:noFill/>
+        </p:spPr>
+        <p:txBody>
+          <a:bodyPr wrap="square" lIns="0" rIns="0" tIns="0" bIns="0">
+            <a:spAutoFit/>
+          </a:bodyPr>
+          <a:lstStyle/>
+          <a:p>
+            <a:pPr algn="l">
+              <a:spcAft>
+                <a:spcPts val="500"/>
+              </a:spcAft>
+            </a:pPr>
+            <a:r>
+              <a:rPr sz="1250" b="1" i="0">
+                <a:solidFill>
+                  <a:srgbClr val="003359"/>
+                </a:solidFill>
+                <a:latin typeface="Arial"/>
+              </a:rPr>
+              <a:t>Notes</a:t>
+            </a:r>
+          </a:p>
+          <a:p>
+            <a:pPr algn="l">
+              <a:spcAft>
+                <a:spcPts val="600"/>
+              </a:spcAft>
+            </a:pPr>
+            <a:r>
+              <a:rPr sz="950" b="0" i="0">
+                <a:solidFill>
+                  <a:srgbClr val="000000"/>
+                </a:solidFill>
+                <a:latin typeface="Arial"/>
+              </a:rPr>
+              <a:t>•  Load constraints eliminate subtours and enforce capacity simultaneously.</a:t>
+            </a:r>
+          </a:p>
+          <a:p>
+            <a:pPr algn="l">
+              <a:spcAft>
+                <a:spcPts val="600"/>
+              </a:spcAft>
+            </a:pPr>
+            <a:r>
+              <a:rPr sz="950" b="0" i="0">
+                <a:solidFill>
+                  <a:srgbClr val="000000"/>
+                </a:solidFill>
+                <a:latin typeface="Arial"/>
+              </a:rPr>
+              <a:t>•  Unlimited fleet — matches the heuristic convention.</a:t>
+            </a:r>
+          </a:p>
+          <a:p>
+            <a:pPr algn="l">
+              <a:spcAft>
+                <a:spcPts val="600"/>
+              </a:spcAft>
+            </a:pPr>
+            <a:r>
+              <a:rPr sz="950" b="0" i="0">
+                <a:solidFill>
+                  <a:srgbClr val="000000"/>
+                </a:solidFill>
+                <a:latin typeface="Arial"/>
+              </a:rPr>
+              <a:t>•  n = 20 → 440 binary variables; the free license caps at 2,000 (hence no exact solve at n = 51).</a:t>
+            </a:r>
+          </a:p>
+          <a:p>
+            <a:pPr algn="l">
+              <a:spcAft>
+                <a:spcPts val="600"/>
+              </a:spcAft>
+            </a:pPr>
+            <a:r>
+              <a:rPr sz="950" b="0" i="0">
+                <a:solidFill>
+                  <a:srgbClr val="000000"/>
+                </a:solidFill>
+                <a:latin typeface="Arial"/>
+              </a:rPr>
+              <a:t>•  Every Gurobi solution re-validated and re-costed independently.</a:t>
+            </a:r>
+          </a:p>
+        </p:txBody>
+      </p:sp>
+      <p:sp>
+        <p:nvSpPr>
+          <p:cNvPr id="7" name="TextBox 6"/>
+          <p:cNvSpPr txBox="1"/>
+          <p:nvPr/>
+        </p:nvSpPr>
+        <p:spPr>
+          <a:xfrm>
+            <a:off x="320040" y="4873752"/>
+            <a:ext cx="6217920" cy="219456"/>
+          </a:xfrm>
+          <a:prstGeom prst="rect">
+            <a:avLst/>
+          </a:prstGeom>
+          <a:noFill/>
+        </p:spPr>
+        <p:txBody>
+          <a:bodyPr wrap="square" lIns="0" rIns="0" tIns="0" bIns="0">
+            <a:spAutoFit/>
+          </a:bodyPr>
+          <a:lstStyle/>
+          <a:p>
+            <a:pPr algn="l">
+              <a:spcAft>
+                <a:spcPts val="0"/>
+              </a:spcAft>
+            </a:pPr>
+            <a:r>
+              <a:rPr sz="800" b="0" i="0">
+                <a:solidFill>
+                  <a:srgbClr val="595959"/>
+                </a:solidFill>
+                <a:latin typeface="Arial"/>
+              </a:rPr>
+              <a:t>Learning which VRP solver works best | Computational Logistics | 21. Juli 2026</a:t>
+            </a:r>
+          </a:p>
+        </p:txBody>
+      </p:sp>
+      <p:sp>
+        <p:nvSpPr>
+          <p:cNvPr id="8" name="TextBox 7"/>
+          <p:cNvSpPr txBox="1"/>
+          <p:nvPr/>
+        </p:nvSpPr>
+        <p:spPr>
+          <a:xfrm>
+            <a:off x="8229600" y="4873752"/>
+            <a:ext cx="566928" cy="219456"/>
+          </a:xfrm>
+          <a:prstGeom prst="rect">
+            <a:avLst/>
+          </a:prstGeom>
+          <a:noFill/>
+        </p:spPr>
+        <p:txBody>
+          <a:bodyPr wrap="square" lIns="0" rIns="0" tIns="0" bIns="0">
+            <a:spAutoFit/>
+          </a:bodyPr>
+          <a:lstStyle/>
+          <a:p>
+            <a:pPr algn="r">
+              <a:spcAft>
+                <a:spcPts val="0"/>
+              </a:spcAft>
+            </a:pPr>
+            <a:r>
+              <a:rPr sz="800" b="0" i="0">
+                <a:solidFill>
+                  <a:srgbClr val="595959"/>
+                </a:solidFill>
+                <a:latin typeface="Arial"/>
+              </a:rPr>
+              <a:t>20</a:t>
+            </a:r>
+          </a:p>
+        </p:txBody>
+      </p:sp>
+    </p:spTree>
+  </p:cSld>
+  <p:clrMapOvr>
+    <a:masterClrMapping/>
+  </p:clrMapOvr>
+</p:sld>
+</file>
+
+<file path=ppt/slides/slide21.xml><?xml version="1.0" encoding="utf-8"?>
+<p:sld xmlns:a="http://schemas.openxmlformats.org/drawingml/2006/main" xmlns:p="http://schemas.openxmlformats.org/presentationml/2006/main" xmlns:r="http://schemas.openxmlformats.org/officeDocument/2006/relationships">
+  <p:cSld>
+    <p:spTree>
+      <p:nvGrpSpPr>
+        <p:cNvPr id="1" name=""/>
+        <p:cNvGrpSpPr/>
+        <p:nvPr/>
+      </p:nvGrpSpPr>
+      <p:grpSpPr/>
+      <p:sp>
+        <p:nvSpPr>
+          <p:cNvPr id="2" name="Content Placeholder 1"/>
+          <p:cNvSpPr>
+            <a:spLocks noGrp="1"/>
+          </p:cNvSpPr>
+          <p:nvPr>
+            <p:ph idx="1"/>
+          </p:nvPr>
+        </p:nvSpPr>
+        <p:spPr/>
+        <p:txBody>
+          <a:bodyPr/>
+          <a:lstStyle/>
+          <a:p/>
+        </p:txBody>
+      </p:sp>
+      <p:sp>
+        <p:nvSpPr>
+          <p:cNvPr id="3" name="Title 2"/>
+          <p:cNvSpPr>
+            <a:spLocks noGrp="1"/>
+          </p:cNvSpPr>
+          <p:nvPr>
+            <p:ph type="title"/>
+          </p:nvPr>
+        </p:nvSpPr>
+        <p:spPr/>
+        <p:txBody>
+          <a:bodyPr/>
+          <a:lstStyle/>
+          <a:p>
+            <a:r>
+              <a:rPr>
+                <a:latin typeface="Arial"/>
+              </a:rPr>
               <a:t>Backup — Protocol Details</a:t>
             </a:r>
           </a:p>
@@ -17909,7 +18770,7 @@
                 </a:solidFill>
                 <a:latin typeface="Arial"/>
               </a:rPr>
-              <a:t>20</a:t>
+              <a:t>21</a:t>
             </a:r>
           </a:p>
         </p:txBody>
@@ -22269,7 +23130,7 @@
                 </a:solidFill>
                 <a:latin typeface="Arial"/>
               </a:rPr>
-              <a:t>Feature extraction takes milliseconds — negligible next to any solver run.</a:t>
+              <a:t>Engineered around three hypotheses: demand structure, depot geometry, instance size — tested on the next two slides.</a:t>
             </a:r>
           </a:p>
         </p:txBody>

--- a/reports/presentation_handoff/presentation.pptx
+++ b/reports/presentation_handoff/presentation.pptx
@@ -1808,7 +1808,7 @@
           <a:lstStyle/>
           <a:p>
             <a:r>
-              <a:t>Good morning everyone. Today we're presenting our project “Learning which VRP solver works best”. The one-sentence summary: instead of picking one heuristic for the vehicle routing problem and hoping it's good, we trained a machine-learning model that looks at an instance first and then predicts which of five classical heuristics will solve it best within a fixed time budget. The methodology follows a 2024 paper by Asín-Achá, Espinoza, Goldschmidt, Hochbaum and Huerta in Networks, scaled to a student project. We'll walk from the problem, through the pipeline, to the results — with particular attention to the features we engineered and what they reveal about solver behavior — plus an honest out-of-distribution test on real benchmarks and a speed-versus-quality extension.</a:t>
+              <a:t>Good morning everyone. Today we're going to show you our project, “Learning which VRP solver works best”. In one sentence: instead of picking one heuristic for the vehicle routing problem and hoping it works, we trained a machine-learning model that first looks at the instance, and then predicts which of five classical heuristics will solve it best within a fixed time budget. We follow a 2024 paper by Asín-Achá and colleagues, scaled down to a student project. We'll start with the problem, then go through our pipeline, and then the results. We'll spend extra time on the features we built and what they tell us about how these solvers behave. And at the end, there's an honest test on real benchmarks and a speed-versus-quality comparison.</a:t>
             </a:r>
           </a:p>
         </p:txBody>
@@ -1878,7 +1878,7 @@
           <a:lstStyle/>
           <a:p>
             <a:r>
-              <a:t>The main result. We trained four model families with dummy-classifier sanity baselines; Random Forest came out best, same as in the paper. The chart shows the share of test instances where the chosen solver lands within one percent of the best possible portfolio result. The no-ML baseline manages that on 45 percent of instances. Random Forest: 63 percent. Mean regret drops from 1.67 to 1.24 percent. On the m-hat scale, that's 0.741 — the selector closes about a quarter of the gap between the baseline and the oracle. Now, you might ask: only 40 percent classification accuracy? Yes — and that's fine. Several solvers are often nearly tied, so a misclassification is usually cheap. What matters is route quality, not label accuracy. One instructive detail: the plain Decision Tree has m-hat above one — a weak selector is actively worse than no selector. Learning has to earn its place.</a:t>
+              <a:t>Here's the main result. We trained four model families, plus dummy classifiers as sanity checks. Random Forest came out on top — same as in the paper. The chart shows how often the chosen solver lands within one percent of the best possible result. The no-ML baseline: 45 percent of instances. Random Forest: 63 percent. Mean regret drops from 1.67 to 1.24 percent. On the m-hat scale that's 0.741 — the selector closes about a quarter of the gap between baseline and oracle. Now you might say: only 40 percent accuracy over five classes? Yes — and that's fine. Often several solvers are almost tied, so picking the “wrong” one barely costs anything. What counts is route quality, not the label. One nice detail: the plain Decision Tree has m-hat above one. A weak selector is actually worse than no selector — learning has to earn its place.</a:t>
             </a:r>
           </a:p>
         </p:txBody>
@@ -1948,7 +1948,7 @@
           <a:lstStyle/>
           <a:p>
             <a:r>
-              <a:t>So which of our engineered features actually carried the prediction — and did that match our expectations? Held-out permutation importance gives a clear answer, and it splits our three hypotheses three ways. Hypothesis one, demand structure: confirmed. Capacity pressure and demand spread rank at the very top of the tree-based importance ranking. Hypothesis two, depot geometry: not just confirmed but stronger than we anticipated — depot centrality is the single strongest held-out feature, with two of the ring-occupancy shares right behind it. And hypothesis three is the surprise: raw instance size, the most obvious feature of all, is nearly irrelevant — it never enters the top ten. In hindsight that makes sense: all five heuristics scale fine to a hundred customers, so what separates them is the shape of the instance, not its size. One caveat we keep attached to this slide: importances are predictive associations, not causal explanations. But we can go one level deeper and connect the characteristics to individual solvers — that's the next slide.</a:t>
+              <a:t>Now the question our supervisor found most interesting — and honestly, so do we: which features actually carried the prediction, and did that match what we expected? Permutation importance on held-out data gives a clear answer, and our three guesses came out three different ways. Guess one, demand structure: confirmed. Capacity pressure and demand spread are at the top of the tree-based ranking. Guess two, depot geometry: confirmed, and stronger than we thought — depot centrality is the single strongest held-out feature, with two ring shares right behind it. And guess three is the surprise: raw instance size, the most obvious feature of all, barely matters. It never makes the top ten. Looking back, that makes sense: all five heuristics handle a hundred customers just fine. What separates them is the shape of the instance, not its size. One caveat we always attach here: importance is about prediction, not causation. But we can go one step deeper and link characteristics to individual solvers — next slide.</a:t>
             </a:r>
           </a:p>
         </p:txBody>
@@ -2018,7 +2018,7 @@
           <a:lstStyle/>
           <a:p>
             <a:r>
-              <a:t>Let us make that concrete and connect instance characteristics to individual solvers — for us, the most interesting result of the project. The demand regime is the strongest signal. With even, low-variance demands, route-first-cluster-second wins forty-one percent of instances: when every customer needs about the same amount, cutting one giant tour into routes is clean. Flip to lumpy, high-variance demands and Clarke-Wright with 2-opt takes over at thirty-eight percent — greedy savings merges absorb uneven demands well. Under tight capacity, Mole-Jameson insertion leads: it checks feasibility at every insertion, which pays off when vehicles run full. Geometry tells the matching story: with a central depot or radial layouts, the Wren-Holliday sweep peaks — it partitions customers by angle around the depot, so it needs angular spread to work with. Put the depot in a corner and sweep fades while insertion takes the lead. Each heuristic's win region matches its construction principle — and this is exactly the signal the Random Forest exploits. The engineered features, not the model class, are the heart of the project.</a:t>
+              <a:t>Let's make that concrete — for us this is the best result in the project. The demand type is the strongest signal. When demands are even, route-first-cluster-second wins forty-one percent of the instances. Makes sense: if everyone needs about the same, cutting one big tour into routes works cleanly. Flip to lumpy, high-variance demands, and Clarke-Wright with 2-opt takes over at thirty-eight percent — its greedy merges deal well with uneven demands. When capacity is tight, Mole-Jameson insertion leads — it checks feasibility at every step, and that pays off when the vehicles run full. Geometry tells the same kind of story. With a central depot or ring-shaped layouts, the Wren-Holliday sweep peaks — it cuts customers by angle around the depot, so it needs angular spread. Put the depot in a corner, and sweep fades while insertion takes over. So each heuristic wins exactly where its construction idea fits. That's the signal the Random Forest picks up — the features, not the fancy model, are the heart of this project.</a:t>
             </a:r>
           </a:p>
         </p:txBody>
@@ -2088,7 +2088,7 @@
           <a:lstStyle/>
           <a:p>
             <a:r>
-              <a:t>Briefly, the same analysis from the selector's side. By size, it is best on the hundred-customer instances — 71 percent within one percent of optimal selection — and weakest on the small ones; more geometric structure gives our features more to grab onto. By demand regime, high capacity pressure is clearly the hardest case — when vehicles are squeezed to the limit, solver behavior becomes hard to predict. And randomly placed depots are hardest by position, which fits the importance story we just saw: the model leans on depot geometry, and random placement is exactly where that signal is most variable.</a:t>
+              <a:t>Quickly, the same thing from the selector's point of view. By size: it does best on the hundred-customer instances and worst on the small ones — more structure gives our features more to work with. By demand type: tight capacity is the hardest case — when vehicles are full to the brim, solver behavior gets hard to predict. And random depot positions are the hardest — which fits what we just saw: the model leans on depot geometry, and random placement is where that signal moves around the most.</a:t>
             </a:r>
           </a:p>
         </p:txBody>
@@ -2158,7 +2158,7 @@
           <a:lstStyle/>
           <a:p>
             <a:r>
-              <a:t>Now the question every ML project must answer: does it generalize beyond its own data distribution? We evaluated the frozen selector — trained purely on synthetic instances — on 85 classic CVRPLIB benchmark instances from sets A, B, E and P, re-running the whole portfolio under the same budget and anchoring against the published proven optima. The honest answer: transfer is partial. The chart shows the within-one-percent rate per set — the selector beats the baseline everywhere, 53 versus 43 percent overall. But on mean regret the in-distribution edge largely fades: 1.84 versus 1.88 percent, m-hat essentially one. The paper reports the same phenomenon — stylized benchmark families are hard when you trained on randomized synthetic data. Two silver linings: the portfolio itself is strong on real data — its best solver averages under two percent above proven optima — and on the benchmark E-n51-k5 the selector picks exactly the right heuristic, landing 0.19 percent above the optimum in a sixth of a second.</a:t>
+              <a:t>Now the question every ML project has to face: does it work outside its own data? We took the frozen selector — trained only on synthetic data — and tested it on 85 classic CVRPLIB benchmark instances, sets A, B, E and P. Same budget, and we compared against the published optima. The honest answer: it transfers partly. The within-one-percent rate still clearly beats the baseline — 53 versus 43 percent, and better on every set, as the chart shows. But on mean regret, the edge mostly disappears: 1.84 versus 1.88 percent, m-hat basically one. The paper saw the same thing — these stylized benchmark families are hard if you trained on random synthetic data. Two good notes, though. The portfolio itself holds up on real data: its best solver is on average under two percent above the proven optima. And on E-n51-k5, the selector picks exactly the right heuristic — 0.19 percent above the optimum, in a sixth of a second.</a:t>
             </a:r>
           </a:p>
         </p:txBody>
@@ -2228,7 +2228,7 @@
           <a:lstStyle/>
           <a:p>
             <a:r>
-              <a:t>Final piece: an extension beyond the course requirements that puts the whole project in perspective. If we're willing to spend the entire twenty-second budget on one solver, what does that buy? We benchmarked PyVRP's hybrid genetic search — a state-of-the-art metaheuristic — on a stratified sample of 45 test instances plus the CVRPLIB benchmark. Results: HGS wins or ties the portfolio oracle on every single sampled instance, delivering on average 3.5 percent shorter routes than the ML-selected heuristic — and it finds the proven optimum on E-n51-k5. But it consumes the full twenty seconds, while the ML-selected heuristic answers in a fifth of a second — roughly ninety times less compute. This is exactly why HGS is not in the portfolio: as a label it would swallow the dataset. As a reference, it prices the trade-off cleanly. If you need real-time answers, or initial solutions to warm-start a bigger optimizer, the selector is the right tool. If you can afford twenty seconds per instance, just run HGS. Both answers are useful — they serve different operational regimes.</a:t>
+              <a:t>Last piece — an extension beyond the course requirements that puts everything in perspective. What if we spent the whole twenty-second budget on a single solver? We benchmarked PyVRP's hybrid genetic search on a stratified sample of 45 test instances, plus the benchmark. The result: HGS wins or ties our portfolio's oracle on every single instance. On average its routes are 3.5 percent shorter than the ML-selected heuristic's, and it even finds the proven optimum on E-n51-k5. But it uses the full twenty seconds — while our ML-selected heuristic answers in a fifth of a second. That's about ninety times less compute. And that's exactly why HGS is not in the portfolio: as a label it would swallow the whole dataset. As a reference, it prices the trade-off nicely. Need answers in real time, or starting points for a bigger optimizer? Use the selector. Can you afford twenty seconds per instance? Just run HGS. Different tools for different situations.</a:t>
             </a:r>
           </a:p>
         </p:txBody>
@@ -2298,7 +2298,7 @@
           <a:lstStyle/>
           <a:p>
             <a:r>
-              <a:t>Let us state the limitations as plainly as the results. The selector is trained on synthetic data, and on real benchmarks its regret advantage largely disappears — we showed you that rather than hiding it. Labels are the portfolio's best, not true optima — though the portfolio's best sits only about two percent above proven optima on real instances. The fixed budget bounds runtime but doesn't reward speed. And the exact baseline is a deliberately simple MTZ formulation under a free license. Against that: per-instance selection genuinely beats the single-best-solver baseline in distribution; cheap pre-solution features — above all depot geometry — carry real signal, and their importance ranking matches solver construction principles; every number in this talk comes from frozen, integrity-checked artifacts anyone can re-run; and the speed-quality trade-off is now measured, not asserted.</a:t>
+              <a:t>Let's be as plain about the limitations as about the results. We trained on synthetic data, and on real benchmarks the regret advantage mostly disappears — we showed you that instead of hiding it. Our labels are the portfolio's best, not true optima — though that best is only about two percent above the proven optima on real instances. The budget caps runtime but doesn't reward speed. And the exact baseline is a deliberately simple formulation on a free license. On the plus side: per-instance selection really does beat the single-best-solver baseline on our data. Cheap pre-solve features carry real signal — above all depot geometry and demand structure — and the importance ranking matches how the heuristics are built. Every number in this talk comes from frozen, integrity-checked results anyone can re-run. And the speed-quality trade-off is measured, not just claimed.</a:t>
             </a:r>
           </a:p>
         </p:txBody>
@@ -2368,7 +2368,7 @@
           <a:lstStyle/>
           <a:p>
             <a:r>
-              <a:t>To conclude in one sentence: look at the instance first, then pick the solver. Thirty-eight engineered features — above all depot geometry and demand structure, whose importance matched each heuristic's construction principle — turn five sixty-year-old heuristics into a meta-solver that beats the standard baseline, transfers — partially and honestly measured — to real benchmarks, and sits in a well-understood spot on the speed-quality spectrum: two hundred milliseconds for routes within about three and a half percent of what a modern genetic search buys with ninety times the compute. Exact where it proves, heuristic where it scales, learned where it chooses. Thank you — we're happy to take questions.</a:t>
+              <a:t>So, in one sentence: look at the instance first, then pick the solver. Thirty-eight engineered features — mainly depot geometry and demand structure, whose importance matched how each heuristic is built — turn five sixty-year-old heuristics into a meta-solver that beats the standard baseline, transfers partly — and honestly measured — to real benchmarks, and sits at a clear point on the speed-quality spectrum: a fifth of a second for routes within about three and a half percent of what a modern genetic search gets with ninety times the compute. Exact where it proves, heuristic where it scales, learned where it chooses. Thank you — we're happy to take questions.</a:t>
             </a:r>
           </a:p>
         </p:txBody>
@@ -2508,7 +2508,7 @@
           <a:lstStyle/>
           <a:p>
             <a:r>
-              <a:t>Backup: the paper tunes hyperparameters with a five-fold grid search; our headline experiment used fixed ones. We ran the paper-style search on the frozen training split as a supplement. All models' CV accuracies land within about one point of each other, and tuned test regrets straddle the frozen Random Forest's within noise — so the fixed choices were sound and the frozen results stand.</a:t>
+              <a:t>Backup: the paper tunes hyperparameters with a five-fold grid search; our main experiment used fixed ones. So we ran the paper-style search on the frozen training split afterwards. All models' CV accuracies end up within about one point of each other, and the tuned test regrets sit right around the frozen Random Forest's number. So the fixed settings were fine, and the frozen results stand.</a:t>
             </a:r>
           </a:p>
         </p:txBody>
@@ -2578,7 +2578,7 @@
           <a:lstStyle/>
           <a:p>
             <a:r>
-              <a:t>Let us set up the problem. In the capacitated vehicle routing problem we have a depot with a fleet of identical vehicles, each with capacity Q. Every customer has a demand and must be visited exactly once. Each route starts and ends at the depot, and the customers on a route can't exceed the vehicle's capacity. We minimize total travelled distance. The picture on the right shows the shape of a solution: the square is the depot and each colored loop is one vehicle's route. The problem is NP-hard — you're deciding simultaneously how to group customers and in which order to visit them — and in logistics practice you often need an answer in seconds. That tension between hardness and speed drives everything in this project.</a:t>
+              <a:t>Let's set up the problem first. In the capacitated vehicle routing problem, we have a depot with a fleet of identical vehicles, and each vehicle can carry at most Q. Every customer needs a certain amount and has to be visited exactly once. Each route starts and ends at the depot, and the customers on one route can't need more than the vehicle can carry. The goal: make the total driving distance as short as possible. The picture on the right shows what a solution looks like: the square is the depot, and each colored loop is one vehicle's route. The problem is NP-hard — you have to decide at the same time how to group customers and in what order to visit them. And in real logistics you often need an answer in seconds. So the problem is hard, but the answer has to come fast — that tension drives this whole project.</a:t>
             </a:r>
           </a:p>
         </p:txBody>
@@ -2648,7 +2648,7 @@
           <a:lstStyle/>
           <a:p>
             <a:r>
-              <a:t>Backup: the exact model. It's the classic two-index arc formulation. Binary arc variables, degree constraints, and continuous load variables that propagate along arcs — the load constraints kill subtours and enforce capacity in one stroke. Twenty customers give 440 binary variables; the free license caps at two thousand, which is why the 51-customer benchmark can't be solved exactly here.</a:t>
+              <a:t>Backup: the exact model. It's the classic two-index formulation. Binary arc variables, degree constraints, and continuous load variables that grow along each route — those load constraints kill subtours and enforce capacity in one go. Twenty customers means 440 binary variables; the free license caps out at two thousand, and that's why the 51-customer benchmark can't be solved exactly here.</a:t>
             </a:r>
           </a:p>
         </p:txBody>
@@ -2718,7 +2718,7 @@
           <a:lstStyle/>
           <a:p>
             <a:r>
-              <a:t>Backup: protocol fine print — budget and tie-breaking rules, the integrity checks that guard the frozen artifacts, and the pinned environment. Useful for reproducibility questions.</a:t>
+              <a:t>Backup: the fine print — budget and tie-breaking rules, the integrity checks that protect the frozen results, and the pinned software versions. Useful for reproducibility questions.</a:t>
             </a:r>
           </a:p>
         </p:txBody>
@@ -2788,7 +2788,7 @@
           <a:lstStyle/>
           <a:p>
             <a:r>
-              <a:t>First requirement of the project: introduce the problem by solving instances exactly with gurobipy and heuristically. We modelled CVRP as a mixed-integer program — a two-index arc formulation with load variables that propagate along routes, which eliminates subtours and enforces capacity at the same time. The result is sobering. With six customers, Gurobi proves the optimum in a hundredth of a second and all five heuristics match it. At twenty customers, after five full minutes Gurobi still cannot prove optimality — up to a two percent gap remains open — while the heuristics match or nearly match its best solution in under four hundredths of a second. And at fifty-one customers, the model no longer even fits the free license. So exact solving gives us trustworthy reference points on small instances, but the real work has to be done by fast heuristics. The question becomes: which one?</a:t>
+              <a:t>The first task in the project was to introduce the problem by solving instances exactly with gurobipy, and with heuristics. We wrote the CVRP as a mixed-integer program — a two-index formulation where load variables grow along each route. That trick removes subtours and enforces capacity at the same time. And the results are pretty humbling. With six customers, Gurobi proves the optimum in a hundredth of a second, and all five heuristics find the same solution. With twenty customers, Gurobi runs for five full minutes and still can't prove it's optimal — up to a two percent gap stays open. The heuristics get the same or almost the same answer in under four hundredths of a second. And with fifty-one customers, the model doesn't even fit into the free license anymore. So exact solving gives us reliable reference points on small instances, but the real work has to be done by fast heuristics. Which brings up the question: which one?</a:t>
             </a:r>
           </a:p>
         </p:txBody>
@@ -2858,7 +2858,7 @@
           <a:lstStyle/>
           <a:p>
             <a:r>
-              <a:t>Here is the core empirical fact that motivates the whole project. We ran five classical heuristics on all 1,260 instances of our dataset and asked: which one is best, per instance? The answer: it depends. Route-first cluster-second wins about a quarter of the time, Clarke-Wright with 2-opt another quarter, Mole-Jameson a fifth — even the weakest, the CMT two-phase method, still wins nearly one instance in ten. No solver dominates, and picking wrongly can cost up to nineteen percent extra route length. Which solver wins depends on the geometry of the instance, where the depot sits, and how demands are structured. This is exactly the situation the algorithm-selection literature addresses: don't pick one solver for all instances — learn a model that predicts the winner for each instance. That is the approach of the paper this project follows.</a:t>
+              <a:t>Here's the fact that motivates everything. We ran five classical heuristics on all 1,260 instances in our dataset and asked: which one is best on each instance? The answer: it depends. Route-first-cluster-second wins about a quarter of the time. Clarke-Wright another quarter. Mole-Jameson about a fifth. Even the weakest one still wins almost one instance in ten. So no solver dominates. And if you pick the wrong one, it can cost you up to nineteen percent extra driving distance. Which solver wins depends on how the instance looks — the geometry, where the depot is, how the demands are spread. And this is exactly what the algorithm-selection literature says: don't pick one solver for everything — learn a model that predicts the winner for each instance. That's the approach of the paper we follow.</a:t>
             </a:r>
           </a:p>
         </p:txBody>
@@ -2928,7 +2928,7 @@
           <a:lstStyle/>
           <a:p>
             <a:r>
-              <a:t>So here is the proposed solution as a pipeline. A new instance comes in. We extract thirty-eight cheap features — statistics you can compute before any solving. A trained Random Forest looks at those features and predicts which portfolio heuristic will win. We run only that heuristic, and we get routes back in about a fifth of a second on average. Four design choices matter. First, every solver runs under the same fixed twenty-second budget, so the training label literally means best solution within the budget, with cost ties broken toward the faster solver. Second, strict leakage discipline: features are pre-solution only, enforced by an explicit blocklist in code. Third, algorithm configuration — the same heuristic with different settings — just becomes separate portfolio entries, which is the discretized version of what the paper does. And fourth, if the predicted solver ever fails, we fall back to the single best solver, so the meta-solver never returns nothing.</a:t>
+              <a:t>So here's our solution as a pipeline. A new instance comes in. We compute thirty-eight cheap features — statistics you can get before doing any solving. A trained Random Forest looks at them and predicts which heuristic will win. We run only that one, and we get routes back in about a fifth of a second on average. Four design choices matter here. First, every solver runs under the same fixed twenty-second budget. So the training label really means “best solution within the budget”, and if two solvers tie on cost, the faster one wins. Second, no leakage: features only use information that's available before solving, and a blocklist in the code enforces that. Third, different settings of the same heuristic just become separate entries in the portfolio — that's the simplified version of what the paper calls algorithm configuration. And fourth, if the predicted solver ever fails, we fall back to the single best solver. So the meta-solver always returns something.</a:t>
             </a:r>
           </a:p>
         </p:txBody>
@@ -2998,7 +2998,7 @@
           <a:lstStyle/>
           <a:p>
             <a:r>
-              <a:t>The portfolio itself: five classical construction heuristics from the VeRyPy library, spanning the classic families — savings, sweep, insertion, two-phase clustering, and route-first-cluster-second. We use a pinned library commit, and every solution any solver returns is independently re-validated and re-costed by our own code, so no library quirk can leak into the labels. Two things are deliberately missing. Gaskell's savings variant was audited but won only three of 240 development instances — a class with three examples is not learnable, so it stayed out. And there is no genetic algorithm in the portfolio. That is not an oversight: a modern hybrid genetic search would win nearly every instance at this budget, the label distribution would collapse into one class, and there would be nothing left to learn. We benchmark it separately as a reference point, and we'll show you exactly what it buys at the end.</a:t>
+              <a:t>Here's the portfolio: five classical construction heuristics from the VeRyPy library. They cover the classic families — savings, sweep, insertion, two-phase clustering, and route-first-cluster-second. We pinned the library to one fixed commit, and every solution that comes back gets re-checked and re-costed by our own code, so no library quirk can sneak into the labels. Two things are missing on purpose. Gaskell's savings variant won only 3 out of 240 instances in our audit — you can't learn a class from three examples. And there's no genetic algorithm in here. That's not an oversight: a modern hybrid genetic search would win almost every instance at this budget, the labels would collapse into one class, and there'd be nothing left to learn. We benchmark it separately instead — we'll show you at the end exactly what it buys.</a:t>
             </a:r>
           </a:p>
         </p:txBody>
@@ -3068,7 +3068,7 @@
           <a:lstStyle/>
           <a:p>
             <a:r>
-              <a:t>Where does training data come from? Following the paper, we generate it synthetically, with the explicit goal of spanning as much instance variation as possible. It's a balanced factorial design: five spatial families — from uniform scatter to tight clusters to ring shapes — times three depot positions, times four demand regimes, times three sizes, times seven random seeds. That gives 1,260 instances and 6,300 timed solver runs; exactly one run ever exceeded the twenty-second budget. Each instance is labelled with the solver that produced the lowest feasible cost within the budget. We split them into 1,008 training and 252 test instances, stratified by label and disjoint by construction. And everything is reproducible — every instance can be regenerated from a stable ID, and the generation manifests are stored next to the results.</a:t>
+              <a:t>Where does the training data come from? Like the paper, we generate it ourselves, and the goal is to cover as much variety as possible. It's a balanced grid: five spatial patterns — from uniform scatter to tight clusters to rings — times three depot positions, times four demand types, times three sizes, times seven random seeds. That's 1,260 instances and 6,300 timed solver runs. Exactly one run ever went over the budget. Each instance gets labelled with the solver that found the cheapest feasible solution within 20 seconds. Then we split: 1,008 for training, 252 for testing, stratified by label, with no overlap. And it's all reproducible — every instance can be regenerated from a stable ID, and the generation settings are saved right next to the results.</a:t>
             </a:r>
           </a:p>
         </p:txBody>
@@ -3138,7 +3138,7 @@
           <a:lstStyle/>
           <a:p>
             <a:r>
-              <a:t>What does the model actually see? Thirty-eight features in five groups, all computable from the raw instance in milliseconds. We engineered them around three hypotheses about what drives solver performance. First: demand structure — how large and how uneven the demands are, and how tightly they squeeze into the fleet; we capture that with capacity pressure and the demand distribution statistics. Second: depot geometry — how central the depot sits relative to the customers, plus the paper's signature feature, ring occupancy: the share of customers in five concentric rings around the depot. Third: overall customer geometry and instance size. Just as important is what the model does not see. Solver outcomes, labels, seeds, generator categories — all blocked by explicit checks; the pipeline throws an error if a prohibited column shows up. So the classifier learns instance characteristics, not leaked answers. Whether our three hypotheses were actually right is what the next two slides test.</a:t>
+              <a:t>So what does the model actually see? Thirty-eight features in five groups, all computable in milliseconds. We built them around three guesses about what drives solver performance. Guess one: demand structure — how big the demands are, how uneven they are, and how tightly they fill the fleet. We capture that with capacity pressure and demand statistics. Guess two: depot geometry — how central the depot sits, plus the paper's signature feature, ring occupancy: the share of customers in five rings around the depot. Guess three: overall customer layout and instance size. Just as important is what the model does not see. Solver results, labels, seeds, generator categories — all blocked. The code throws an error if a forbidden column shows up. So the model learns instance characteristics, not leaked answers. Were our three guesses right? That's what the next two slides check.</a:t>
             </a:r>
           </a:p>
         </p:txBody>
@@ -3208,7 +3208,7 @@
           <a:lstStyle/>
           <a:p>
             <a:r>
-              <a:t>Before the results, thirty seconds on how selectors are measured, because the field has two standard baselines. The Single Best Solver, SBS, is the one solver that's best on average on the training set — here that's Mole-Jameson insertion. That's what you would deploy if you had no machine learning at all, so it's the baseline to beat. The Virtual Best Solver, VBS, is an oracle that picks the true winner on every single instance — perfect selection, the ceiling. The paper's normalized metric m-hat places a selector on the line between them: zero means you select like the oracle, one means you're no better than the no-ML baseline. Our selector lands at 0.741 — we'll unpack that on the next slide. We also report regret — how many percent the selected solver's route is above the per-instance best — and the share of instances landing within one percent of that best.</a:t>
+              <a:t>Before the results, thirty seconds on how you measure a selector, because the field has two standard baselines. The Single Best Solver, SBS, is the one solver that's best on average on the training data — for us that's Mole-Jameson insertion. That's what you'd use without any machine learning, so that's the bar to beat. The Virtual Best Solver, VBS, is an oracle that picks the true winner on every single instance. Perfect selection — that's the ceiling. The paper's metric m-hat tells you where a selector sits between the two: zero means you pick like the oracle, one means you're no better than the baseline. Our selector lands at 0.741 — let's unpack that now. We also report regret — how many percent the chosen solver's route is above the best possible — and how often we land within one percent of it.</a:t>
             </a:r>
           </a:p>
         </p:txBody>
